--- a/decks/Immuno_04_Allergy-Immunodeficiency-Protein-Testing.pptx
+++ b/decks/Immuno_04_Allergy-Immunodeficiency-Protein-Testing.pptx
@@ -26,9 +26,12 @@
     <p:sldId id="274" r:id="rId20"/>
     <p:sldId id="275" r:id="rId21"/>
     <p:sldId id="276" r:id="rId22"/>
+    <p:sldId id="277" r:id="rId23"/>
+    <p:sldId id="278" r:id="rId24"/>
+    <p:sldId id="279" r:id="rId25"/>
   </p:sldIdLst>
   <p:notesMasterIdLst>
-    <p:notesMasterId r:id="rId23"/>
+    <p:notesMasterId r:id="rId26"/>
   </p:notesMasterIdLst>
   <p:sldSz cx="12191695" cy="6858000"/>
   <p:notesSz cx="6858000" cy="12191695"/>
@@ -1690,6 +1693,270 @@
             <a:fld id="{F7021451-1387-4CA6-816F-3879F97B5CBC}" type="slidenum">
               <a:rPr lang="en-US"/>
               <a:t>21</a:t>
+            </a:fld>
+            <a:endParaRPr lang="en-US"/>
+          </a:p>
+        </p:txBody>
+      </p:sp>
+    </p:spTree>
+    <p:extLst>
+      <p:ext uri="{BB962C8B-B14F-4D97-AF65-F5344CB8AC3E}">
+        <p14:creationId xmlns:p14="http://schemas.microsoft.com/office/powerpoint/2010/main" val="1024086991"/>
+      </p:ext>
+    </p:extLst>
+  </p:cSld>
+  <p:clrMapOvr>
+    <a:masterClrMapping/>
+  </p:clrMapOvr>
+</p:notes>
+</file>
+
+<file path=ppt/notesSlides/notesSlide22.xml><?xml version="1.0" encoding="utf-8"?>
+<p:notes xmlns:a="http://schemas.openxmlformats.org/drawingml/2006/main" xmlns:r="http://schemas.openxmlformats.org/officeDocument/2006/relationships" xmlns:p="http://schemas.openxmlformats.org/presentationml/2006/main">
+  <p:cSld>
+    <p:spTree>
+      <p:nvGrpSpPr>
+        <p:cNvPr id="1" name=""/>
+        <p:cNvGrpSpPr/>
+        <p:nvPr/>
+      </p:nvGrpSpPr>
+      <p:grpSpPr>
+        <a:xfrm>
+          <a:off x="0" y="0"/>
+          <a:ext cx="0" cy="0"/>
+          <a:chOff x="0" y="0"/>
+          <a:chExt cx="0" cy="0"/>
+        </a:xfrm>
+      </p:grpSpPr>
+      <p:sp>
+        <p:nvSpPr>
+          <p:cNvPr id="2" name="Slide Image Placeholder 1"/>
+          <p:cNvSpPr>
+            <a:spLocks noGrp="1" noRot="1" noChangeAspect="1"/>
+          </p:cNvSpPr>
+          <p:nvPr>
+            <p:ph type="sldImg"/>
+          </p:nvPr>
+        </p:nvSpPr>
+        <p:spPr/>
+      </p:sp>
+      <p:sp>
+        <p:nvSpPr>
+          <p:cNvPr id="3" name="Notes Placeholder 2"/>
+          <p:cNvSpPr>
+            <a:spLocks noGrp="1"/>
+          </p:cNvSpPr>
+          <p:nvPr>
+            <p:ph type="body" idx="1"/>
+          </p:nvPr>
+        </p:nvSpPr>
+        <p:spPr/>
+        <p:txBody>
+          <a:bodyPr/>
+          <a:lstStyle/>
+          <a:p>
+            <a:r>
+              <a:rPr lang="en-US" dirty="0"/>
+              <a:t/>
+            </a:r>
+            <a:endParaRPr lang="en-US" dirty="0"/>
+          </a:p>
+        </p:txBody>
+      </p:sp>
+      <p:sp>
+        <p:nvSpPr>
+          <p:cNvPr id="4" name="Slide Number Placeholder 3"/>
+          <p:cNvSpPr>
+            <a:spLocks noGrp="1"/>
+          </p:cNvSpPr>
+          <p:nvPr>
+            <p:ph type="sldNum" sz="quarter" idx="10"/>
+          </p:nvPr>
+        </p:nvSpPr>
+        <p:spPr/>
+        <p:txBody>
+          <a:bodyPr/>
+          <a:lstStyle/>
+          <a:p>
+            <a:fld id="{F7021451-1387-4CA6-816F-3879F97B5CBC}" type="slidenum">
+              <a:rPr lang="en-US"/>
+              <a:t>22</a:t>
+            </a:fld>
+            <a:endParaRPr lang="en-US"/>
+          </a:p>
+        </p:txBody>
+      </p:sp>
+    </p:spTree>
+    <p:extLst>
+      <p:ext uri="{BB962C8B-B14F-4D97-AF65-F5344CB8AC3E}">
+        <p14:creationId xmlns:p14="http://schemas.microsoft.com/office/powerpoint/2010/main" val="1024086991"/>
+      </p:ext>
+    </p:extLst>
+  </p:cSld>
+  <p:clrMapOvr>
+    <a:masterClrMapping/>
+  </p:clrMapOvr>
+</p:notes>
+</file>
+
+<file path=ppt/notesSlides/notesSlide23.xml><?xml version="1.0" encoding="utf-8"?>
+<p:notes xmlns:a="http://schemas.openxmlformats.org/drawingml/2006/main" xmlns:r="http://schemas.openxmlformats.org/officeDocument/2006/relationships" xmlns:p="http://schemas.openxmlformats.org/presentationml/2006/main">
+  <p:cSld>
+    <p:spTree>
+      <p:nvGrpSpPr>
+        <p:cNvPr id="1" name=""/>
+        <p:cNvGrpSpPr/>
+        <p:nvPr/>
+      </p:nvGrpSpPr>
+      <p:grpSpPr>
+        <a:xfrm>
+          <a:off x="0" y="0"/>
+          <a:ext cx="0" cy="0"/>
+          <a:chOff x="0" y="0"/>
+          <a:chExt cx="0" cy="0"/>
+        </a:xfrm>
+      </p:grpSpPr>
+      <p:sp>
+        <p:nvSpPr>
+          <p:cNvPr id="2" name="Slide Image Placeholder 1"/>
+          <p:cNvSpPr>
+            <a:spLocks noGrp="1" noRot="1" noChangeAspect="1"/>
+          </p:cNvSpPr>
+          <p:nvPr>
+            <p:ph type="sldImg"/>
+          </p:nvPr>
+        </p:nvSpPr>
+        <p:spPr/>
+      </p:sp>
+      <p:sp>
+        <p:nvSpPr>
+          <p:cNvPr id="3" name="Notes Placeholder 2"/>
+          <p:cNvSpPr>
+            <a:spLocks noGrp="1"/>
+          </p:cNvSpPr>
+          <p:nvPr>
+            <p:ph type="body" idx="1"/>
+          </p:nvPr>
+        </p:nvSpPr>
+        <p:spPr/>
+        <p:txBody>
+          <a:bodyPr/>
+          <a:lstStyle/>
+          <a:p>
+            <a:r>
+              <a:rPr lang="en-US" dirty="0"/>
+              <a:t/>
+            </a:r>
+            <a:endParaRPr lang="en-US" dirty="0"/>
+          </a:p>
+        </p:txBody>
+      </p:sp>
+      <p:sp>
+        <p:nvSpPr>
+          <p:cNvPr id="4" name="Slide Number Placeholder 3"/>
+          <p:cNvSpPr>
+            <a:spLocks noGrp="1"/>
+          </p:cNvSpPr>
+          <p:nvPr>
+            <p:ph type="sldNum" sz="quarter" idx="10"/>
+          </p:nvPr>
+        </p:nvSpPr>
+        <p:spPr/>
+        <p:txBody>
+          <a:bodyPr/>
+          <a:lstStyle/>
+          <a:p>
+            <a:fld id="{F7021451-1387-4CA6-816F-3879F97B5CBC}" type="slidenum">
+              <a:rPr lang="en-US"/>
+              <a:t>23</a:t>
+            </a:fld>
+            <a:endParaRPr lang="en-US"/>
+          </a:p>
+        </p:txBody>
+      </p:sp>
+    </p:spTree>
+    <p:extLst>
+      <p:ext uri="{BB962C8B-B14F-4D97-AF65-F5344CB8AC3E}">
+        <p14:creationId xmlns:p14="http://schemas.microsoft.com/office/powerpoint/2010/main" val="1024086991"/>
+      </p:ext>
+    </p:extLst>
+  </p:cSld>
+  <p:clrMapOvr>
+    <a:masterClrMapping/>
+  </p:clrMapOvr>
+</p:notes>
+</file>
+
+<file path=ppt/notesSlides/notesSlide24.xml><?xml version="1.0" encoding="utf-8"?>
+<p:notes xmlns:a="http://schemas.openxmlformats.org/drawingml/2006/main" xmlns:r="http://schemas.openxmlformats.org/officeDocument/2006/relationships" xmlns:p="http://schemas.openxmlformats.org/presentationml/2006/main">
+  <p:cSld>
+    <p:spTree>
+      <p:nvGrpSpPr>
+        <p:cNvPr id="1" name=""/>
+        <p:cNvGrpSpPr/>
+        <p:nvPr/>
+      </p:nvGrpSpPr>
+      <p:grpSpPr>
+        <a:xfrm>
+          <a:off x="0" y="0"/>
+          <a:ext cx="0" cy="0"/>
+          <a:chOff x="0" y="0"/>
+          <a:chExt cx="0" cy="0"/>
+        </a:xfrm>
+      </p:grpSpPr>
+      <p:sp>
+        <p:nvSpPr>
+          <p:cNvPr id="2" name="Slide Image Placeholder 1"/>
+          <p:cNvSpPr>
+            <a:spLocks noGrp="1" noRot="1" noChangeAspect="1"/>
+          </p:cNvSpPr>
+          <p:nvPr>
+            <p:ph type="sldImg"/>
+          </p:nvPr>
+        </p:nvSpPr>
+        <p:spPr/>
+      </p:sp>
+      <p:sp>
+        <p:nvSpPr>
+          <p:cNvPr id="3" name="Notes Placeholder 2"/>
+          <p:cNvSpPr>
+            <a:spLocks noGrp="1"/>
+          </p:cNvSpPr>
+          <p:nvPr>
+            <p:ph type="body" idx="1"/>
+          </p:nvPr>
+        </p:nvSpPr>
+        <p:spPr/>
+        <p:txBody>
+          <a:bodyPr/>
+          <a:lstStyle/>
+          <a:p>
+            <a:r>
+              <a:rPr lang="en-US" dirty="0"/>
+              <a:t/>
+            </a:r>
+            <a:endParaRPr lang="en-US" dirty="0"/>
+          </a:p>
+        </p:txBody>
+      </p:sp>
+      <p:sp>
+        <p:nvSpPr>
+          <p:cNvPr id="4" name="Slide Number Placeholder 3"/>
+          <p:cNvSpPr>
+            <a:spLocks noGrp="1"/>
+          </p:cNvSpPr>
+          <p:nvPr>
+            <p:ph type="sldNum" sz="quarter" idx="10"/>
+          </p:nvPr>
+        </p:nvSpPr>
+        <p:spPr/>
+        <p:txBody>
+          <a:bodyPr/>
+          <a:lstStyle/>
+          <a:p>
+            <a:fld id="{F7021451-1387-4CA6-816F-3879F97B5CBC}" type="slidenum">
+              <a:rPr lang="en-US"/>
+              <a:t>24</a:t>
             </a:fld>
             <a:endParaRPr lang="en-US"/>
           </a:p>
@@ -2854,7 +3121,7 @@
                 <a:ea typeface="Calibri" pitchFamily="34" charset="-122"/>
                 <a:cs typeface="Calibri" pitchFamily="34" charset="-120"/>
               </a:rPr>
-              <a:t>Allergy, Immunodeficiency &amp; Protein-Based Immune Testing</a:t>
+              <a:t>Allergy, Immunodeficiency &amp; Protein Testing</a:t>
             </a:r>
             <a:endParaRPr lang="en-US" sz="4600" dirty="0"/>
           </a:p>
@@ -2893,7 +3160,7 @@
                 <a:ea typeface="Calibri" pitchFamily="34" charset="-122"/>
                 <a:cs typeface="Calibri" pitchFamily="34" charset="-120"/>
               </a:rPr>
-              <a:t>Immunoglobulins, Specific IgE, Complement, and Targeted Workups</a:t>
+              <a:t>IgE Testing, Tiered Immune Workup, and Immunoglobulin Evaluation</a:t>
             </a:r>
             <a:endParaRPr lang="en-US" sz="1900" dirty="0"/>
           </a:p>
@@ -3085,7 +3352,7 @@
                 <a:ea typeface="Calibri" pitchFamily="34" charset="-122"/>
                 <a:cs typeface="Calibri" pitchFamily="34" charset="-120"/>
               </a:rPr>
-              <a:t>IMMUNOLOGY &amp; SEROLOGY   ·   COMPLEMENT</a:t>
+              <a:t>IMMUNOLOGY &amp; SEROLOGY   ·   IMMUNODEFICIENCY</a:t>
             </a:r>
             <a:endParaRPr lang="en-US" sz="1100" dirty="0"/>
           </a:p>
@@ -3124,7 +3391,7 @@
                 <a:ea typeface="Calibri" pitchFamily="34" charset="-122"/>
                 <a:cs typeface="Calibri" pitchFamily="34" charset="-120"/>
               </a:rPr>
-              <a:t>Interpreting Complement Tests</a:t>
+              <a:t>Working Up the Immune System</a:t>
             </a:r>
             <a:endParaRPr lang="en-US" sz="3000" dirty="0"/>
           </a:p>
@@ -3192,7 +3459,7 @@
                 <a:ea typeface="Calibri" pitchFamily="34" charset="-122"/>
                 <a:cs typeface="Calibri" pitchFamily="34" charset="-120"/>
               </a:rPr>
-              <a:t>C3, C4, CH50</a:t>
+              <a:t>SCREEN AND FUNCTION</a:t>
             </a:r>
             <a:endParaRPr lang="en-US" sz="1200" dirty="0"/>
           </a:p>
@@ -3235,7 +3502,7 @@
                 <a:ea typeface="Calibri" pitchFamily="34" charset="-122"/>
                 <a:cs typeface="Calibri" pitchFamily="34" charset="-120"/>
               </a:rPr>
-              <a:t>Low C3 and/or C4 indicate consumption (e.g., active SLE, immune-complex disease) or deficiency.</a:t>
+              <a:t>Start with CBC/differential, quantitative immunoglobulins, and HIV.</a:t>
             </a:r>
             <a:endParaRPr lang="en-US" sz="1250" dirty="0"/>
           </a:p>
@@ -3256,7 +3523,7 @@
                 <a:ea typeface="Calibri" pitchFamily="34" charset="-122"/>
                 <a:cs typeface="Calibri" pitchFamily="34" charset="-120"/>
               </a:rPr>
-              <a:t>CH50 screens the classical pathway; a near-zero CH50 suggests a component deficiency.</a:t>
+              <a:t>Assess function with vaccine-response (antibody) titers.</a:t>
             </a:r>
             <a:endParaRPr lang="en-US" sz="1250" dirty="0"/>
           </a:p>
@@ -3277,7 +3544,7 @@
                 <a:ea typeface="Calibri" pitchFamily="34" charset="-122"/>
                 <a:cs typeface="Calibri" pitchFamily="34" charset="-120"/>
               </a:rPr>
-              <a:t>AH50 screens the alternative pathway.</a:t>
+              <a:t>Lymphocyte subsets (flow cytometry) evaluate cellular immunity.</a:t>
             </a:r>
             <a:endParaRPr lang="en-US" sz="1250" dirty="0"/>
           </a:p>
@@ -3298,7 +3565,7 @@
                 <a:ea typeface="Calibri" pitchFamily="34" charset="-122"/>
                 <a:cs typeface="Calibri" pitchFamily="34" charset="-120"/>
               </a:rPr>
-              <a:t>Trend complement with disease activity in lupus.</a:t>
+              <a:t>Complement (CH50/AH50) for suspected complement defects.</a:t>
             </a:r>
             <a:endParaRPr lang="en-US" sz="1250" dirty="0"/>
           </a:p>
@@ -3321,7 +3588,7 @@
             </a:avLst>
           </a:prstGeom>
           <a:solidFill>
-            <a:srgbClr val="F1E8F7"/>
+            <a:srgbClr val="F1E9F7"/>
           </a:solidFill>
           <a:ln/>
           <a:effectLst>
@@ -3366,7 +3633,7 @@
                 <a:ea typeface="Calibri" pitchFamily="34" charset="-122"/>
                 <a:cs typeface="Calibri" pitchFamily="34" charset="-120"/>
               </a:rPr>
-              <a:t>COMPLEMENT DEFICIENCY</a:t>
+              <a:t>WHEN TO ESCALATE</a:t>
             </a:r>
             <a:endParaRPr lang="en-US" sz="1200" dirty="0"/>
           </a:p>
@@ -3409,7 +3676,7 @@
                 <a:ea typeface="Calibri" pitchFamily="34" charset="-122"/>
                 <a:cs typeface="Calibri" pitchFamily="34" charset="-120"/>
               </a:rPr>
-              <a:t>Terminal complement (C5–C9) deficiency predisposes to recurrent Neisseria infections.</a:t>
+              <a:t>Recurrent, severe, or unusual infections warrant a structured workup.</a:t>
             </a:r>
             <a:endParaRPr lang="en-US" sz="1250" dirty="0"/>
           </a:p>
@@ -3430,7 +3697,7 @@
                 <a:ea typeface="Calibri" pitchFamily="34" charset="-122"/>
                 <a:cs typeface="Calibri" pitchFamily="34" charset="-120"/>
               </a:rPr>
-              <a:t>Early-component deficiencies associate with lupus-like disease.</a:t>
+              <a:t>Advanced functional and genetic testing for confirmed defects.</a:t>
             </a:r>
             <a:endParaRPr lang="en-US" sz="1250" dirty="0"/>
           </a:p>
@@ -3451,7 +3718,7 @@
                 <a:ea typeface="Calibri" pitchFamily="34" charset="-122"/>
                 <a:cs typeface="Calibri" pitchFamily="34" charset="-120"/>
               </a:rPr>
-              <a:t>C1 inhibitor deficiency causes hereditary angioedema (low C4).</a:t>
+              <a:t>Refer to clinical immunology for management.</a:t>
             </a:r>
             <a:endParaRPr lang="en-US" sz="1250" dirty="0"/>
           </a:p>
@@ -3472,7 +3739,7 @@
                 <a:ea typeface="Calibri" pitchFamily="34" charset="-122"/>
                 <a:cs typeface="Calibri" pitchFamily="34" charset="-120"/>
               </a:rPr>
-              <a:t>Confirm suspected deficiencies with functional and component assays.</a:t>
+              <a:t>Interpret in the context of age and infection pattern.</a:t>
             </a:r>
             <a:endParaRPr lang="en-US" sz="1250" dirty="0"/>
           </a:p>
@@ -3649,7 +3916,7 @@
                 <a:ea typeface="Calibri" pitchFamily="34" charset="-122"/>
                 <a:cs typeface="Calibri" pitchFamily="34" charset="-120"/>
               </a:rPr>
-              <a:t>IMMUNOLOGY &amp; SEROLOGY   ·   WORKUP</a:t>
+              <a:t>IMMUNOLOGY &amp; SEROLOGY   ·   PROTEIN</a:t>
             </a:r>
             <a:endParaRPr lang="en-US" sz="1100" dirty="0"/>
           </a:p>
@@ -3688,7 +3955,7 @@
                 <a:ea typeface="Calibri" pitchFamily="34" charset="-122"/>
                 <a:cs typeface="Calibri" pitchFamily="34" charset="-120"/>
               </a:rPr>
-              <a:t>A Targeted Immunodeficiency Workup</a:t>
+              <a:t>Immunoglobulins &amp; Electrophoresis</a:t>
             </a:r>
             <a:endParaRPr lang="en-US" sz="3000" dirty="0"/>
           </a:p>
@@ -3756,7 +4023,7 @@
                 <a:ea typeface="Calibri" pitchFamily="34" charset="-122"/>
                 <a:cs typeface="Calibri" pitchFamily="34" charset="-120"/>
               </a:rPr>
-              <a:t>STEPWISE APPROACH</a:t>
+              <a:t>QUANTITATIVE IG &amp; SPEP</a:t>
             </a:r>
             <a:endParaRPr lang="en-US" sz="1200" dirty="0"/>
           </a:p>
@@ -3799,7 +4066,7 @@
                 <a:ea typeface="Calibri" pitchFamily="34" charset="-122"/>
                 <a:cs typeface="Calibri" pitchFamily="34" charset="-120"/>
               </a:rPr>
-              <a:t>Start with quantitative immunoglobulins and a CBC with differential.</a:t>
+              <a:t>Quantitative IgG/IgA/IgM define hypo- or hypergammaglobulinemia.</a:t>
             </a:r>
             <a:endParaRPr lang="en-US" sz="1250" dirty="0"/>
           </a:p>
@@ -3820,7 +4087,7 @@
                 <a:ea typeface="Calibri" pitchFamily="34" charset="-122"/>
                 <a:cs typeface="Calibri" pitchFamily="34" charset="-120"/>
               </a:rPr>
-              <a:t>Assess specific antibody responses to vaccines (pneumococcal, tetanus) — the key functional test of humoral immunity.</a:t>
+              <a:t>SPEP shows a polyclonal rise (infection/inflammation) vs a monoclonal spike.</a:t>
             </a:r>
             <a:endParaRPr lang="en-US" sz="1250" dirty="0"/>
           </a:p>
@@ -3841,7 +4108,7 @@
                 <a:ea typeface="Calibri" pitchFamily="34" charset="-122"/>
                 <a:cs typeface="Calibri" pitchFamily="34" charset="-120"/>
               </a:rPr>
-              <a:t>Add complement (CH50/AH50) and, if indicated, lymphocyte subsets/function.</a:t>
+              <a:t>Hypogammaglobulinemia may signal antibody deficiency or light-chain disease.</a:t>
             </a:r>
             <a:endParaRPr lang="en-US" sz="1250" dirty="0"/>
           </a:p>
@@ -3862,7 +4129,7 @@
                 <a:ea typeface="Calibri" pitchFamily="34" charset="-122"/>
                 <a:cs typeface="Calibri" pitchFamily="34" charset="-120"/>
               </a:rPr>
-              <a:t>Match the workup to the infection pattern (encapsulated bacteria, opportunists, etc.).</a:t>
+              <a:t>A discrete spike → reflex immunofixation.</a:t>
             </a:r>
             <a:endParaRPr lang="en-US" sz="1250" dirty="0"/>
           </a:p>
@@ -3885,7 +4152,7 @@
             </a:avLst>
           </a:prstGeom>
           <a:solidFill>
-            <a:srgbClr val="F1E8F7"/>
+            <a:srgbClr val="F1E9F7"/>
           </a:solidFill>
           <a:ln/>
           <a:effectLst>
@@ -3930,7 +4197,7 @@
                 <a:ea typeface="Calibri" pitchFamily="34" charset="-122"/>
                 <a:cs typeface="Calibri" pitchFamily="34" charset="-120"/>
               </a:rPr>
-              <a:t>VACCINE-RESPONSE TESTING</a:t>
+              <a:t>IFE &amp; FREE LIGHT CHAINS</a:t>
             </a:r>
             <a:endParaRPr lang="en-US" sz="1200" dirty="0"/>
           </a:p>
@@ -3973,7 +4240,7 @@
                 <a:ea typeface="Calibri" pitchFamily="34" charset="-122"/>
                 <a:cs typeface="Calibri" pitchFamily="34" charset="-120"/>
               </a:rPr>
-              <a:t>Measure baseline then post-vaccination titers (e.g., pneumococcal polysaccharide) to assess functional antibody production.</a:t>
+              <a:t>Immunofixation types a monoclonal protein; serum free light chains detect light-chain-only disease.</a:t>
             </a:r>
             <a:endParaRPr lang="en-US" sz="1250" dirty="0"/>
           </a:p>
@@ -3994,7 +4261,7 @@
                 <a:ea typeface="Calibri" pitchFamily="34" charset="-122"/>
                 <a:cs typeface="Calibri" pitchFamily="34" charset="-120"/>
               </a:rPr>
-              <a:t>A poor response supports a specific antibody deficiency even when total Ig is normal.</a:t>
+              <a:t>Interpret SPEP/IFE/FLC together (department teaching, D. Keren).</a:t>
             </a:r>
             <a:endParaRPr lang="en-US" sz="1250" dirty="0"/>
           </a:p>
@@ -4015,7 +4282,7 @@
                 <a:ea typeface="Calibri" pitchFamily="34" charset="-122"/>
                 <a:cs typeface="Calibri" pitchFamily="34" charset="-120"/>
               </a:rPr>
-              <a:t>Interpret with age-appropriate references.</a:t>
+              <a:t>Distinguish CVID-type deficiency from clonal disease.</a:t>
             </a:r>
             <a:endParaRPr lang="en-US" sz="1250" dirty="0"/>
           </a:p>
@@ -4036,7 +4303,7 @@
                 <a:ea typeface="Calibri" pitchFamily="34" charset="-122"/>
                 <a:cs typeface="Calibri" pitchFamily="34" charset="-120"/>
               </a:rPr>
-              <a:t>Refer for definitive immunologic evaluation when indicated.</a:t>
+              <a:t>Quantify for monitoring.</a:t>
             </a:r>
             <a:endParaRPr lang="en-US" sz="1250" dirty="0"/>
           </a:p>
@@ -4555,7 +4822,7 @@
                 <a:ea typeface="Calibri" pitchFamily="34" charset="-122"/>
                 <a:cs typeface="Calibri" pitchFamily="34" charset="-120"/>
               </a:rPr>
-              <a:t>A patient with recurrent sinopulmonary infections has low IgG and low IgA, a normal CBC, and a poor antibody response to pneumococcal vaccination.</a:t>
+              <a:t>A child with no symptoms on exposure has a positive specific IgE to peanut on a broad panel ordered by a worried parent.</a:t>
             </a:r>
             <a:endParaRPr lang="en-US" sz="1450" dirty="0"/>
           </a:p>
@@ -4662,7 +4929,7 @@
                 <a:ea typeface="Calibri" pitchFamily="34" charset="-122"/>
                 <a:cs typeface="Calibri" pitchFamily="34" charset="-120"/>
               </a:rPr>
-              <a:t>What category of disorder is this, and what test confirmed the functional defect?</a:t>
+              <a:t>How should this isolated positive sIgE be interpreted?</a:t>
             </a:r>
             <a:endParaRPr lang="en-US" sz="1500" dirty="0"/>
           </a:p>
@@ -4878,7 +5145,7 @@
                 <a:ea typeface="Calibri" pitchFamily="34" charset="-122"/>
                 <a:cs typeface="Calibri" pitchFamily="34" charset="-120"/>
               </a:rPr>
-              <a:t>Case 1: Humoral Immunodeficiency (e.g., CVID)</a:t>
+              <a:t>Case 1: Sensitization Without Allergy</a:t>
             </a:r>
             <a:endParaRPr lang="en-US" sz="3000" dirty="0"/>
           </a:p>
@@ -4921,7 +5188,7 @@
                 <a:ea typeface="Calibri" pitchFamily="34" charset="-122"/>
                 <a:cs typeface="Calibri" pitchFamily="34" charset="-120"/>
               </a:rPr>
-              <a:t>Low IgG/IgA with recurrent encapsulated-organism infections suggests a primary humoral immunodeficiency such as CVID.</a:t>
+              <a:t>A positive sIgE without a clinical reaction indicates sensitization, not necessarily clinical allergy.</a:t>
             </a:r>
             <a:endParaRPr lang="en-US" sz="1400" dirty="0"/>
           </a:p>
@@ -4942,7 +5209,7 @@
                 <a:ea typeface="Calibri" pitchFamily="34" charset="-122"/>
                 <a:cs typeface="Calibri" pitchFamily="34" charset="-120"/>
               </a:rPr>
-              <a:t>The poor vaccine (pneumococcal) response demonstrates a FUNCTIONAL antibody defect.</a:t>
+              <a:t>Broad untargeted panels generate clinically irrelevant positives.</a:t>
             </a:r>
             <a:endParaRPr lang="en-US" sz="1400" dirty="0"/>
           </a:p>
@@ -4963,7 +5230,7 @@
                 <a:ea typeface="Calibri" pitchFamily="34" charset="-122"/>
                 <a:cs typeface="Calibri" pitchFamily="34" charset="-120"/>
               </a:rPr>
-              <a:t>Exclude secondary causes (protein loss, drugs, malignancy).</a:t>
+              <a:t>Diagnosis requires a matching history (± supervised challenge).</a:t>
             </a:r>
             <a:endParaRPr lang="en-US" sz="1400" dirty="0"/>
           </a:p>
@@ -4984,7 +5251,7 @@
                 <a:ea typeface="Calibri" pitchFamily="34" charset="-122"/>
                 <a:cs typeface="Calibri" pitchFamily="34" charset="-120"/>
               </a:rPr>
-              <a:t>Refer to immunology; some patients benefit from immunoglobulin replacement.</a:t>
+              <a:t>Avoid unnecessary dietary restriction based on sIgE alone.</a:t>
             </a:r>
             <a:endParaRPr lang="en-US" sz="1400" dirty="0"/>
           </a:p>
@@ -5094,7 +5361,7 @@
                 <a:ea typeface="Calibri" pitchFamily="34" charset="-122"/>
                 <a:cs typeface="Calibri" pitchFamily="34" charset="-120"/>
               </a:rPr>
-              <a:t>Quantitative Ig screens; vaccine-response titers test FUNCTION — both are needed to characterize humoral immunodeficiency.</a:t>
+              <a:t>Test specific IgE based on a clinical history — indiscriminate panels detect sensitization that may never cause symptoms.</a:t>
             </a:r>
             <a:endParaRPr lang="en-US" sz="1350" dirty="0"/>
           </a:p>
@@ -5420,7 +5687,7 @@
                 <a:ea typeface="Calibri" pitchFamily="34" charset="-122"/>
                 <a:cs typeface="Calibri" pitchFamily="34" charset="-120"/>
               </a:rPr>
-              <a:t>A young adult presents with a second episode of Neisseria meningitidis infection. Screening shows a markedly low CH50.</a:t>
+              <a:t>An adult with recurrent sinopulmonary infections has low IgG, IgA, and IgM and poor response to vaccination.</a:t>
             </a:r>
             <a:endParaRPr lang="en-US" sz="1450" dirty="0"/>
           </a:p>
@@ -5527,7 +5794,7 @@
                 <a:ea typeface="Calibri" pitchFamily="34" charset="-122"/>
                 <a:cs typeface="Calibri" pitchFamily="34" charset="-120"/>
               </a:rPr>
-              <a:t>What deficiency is suggested, and what does the low CH50 indicate?</a:t>
+              <a:t>What category of disorder does this suggest, and what next steps?</a:t>
             </a:r>
             <a:endParaRPr lang="en-US" sz="1500" dirty="0"/>
           </a:p>
@@ -5743,7 +6010,7 @@
                 <a:ea typeface="Calibri" pitchFamily="34" charset="-122"/>
                 <a:cs typeface="Calibri" pitchFamily="34" charset="-120"/>
               </a:rPr>
-              <a:t>Case 2: Terminal Complement Deficiency</a:t>
+              <a:t>Case 2: Antibody Deficiency</a:t>
             </a:r>
             <a:endParaRPr lang="en-US" sz="3000" dirty="0"/>
           </a:p>
@@ -5786,7 +6053,7 @@
                 <a:ea typeface="Calibri" pitchFamily="34" charset="-122"/>
                 <a:cs typeface="Calibri" pitchFamily="34" charset="-120"/>
               </a:rPr>
-              <a:t>Recurrent Neisseria infections suggest terminal complement (C5–C9 / MAC) deficiency.</a:t>
+              <a:t>Pan-hypogammaglobulinemia with impaired vaccine responses suggests a primary antibody deficiency (e.g., CVID).</a:t>
             </a:r>
             <a:endParaRPr lang="en-US" sz="1400" dirty="0"/>
           </a:p>
@@ -5807,7 +6074,7 @@
                 <a:ea typeface="Calibri" pitchFamily="34" charset="-122"/>
                 <a:cs typeface="Calibri" pitchFamily="34" charset="-120"/>
               </a:rPr>
-              <a:t>A very low CH50 indicates an absent or non-functional classical-pathway terminal component.</a:t>
+              <a:t>Confirm with functional antibody testing and exclude secondary causes.</a:t>
             </a:r>
             <a:endParaRPr lang="en-US" sz="1400" dirty="0"/>
           </a:p>
@@ -5828,7 +6095,7 @@
                 <a:ea typeface="Calibri" pitchFamily="34" charset="-122"/>
                 <a:cs typeface="Calibri" pitchFamily="34" charset="-120"/>
               </a:rPr>
-              <a:t>Confirm with individual component assays.</a:t>
+              <a:t>Lymphocyte subsets and referral to immunology guide management.</a:t>
             </a:r>
             <a:endParaRPr lang="en-US" sz="1400" dirty="0"/>
           </a:p>
@@ -5849,7 +6116,7 @@
                 <a:ea typeface="Calibri" pitchFamily="34" charset="-122"/>
                 <a:cs typeface="Calibri" pitchFamily="34" charset="-120"/>
               </a:rPr>
-              <a:t>Vaccinate against Neisseria and counsel the patient/family.</a:t>
+              <a:t>Replacement immunoglobulin may be indicated.</a:t>
             </a:r>
             <a:endParaRPr lang="en-US" sz="1400" dirty="0"/>
           </a:p>
@@ -5959,7 +6226,7 @@
                 <a:ea typeface="Calibri" pitchFamily="34" charset="-122"/>
                 <a:cs typeface="Calibri" pitchFamily="34" charset="-120"/>
               </a:rPr>
-              <a:t>Recurrent neisserial infection + very low CH50 → evaluate for terminal complement deficiency and vaccinate against meningococcus.</a:t>
+              <a:t>Low immunoglobulins plus poor vaccine responses define a functional antibody deficiency — functional testing, not just levels, makes the diagnosis.</a:t>
             </a:r>
             <a:endParaRPr lang="en-US" sz="1350" dirty="0"/>
           </a:p>
@@ -6136,7 +6403,7 @@
                 <a:ea typeface="Calibri" pitchFamily="34" charset="-122"/>
                 <a:cs typeface="Calibri" pitchFamily="34" charset="-120"/>
               </a:rPr>
-              <a:t>IMMUNOLOGY &amp; SEROLOGY   ·   BOARD REVIEW  ·  Q1</a:t>
+              <a:t>IMMUNOLOGY &amp; SEROLOGY   ·   CASE 3</a:t>
             </a:r>
             <a:endParaRPr lang="en-US" sz="1100" dirty="0"/>
           </a:p>
@@ -6167,7 +6434,7 @@
               <a:buNone/>
             </a:pPr>
             <a:r>
-              <a:rPr lang="en-US" sz="2600" b="1" dirty="0">
+              <a:rPr lang="en-US" sz="3000" b="1" dirty="0">
                 <a:solidFill>
                   <a:srgbClr val="0E3A5F"/>
                 </a:solidFill>
@@ -6175,190 +6442,26 @@
                 <a:ea typeface="Calibri" pitchFamily="34" charset="-122"/>
                 <a:cs typeface="Calibri" pitchFamily="34" charset="-120"/>
               </a:rPr>
-              <a:t>Board-Style Review</a:t>
-            </a:r>
-            <a:endParaRPr lang="en-US" sz="2600" dirty="0"/>
-          </a:p>
-        </p:txBody>
-      </p:sp>
-      <p:sp>
-        <p:nvSpPr>
-          <p:cNvPr id="4" name="Text 2"/>
-          <p:cNvSpPr/>
-          <p:nvPr/>
-        </p:nvSpPr>
-        <p:spPr>
-          <a:xfrm>
-            <a:off x="566928" y="1417320"/>
-            <a:ext cx="11057839" cy="914400"/>
-          </a:xfrm>
-          <a:prstGeom prst="rect">
-            <a:avLst/>
-          </a:prstGeom>
-          <a:noFill/>
-          <a:ln/>
-        </p:spPr>
-        <p:txBody>
-          <a:bodyPr wrap="square" lIns="0" tIns="0" rIns="0" bIns="0" rtlCol="0" anchor="t"/>
-          <a:lstStyle/>
-          <a:p>
-            <a:pPr algn="l" indent="0" marL="0">
-              <a:lnSpc>
-                <a:spcPct val="105000"/>
-              </a:lnSpc>
-              <a:buNone/>
-            </a:pPr>
-            <a:r>
-              <a:rPr lang="en-US" sz="1450" b="1" dirty="0">
-                <a:solidFill>
-                  <a:srgbClr val="1B2A38"/>
-                </a:solidFill>
-                <a:latin typeface="Calibri" pitchFamily="34" charset="0"/>
-                <a:ea typeface="Calibri" pitchFamily="34" charset="-122"/>
-                <a:cs typeface="Calibri" pitchFamily="34" charset="-120"/>
-              </a:rPr>
-              <a:t>Which test best assesses FUNCTIONAL humoral immunity?</a:t>
-            </a:r>
-            <a:endParaRPr lang="en-US" sz="1450" dirty="0"/>
-          </a:p>
-        </p:txBody>
-      </p:sp>
-      <p:sp>
-        <p:nvSpPr>
-          <p:cNvPr id="5" name="Text 3"/>
-          <p:cNvSpPr/>
-          <p:nvPr/>
-        </p:nvSpPr>
-        <p:spPr>
-          <a:xfrm>
-            <a:off x="658368" y="2395728"/>
-            <a:ext cx="6192390" cy="3017520"/>
-          </a:xfrm>
-          <a:prstGeom prst="rect">
-            <a:avLst/>
-          </a:prstGeom>
-          <a:noFill/>
-          <a:ln/>
-        </p:spPr>
-        <p:txBody>
-          <a:bodyPr wrap="square" lIns="0" tIns="0" rIns="0" bIns="0" rtlCol="0" anchor="t"/>
-          <a:lstStyle/>
-          <a:p>
-            <a:pPr algn="l" indent="0" marL="0">
-              <a:spcAft>
-                <a:spcPts val="600"/>
-              </a:spcAft>
-              <a:buNone/>
-            </a:pPr>
-            <a:r>
-              <a:rPr lang="en-US" sz="1350" dirty="0">
-                <a:solidFill>
-                  <a:srgbClr val="33444F"/>
-                </a:solidFill>
-                <a:latin typeface="Calibri" pitchFamily="34" charset="0"/>
-                <a:ea typeface="Calibri" pitchFamily="34" charset="-122"/>
-                <a:cs typeface="Calibri" pitchFamily="34" charset="-120"/>
-              </a:rPr>
-              <a:t>A. Total IgG level</a:t>
-            </a:r>
-            <a:endParaRPr lang="en-US" sz="1350" dirty="0"/>
-          </a:p>
-          <a:p>
-            <a:pPr algn="l" indent="0" marL="0">
-              <a:spcAft>
-                <a:spcPts val="600"/>
-              </a:spcAft>
-              <a:buNone/>
-            </a:pPr>
-            <a:r>
-              <a:rPr lang="en-US" sz="1350" b="1" dirty="0">
-                <a:solidFill>
-                  <a:srgbClr val="4A1269"/>
-                </a:solidFill>
-                <a:latin typeface="Calibri" pitchFamily="34" charset="0"/>
-                <a:ea typeface="Calibri" pitchFamily="34" charset="-122"/>
-                <a:cs typeface="Calibri" pitchFamily="34" charset="-120"/>
-              </a:rPr>
-              <a:t>B. Specific antibody response to vaccination (e.g., pneumococcal)</a:t>
-            </a:r>
-            <a:endParaRPr lang="en-US" sz="1350" dirty="0"/>
-          </a:p>
-          <a:p>
-            <a:pPr algn="l" indent="0" marL="0">
-              <a:spcAft>
-                <a:spcPts val="600"/>
-              </a:spcAft>
-              <a:buNone/>
-            </a:pPr>
-            <a:r>
-              <a:rPr lang="en-US" sz="1350" dirty="0">
-                <a:solidFill>
-                  <a:srgbClr val="33444F"/>
-                </a:solidFill>
-                <a:latin typeface="Calibri" pitchFamily="34" charset="0"/>
-                <a:ea typeface="Calibri" pitchFamily="34" charset="-122"/>
-                <a:cs typeface="Calibri" pitchFamily="34" charset="-120"/>
-              </a:rPr>
-              <a:t>C. ANA</a:t>
-            </a:r>
-            <a:endParaRPr lang="en-US" sz="1350" dirty="0"/>
-          </a:p>
-          <a:p>
-            <a:pPr algn="l" indent="0" marL="0">
-              <a:spcAft>
-                <a:spcPts val="600"/>
-              </a:spcAft>
-              <a:buNone/>
-            </a:pPr>
-            <a:r>
-              <a:rPr lang="en-US" sz="1350" dirty="0">
-                <a:solidFill>
-                  <a:srgbClr val="33444F"/>
-                </a:solidFill>
-                <a:latin typeface="Calibri" pitchFamily="34" charset="0"/>
-                <a:ea typeface="Calibri" pitchFamily="34" charset="-122"/>
-                <a:cs typeface="Calibri" pitchFamily="34" charset="-120"/>
-              </a:rPr>
-              <a:t>D. Complement C3</a:t>
-            </a:r>
-            <a:endParaRPr lang="en-US" sz="1350" dirty="0"/>
-          </a:p>
-          <a:p>
-            <a:pPr algn="l" indent="0" marL="0">
-              <a:spcAft>
-                <a:spcPts val="600"/>
-              </a:spcAft>
-              <a:buNone/>
-            </a:pPr>
-            <a:r>
-              <a:rPr lang="en-US" sz="1350" dirty="0">
-                <a:solidFill>
-                  <a:srgbClr val="33444F"/>
-                </a:solidFill>
-                <a:latin typeface="Calibri" pitchFamily="34" charset="0"/>
-                <a:ea typeface="Calibri" pitchFamily="34" charset="-122"/>
-                <a:cs typeface="Calibri" pitchFamily="34" charset="-120"/>
-              </a:rPr>
-              <a:t>E. Total IgE</a:t>
-            </a:r>
-            <a:endParaRPr lang="en-US" sz="1350" dirty="0"/>
-          </a:p>
-        </p:txBody>
-      </p:sp>
-      <p:sp>
-        <p:nvSpPr>
-          <p:cNvPr id="6" name="Shape 4"/>
-          <p:cNvSpPr/>
-          <p:nvPr/>
-        </p:nvSpPr>
-        <p:spPr>
-          <a:xfrm>
-            <a:off x="7201632" y="2395728"/>
-            <a:ext cx="4423136" cy="3246120"/>
+              <a:t>Case 3</a:t>
+            </a:r>
+            <a:endParaRPr lang="en-US" sz="3000" dirty="0"/>
+          </a:p>
+        </p:txBody>
+      </p:sp>
+      <p:sp>
+        <p:nvSpPr>
+          <p:cNvPr id="4" name="Shape 2"/>
+          <p:cNvSpPr/>
+          <p:nvPr/>
+        </p:nvSpPr>
+        <p:spPr>
+          <a:xfrm>
+            <a:off x="566928" y="1517904"/>
+            <a:ext cx="11057839" cy="2788920"/>
           </a:xfrm>
           <a:prstGeom prst="roundRect">
             <a:avLst>
-              <a:gd name="adj" fmla="val 2535"/>
+              <a:gd name="adj" fmla="val 2951"/>
             </a:avLst>
           </a:prstGeom>
           <a:solidFill>
@@ -6376,14 +6479,14 @@
       </p:sp>
       <p:sp>
         <p:nvSpPr>
-          <p:cNvPr id="7" name="Text 5"/>
-          <p:cNvSpPr/>
-          <p:nvPr/>
-        </p:nvSpPr>
-        <p:spPr>
-          <a:xfrm>
-            <a:off x="7439376" y="2578608"/>
-            <a:ext cx="3965936" cy="457200"/>
+          <p:cNvPr id="5" name="Text 3"/>
+          <p:cNvSpPr/>
+          <p:nvPr/>
+        </p:nvSpPr>
+        <p:spPr>
+          <a:xfrm>
+            <a:off x="841248" y="1700784"/>
+            <a:ext cx="5486400" cy="292608"/>
           </a:xfrm>
           <a:prstGeom prst="rect">
             <a:avLst/>
@@ -6399,7 +6502,7 @@
               <a:buNone/>
             </a:pPr>
             <a:r>
-              <a:rPr lang="en-US" sz="1500" b="1" dirty="0">
+              <a:rPr lang="en-US" sz="1100" b="1" spc="150" kern="0" dirty="0">
                 <a:solidFill>
                   <a:srgbClr val="6A1B9A"/>
                 </a:solidFill>
@@ -6407,36 +6510,22 @@
                 <a:ea typeface="Calibri" pitchFamily="34" charset="-122"/>
                 <a:cs typeface="Calibri" pitchFamily="34" charset="-120"/>
               </a:rPr>
-              <a:t>ANSWER  </a:t>
-            </a:r>
-            <a:pPr indent="0" marL="0">
-              <a:buNone/>
-            </a:pPr>
-            <a:r>
-              <a:rPr lang="en-US" sz="1500" b="1" dirty="0">
-                <a:solidFill>
-                  <a:srgbClr val="1B2A38"/>
-                </a:solidFill>
-                <a:latin typeface="Calibri" pitchFamily="34" charset="0"/>
-                <a:ea typeface="Calibri" pitchFamily="34" charset="-122"/>
-                <a:cs typeface="Calibri" pitchFamily="34" charset="-120"/>
-              </a:rPr>
-              <a:t>B — Vaccine response titers</a:t>
-            </a:r>
-            <a:endParaRPr lang="en-US" sz="1500" dirty="0"/>
-          </a:p>
-        </p:txBody>
-      </p:sp>
-      <p:sp>
-        <p:nvSpPr>
-          <p:cNvPr id="8" name="Text 6"/>
-          <p:cNvSpPr/>
-          <p:nvPr/>
-        </p:nvSpPr>
-        <p:spPr>
-          <a:xfrm>
-            <a:off x="7439376" y="3127248"/>
-            <a:ext cx="3947648" cy="2377440"/>
+              <a:t>CLINICAL VIGNETTE</a:t>
+            </a:r>
+            <a:endParaRPr lang="en-US" sz="1100" dirty="0"/>
+          </a:p>
+        </p:txBody>
+      </p:sp>
+      <p:sp>
+        <p:nvSpPr>
+          <p:cNvPr id="6" name="Text 4"/>
+          <p:cNvSpPr/>
+          <p:nvPr/>
+        </p:nvSpPr>
+        <p:spPr>
+          <a:xfrm>
+            <a:off x="841248" y="2029968"/>
+            <a:ext cx="10509199" cy="2148840"/>
           </a:xfrm>
           <a:prstGeom prst="rect">
             <a:avLst/>
@@ -6455,7 +6544,7 @@
               <a:buNone/>
             </a:pPr>
             <a:r>
-              <a:rPr lang="en-US" sz="1250" dirty="0">
+              <a:rPr lang="en-US" sz="1450" dirty="0">
                 <a:solidFill>
                   <a:srgbClr val="33444F"/>
                 </a:solidFill>
@@ -6463,15 +6552,122 @@
                 <a:ea typeface="Calibri" pitchFamily="34" charset="-122"/>
                 <a:cs typeface="Calibri" pitchFamily="34" charset="-120"/>
               </a:rPr>
-              <a:t>Post-vaccination specific antibody titers test the ability to mount a functional response — abnormal even when total immunoglobulins are normal in some deficiencies.</a:t>
-            </a:r>
-            <a:endParaRPr lang="en-US" sz="1250" dirty="0"/>
+              <a:t>An older adult has hypogammaglobulinemia on SPEP but a high serum free κ with an abnormal κ/λ ratio.</a:t>
+            </a:r>
+            <a:endParaRPr lang="en-US" sz="1450" dirty="0"/>
+          </a:p>
+        </p:txBody>
+      </p:sp>
+      <p:sp>
+        <p:nvSpPr>
+          <p:cNvPr id="7" name="Shape 5"/>
+          <p:cNvSpPr/>
+          <p:nvPr/>
+        </p:nvSpPr>
+        <p:spPr>
+          <a:xfrm>
+            <a:off x="566928" y="4553712"/>
+            <a:ext cx="11057839" cy="1325880"/>
+          </a:xfrm>
+          <a:prstGeom prst="roundRect">
+            <a:avLst>
+              <a:gd name="adj" fmla="val 6207"/>
+            </a:avLst>
+          </a:prstGeom>
+          <a:solidFill>
+            <a:srgbClr val="0E3A5F"/>
+          </a:solidFill>
+          <a:ln/>
+          <a:effectLst>
+            <a:outerShdw sx="100000" sy="100000" kx="0" ky="0" algn="bl" rotWithShape="0" blurRad="88900" dist="25400" dir="5400000">
+              <a:srgbClr val="22303C">
+                <a:alpha val="12000"/>
+              </a:srgbClr>
+            </a:outerShdw>
+          </a:effectLst>
+        </p:spPr>
+      </p:sp>
+      <p:sp>
+        <p:nvSpPr>
+          <p:cNvPr id="8" name="Text 6"/>
+          <p:cNvSpPr/>
+          <p:nvPr/>
+        </p:nvSpPr>
+        <p:spPr>
+          <a:xfrm>
+            <a:off x="822960" y="4681728"/>
+            <a:ext cx="640080" cy="960120"/>
+          </a:xfrm>
+          <a:prstGeom prst="rect">
+            <a:avLst/>
+          </a:prstGeom>
+          <a:noFill/>
+          <a:ln/>
+        </p:spPr>
+        <p:txBody>
+          <a:bodyPr wrap="square" lIns="0" tIns="0" rIns="0" bIns="0" rtlCol="0" anchor="ctr"/>
+          <a:lstStyle/>
+          <a:p>
+            <a:pPr algn="ctr" indent="0" marL="0">
+              <a:buNone/>
+            </a:pPr>
+            <a:r>
+              <a:rPr lang="en-US" sz="4000" b="1" dirty="0">
+                <a:solidFill>
+                  <a:srgbClr val="6A1B9A"/>
+                </a:solidFill>
+                <a:latin typeface="Calibri" pitchFamily="34" charset="0"/>
+                <a:ea typeface="Calibri" pitchFamily="34" charset="-122"/>
+                <a:cs typeface="Calibri" pitchFamily="34" charset="-120"/>
+              </a:rPr>
+              <a:t>?</a:t>
+            </a:r>
+            <a:endParaRPr lang="en-US" sz="4000" dirty="0"/>
           </a:p>
         </p:txBody>
       </p:sp>
       <p:sp>
         <p:nvSpPr>
           <p:cNvPr id="9" name="Text 7"/>
+          <p:cNvSpPr/>
+          <p:nvPr/>
+        </p:nvSpPr>
+        <p:spPr>
+          <a:xfrm>
+            <a:off x="1618488" y="4553712"/>
+            <a:ext cx="9686239" cy="1325880"/>
+          </a:xfrm>
+          <a:prstGeom prst="rect">
+            <a:avLst/>
+          </a:prstGeom>
+          <a:noFill/>
+          <a:ln/>
+        </p:spPr>
+        <p:txBody>
+          <a:bodyPr wrap="square" lIns="0" tIns="0" rIns="0" bIns="0" rtlCol="0" anchor="ctr"/>
+          <a:lstStyle/>
+          <a:p>
+            <a:pPr algn="l" indent="0" marL="0">
+              <a:buNone/>
+            </a:pPr>
+            <a:r>
+              <a:rPr lang="en-US" sz="1500" b="1" dirty="0">
+                <a:solidFill>
+                  <a:srgbClr val="FFFFFF"/>
+                </a:solidFill>
+                <a:latin typeface="Calibri" pitchFamily="34" charset="0"/>
+                <a:ea typeface="Calibri" pitchFamily="34" charset="-122"/>
+                <a:cs typeface="Calibri" pitchFamily="34" charset="-120"/>
+              </a:rPr>
+              <a:t>How do you reconcile low gamma globulins with a clonal light-chain finding?</a:t>
+            </a:r>
+            <a:endParaRPr lang="en-US" sz="1500" dirty="0"/>
+          </a:p>
+        </p:txBody>
+      </p:sp>
+      <p:sp>
+        <p:nvSpPr>
+          <p:cNvPr id="10" name="Text 8"/>
           <p:cNvSpPr/>
           <p:nvPr/>
         </p:nvSpPr>
@@ -6510,7 +6706,7 @@
       </p:sp>
       <p:sp>
         <p:nvSpPr>
-          <p:cNvPr id="10" name="Text 8"/>
+          <p:cNvPr id="11" name="Text 9"/>
           <p:cNvSpPr/>
           <p:nvPr/>
         </p:nvSpPr>
@@ -6640,7 +6836,7 @@
                 <a:ea typeface="Calibri" pitchFamily="34" charset="-122"/>
                 <a:cs typeface="Calibri" pitchFamily="34" charset="-120"/>
               </a:rPr>
-              <a:t>IMMUNOLOGY &amp; SEROLOGY   ·   BOARD REVIEW  ·  Q2</a:t>
+              <a:t>IMMUNOLOGY &amp; SEROLOGY   ·   CASE 3  ·  RESOLUTION</a:t>
             </a:r>
             <a:endParaRPr lang="en-US" sz="1100" dirty="0"/>
           </a:p>
@@ -6671,7 +6867,7 @@
               <a:buNone/>
             </a:pPr>
             <a:r>
-              <a:rPr lang="en-US" sz="2600" b="1" dirty="0">
+              <a:rPr lang="en-US" sz="3000" b="1" dirty="0">
                 <a:solidFill>
                   <a:srgbClr val="0E3A5F"/>
                 </a:solidFill>
@@ -6679,9 +6875,9 @@
                 <a:ea typeface="Calibri" pitchFamily="34" charset="-122"/>
                 <a:cs typeface="Calibri" pitchFamily="34" charset="-120"/>
               </a:rPr>
-              <a:t>Board-Style Review</a:t>
-            </a:r>
-            <a:endParaRPr lang="en-US" sz="2600" dirty="0"/>
+              <a:t>Case 3: Light-Chain Clone vs Deficiency</a:t>
+            </a:r>
+            <a:endParaRPr lang="en-US" sz="3000" dirty="0"/>
           </a:p>
         </p:txBody>
       </p:sp>
@@ -6693,8 +6889,8 @@
         </p:nvSpPr>
         <p:spPr>
           <a:xfrm>
-            <a:off x="566928" y="1417320"/>
-            <a:ext cx="11057839" cy="914400"/>
+            <a:off x="566928" y="1554480"/>
+            <a:ext cx="6413547" cy="4023360"/>
           </a:xfrm>
           <a:prstGeom prst="rect">
             <a:avLst/>
@@ -6706,14 +6902,15 @@
           <a:bodyPr wrap="square" lIns="0" tIns="0" rIns="0" bIns="0" rtlCol="0" anchor="t"/>
           <a:lstStyle/>
           <a:p>
-            <a:pPr algn="l" indent="0" marL="0">
-              <a:lnSpc>
-                <a:spcPct val="105000"/>
-              </a:lnSpc>
-              <a:buNone/>
-            </a:pPr>
-            <a:r>
-              <a:rPr lang="en-US" sz="1450" b="1" dirty="0">
+            <a:pPr algn="l" marL="177800" indent="-177800">
+              <a:spcAft>
+                <a:spcPts val="900"/>
+              </a:spcAft>
+              <a:buSzPct val="100000"/>
+              <a:buChar char="•"/>
+            </a:pPr>
+            <a:r>
+              <a:rPr lang="en-US" sz="1400" b="1" dirty="0">
                 <a:solidFill>
                   <a:srgbClr val="1B2A38"/>
                 </a:solidFill>
@@ -6721,41 +6918,20 @@
                 <a:ea typeface="Calibri" pitchFamily="34" charset="-122"/>
                 <a:cs typeface="Calibri" pitchFamily="34" charset="-120"/>
               </a:rPr>
-              <a:t>Recurrent Neisseria infections with a near-absent CH50 most suggest:</a:t>
-            </a:r>
-            <a:endParaRPr lang="en-US" sz="1450" dirty="0"/>
-          </a:p>
-        </p:txBody>
-      </p:sp>
-      <p:sp>
-        <p:nvSpPr>
-          <p:cNvPr id="5" name="Text 3"/>
-          <p:cNvSpPr/>
-          <p:nvPr/>
-        </p:nvSpPr>
-        <p:spPr>
-          <a:xfrm>
-            <a:off x="658368" y="2395728"/>
-            <a:ext cx="6192390" cy="3017520"/>
-          </a:xfrm>
-          <a:prstGeom prst="rect">
-            <a:avLst/>
-          </a:prstGeom>
-          <a:noFill/>
-          <a:ln/>
-        </p:spPr>
-        <p:txBody>
-          <a:bodyPr wrap="square" lIns="0" tIns="0" rIns="0" bIns="0" rtlCol="0" anchor="t"/>
-          <a:lstStyle/>
-          <a:p>
-            <a:pPr algn="l" indent="0" marL="0">
+              <a:t>A clonal plasma-cell process can secrete free light chains while suppressing normal immunoglobulin (immunoparesis).</a:t>
+            </a:r>
+            <a:endParaRPr lang="en-US" sz="1400" dirty="0"/>
+          </a:p>
+          <a:p>
+            <a:pPr algn="l" marL="177800" indent="-177800">
               <a:spcAft>
-                <a:spcPts val="600"/>
+                <a:spcPts val="900"/>
               </a:spcAft>
-              <a:buNone/>
-            </a:pPr>
-            <a:r>
-              <a:rPr lang="en-US" sz="1350" dirty="0">
+              <a:buSzPct val="100000"/>
+              <a:buChar char="•"/>
+            </a:pPr>
+            <a:r>
+              <a:rPr lang="en-US" sz="1400" dirty="0">
                 <a:solidFill>
                   <a:srgbClr val="33444F"/>
                 </a:solidFill>
@@ -6763,39 +6939,41 @@
                 <a:ea typeface="Calibri" pitchFamily="34" charset="-122"/>
                 <a:cs typeface="Calibri" pitchFamily="34" charset="-120"/>
               </a:rPr>
-              <a:t>A. Selective IgA deficiency</a:t>
-            </a:r>
-            <a:endParaRPr lang="en-US" sz="1350" dirty="0"/>
-          </a:p>
-          <a:p>
-            <a:pPr algn="l" indent="0" marL="0">
+              <a:t>SPEP may show low gamma without an obvious spike; free light chains reveal the clone.</a:t>
+            </a:r>
+            <a:endParaRPr lang="en-US" sz="1400" dirty="0"/>
+          </a:p>
+          <a:p>
+            <a:pPr algn="l" marL="177800" indent="-177800">
               <a:spcAft>
-                <a:spcPts val="600"/>
+                <a:spcPts val="900"/>
               </a:spcAft>
-              <a:buNone/>
-            </a:pPr>
-            <a:r>
-              <a:rPr lang="en-US" sz="1350" b="1" dirty="0">
-                <a:solidFill>
-                  <a:srgbClr val="4A1269"/>
-                </a:solidFill>
-                <a:latin typeface="Calibri" pitchFamily="34" charset="0"/>
-                <a:ea typeface="Calibri" pitchFamily="34" charset="-122"/>
-                <a:cs typeface="Calibri" pitchFamily="34" charset="-120"/>
-              </a:rPr>
-              <a:t>B. Terminal complement (C5–C9) deficiency</a:t>
-            </a:r>
-            <a:endParaRPr lang="en-US" sz="1350" dirty="0"/>
-          </a:p>
-          <a:p>
-            <a:pPr algn="l" indent="0" marL="0">
+              <a:buSzPct val="100000"/>
+              <a:buChar char="•"/>
+            </a:pPr>
+            <a:r>
+              <a:rPr lang="en-US" sz="1400" dirty="0">
+                <a:solidFill>
+                  <a:srgbClr val="33444F"/>
+                </a:solidFill>
+                <a:latin typeface="Calibri" pitchFamily="34" charset="0"/>
+                <a:ea typeface="Calibri" pitchFamily="34" charset="-122"/>
+                <a:cs typeface="Calibri" pitchFamily="34" charset="-120"/>
+              </a:rPr>
+              <a:t>Immunofixation and the FLC ratio clarify the picture.</a:t>
+            </a:r>
+            <a:endParaRPr lang="en-US" sz="1400" dirty="0"/>
+          </a:p>
+          <a:p>
+            <a:pPr algn="l" marL="177800" indent="-177800">
               <a:spcAft>
-                <a:spcPts val="600"/>
+                <a:spcPts val="900"/>
               </a:spcAft>
-              <a:buNone/>
-            </a:pPr>
-            <a:r>
-              <a:rPr lang="en-US" sz="1350" dirty="0">
+              <a:buSzPct val="100000"/>
+              <a:buChar char="•"/>
+            </a:pPr>
+            <a:r>
+              <a:rPr lang="en-US" sz="1400" dirty="0">
                 <a:solidFill>
                   <a:srgbClr val="33444F"/>
                 </a:solidFill>
@@ -6803,66 +6981,26 @@
                 <a:ea typeface="Calibri" pitchFamily="34" charset="-122"/>
                 <a:cs typeface="Calibri" pitchFamily="34" charset="-120"/>
               </a:rPr>
-              <a:t>C. CVID</a:t>
-            </a:r>
-            <a:endParaRPr lang="en-US" sz="1350" dirty="0"/>
-          </a:p>
-          <a:p>
-            <a:pPr algn="l" indent="0" marL="0">
-              <a:spcAft>
-                <a:spcPts val="600"/>
-              </a:spcAft>
-              <a:buNone/>
-            </a:pPr>
-            <a:r>
-              <a:rPr lang="en-US" sz="1350" dirty="0">
-                <a:solidFill>
-                  <a:srgbClr val="33444F"/>
-                </a:solidFill>
-                <a:latin typeface="Calibri" pitchFamily="34" charset="0"/>
-                <a:ea typeface="Calibri" pitchFamily="34" charset="-122"/>
-                <a:cs typeface="Calibri" pitchFamily="34" charset="-120"/>
-              </a:rPr>
-              <a:t>D. Chronic granulomatous disease</a:t>
-            </a:r>
-            <a:endParaRPr lang="en-US" sz="1350" dirty="0"/>
-          </a:p>
-          <a:p>
-            <a:pPr algn="l" indent="0" marL="0">
-              <a:spcAft>
-                <a:spcPts val="600"/>
-              </a:spcAft>
-              <a:buNone/>
-            </a:pPr>
-            <a:r>
-              <a:rPr lang="en-US" sz="1350" dirty="0">
-                <a:solidFill>
-                  <a:srgbClr val="33444F"/>
-                </a:solidFill>
-                <a:latin typeface="Calibri" pitchFamily="34" charset="0"/>
-                <a:ea typeface="Calibri" pitchFamily="34" charset="-122"/>
-                <a:cs typeface="Calibri" pitchFamily="34" charset="-120"/>
-              </a:rPr>
-              <a:t>E. Hereditary angioedema</a:t>
-            </a:r>
-            <a:endParaRPr lang="en-US" sz="1350" dirty="0"/>
-          </a:p>
-        </p:txBody>
-      </p:sp>
-      <p:sp>
-        <p:nvSpPr>
-          <p:cNvPr id="6" name="Shape 4"/>
-          <p:cNvSpPr/>
-          <p:nvPr/>
-        </p:nvSpPr>
-        <p:spPr>
-          <a:xfrm>
-            <a:off x="7201632" y="2395728"/>
-            <a:ext cx="4423136" cy="3246120"/>
+              <a:t>Refer for hematologic evaluation.</a:t>
+            </a:r>
+            <a:endParaRPr lang="en-US" sz="1400" dirty="0"/>
+          </a:p>
+        </p:txBody>
+      </p:sp>
+      <p:sp>
+        <p:nvSpPr>
+          <p:cNvPr id="5" name="Shape 3"/>
+          <p:cNvSpPr/>
+          <p:nvPr/>
+        </p:nvSpPr>
+        <p:spPr>
+          <a:xfrm>
+            <a:off x="7422788" y="1554480"/>
+            <a:ext cx="4201979" cy="3977640"/>
           </a:xfrm>
           <a:prstGeom prst="roundRect">
             <a:avLst>
-              <a:gd name="adj" fmla="val 2535"/>
+              <a:gd name="adj" fmla="val 2069"/>
             </a:avLst>
           </a:prstGeom>
           <a:solidFill>
@@ -6880,67 +7018,53 @@
       </p:sp>
       <p:sp>
         <p:nvSpPr>
+          <p:cNvPr id="6" name="Text 4"/>
+          <p:cNvSpPr/>
+          <p:nvPr/>
+        </p:nvSpPr>
+        <p:spPr>
+          <a:xfrm>
+            <a:off x="7660532" y="1755648"/>
+            <a:ext cx="3744779" cy="310896"/>
+          </a:xfrm>
+          <a:prstGeom prst="rect">
+            <a:avLst/>
+          </a:prstGeom>
+          <a:noFill/>
+          <a:ln/>
+        </p:spPr>
+        <p:txBody>
+          <a:bodyPr wrap="square" lIns="0" tIns="0" rIns="0" bIns="0" rtlCol="0" anchor="ctr"/>
+          <a:lstStyle/>
+          <a:p>
+            <a:pPr indent="0" marL="0">
+              <a:buNone/>
+            </a:pPr>
+            <a:r>
+              <a:rPr lang="en-US" sz="1100" b="1" spc="140" kern="0" dirty="0">
+                <a:solidFill>
+                  <a:srgbClr val="6A1B9A"/>
+                </a:solidFill>
+                <a:latin typeface="Calibri" pitchFamily="34" charset="0"/>
+                <a:ea typeface="Calibri" pitchFamily="34" charset="-122"/>
+                <a:cs typeface="Calibri" pitchFamily="34" charset="-120"/>
+              </a:rPr>
+              <a:t>TEACHING POINT</a:t>
+            </a:r>
+            <a:endParaRPr lang="en-US" sz="1100" dirty="0"/>
+          </a:p>
+        </p:txBody>
+      </p:sp>
+      <p:sp>
+        <p:nvSpPr>
           <p:cNvPr id="7" name="Text 5"/>
           <p:cNvSpPr/>
           <p:nvPr/>
         </p:nvSpPr>
         <p:spPr>
           <a:xfrm>
-            <a:off x="7439376" y="2578608"/>
-            <a:ext cx="3965936" cy="457200"/>
-          </a:xfrm>
-          <a:prstGeom prst="rect">
-            <a:avLst/>
-          </a:prstGeom>
-          <a:noFill/>
-          <a:ln/>
-        </p:spPr>
-        <p:txBody>
-          <a:bodyPr wrap="square" lIns="0" tIns="0" rIns="0" bIns="0" rtlCol="0" anchor="ctr"/>
-          <a:lstStyle/>
-          <a:p>
-            <a:pPr indent="0" marL="0">
-              <a:buNone/>
-            </a:pPr>
-            <a:r>
-              <a:rPr lang="en-US" sz="1500" b="1" dirty="0">
-                <a:solidFill>
-                  <a:srgbClr val="6A1B9A"/>
-                </a:solidFill>
-                <a:latin typeface="Calibri" pitchFamily="34" charset="0"/>
-                <a:ea typeface="Calibri" pitchFamily="34" charset="-122"/>
-                <a:cs typeface="Calibri" pitchFamily="34" charset="-120"/>
-              </a:rPr>
-              <a:t>ANSWER  </a:t>
-            </a:r>
-            <a:pPr indent="0" marL="0">
-              <a:buNone/>
-            </a:pPr>
-            <a:r>
-              <a:rPr lang="en-US" sz="1500" b="1" dirty="0">
-                <a:solidFill>
-                  <a:srgbClr val="1B2A38"/>
-                </a:solidFill>
-                <a:latin typeface="Calibri" pitchFamily="34" charset="0"/>
-                <a:ea typeface="Calibri" pitchFamily="34" charset="-122"/>
-                <a:cs typeface="Calibri" pitchFamily="34" charset="-120"/>
-              </a:rPr>
-              <a:t>B — Terminal complement deficiency</a:t>
-            </a:r>
-            <a:endParaRPr lang="en-US" sz="1500" dirty="0"/>
-          </a:p>
-        </p:txBody>
-      </p:sp>
-      <p:sp>
-        <p:nvSpPr>
-          <p:cNvPr id="8" name="Text 6"/>
-          <p:cNvSpPr/>
-          <p:nvPr/>
-        </p:nvSpPr>
-        <p:spPr>
-          <a:xfrm>
-            <a:off x="7439376" y="3127248"/>
-            <a:ext cx="3947648" cy="2377440"/>
+            <a:off x="7660532" y="2121408"/>
+            <a:ext cx="3726491" cy="3291840"/>
           </a:xfrm>
           <a:prstGeom prst="rect">
             <a:avLst/>
@@ -6954,12 +7078,12 @@
           <a:p>
             <a:pPr algn="l" indent="0" marL="0">
               <a:lnSpc>
-                <a:spcPct val="108000"/>
+                <a:spcPct val="110000"/>
               </a:lnSpc>
               <a:buNone/>
             </a:pPr>
             <a:r>
-              <a:rPr lang="en-US" sz="1250" dirty="0">
+              <a:rPr lang="en-US" sz="1350" dirty="0">
                 <a:solidFill>
                   <a:srgbClr val="33444F"/>
                 </a:solidFill>
@@ -6967,15 +7091,15 @@
                 <a:ea typeface="Calibri" pitchFamily="34" charset="-122"/>
                 <a:cs typeface="Calibri" pitchFamily="34" charset="-120"/>
               </a:rPr>
-              <a:t>Terminal complement deficiency impairs the membrane attack complex, predisposing to neisserial infection; CH50 (classical pathway) is markedly low.</a:t>
-            </a:r>
-            <a:endParaRPr lang="en-US" sz="1250" dirty="0"/>
-          </a:p>
-        </p:txBody>
-      </p:sp>
-      <p:sp>
-        <p:nvSpPr>
-          <p:cNvPr id="9" name="Text 7"/>
+              <a:t>Hypogammaglobulinemia does not exclude clonal disease — the free light-chain ratio uncovers light-chain-only clones with immunoparesis.</a:t>
+            </a:r>
+            <a:endParaRPr lang="en-US" sz="1350" dirty="0"/>
+          </a:p>
+        </p:txBody>
+      </p:sp>
+      <p:sp>
+        <p:nvSpPr>
+          <p:cNvPr id="8" name="Text 6"/>
           <p:cNvSpPr/>
           <p:nvPr/>
         </p:nvSpPr>
@@ -7014,7 +7138,7 @@
       </p:sp>
       <p:sp>
         <p:nvSpPr>
-          <p:cNvPr id="10" name="Text 8"/>
+          <p:cNvPr id="9" name="Text 7"/>
           <p:cNvSpPr/>
           <p:nvPr/>
         </p:nvSpPr>
@@ -7144,7 +7268,7 @@
                 <a:ea typeface="Calibri" pitchFamily="34" charset="-122"/>
                 <a:cs typeface="Calibri" pitchFamily="34" charset="-120"/>
               </a:rPr>
-              <a:t>IMMUNOLOGY &amp; SEROLOGY   ·   BOARD REVIEW  ·  Q3</a:t>
+              <a:t>IMMUNOLOGY &amp; SEROLOGY   ·   BOARD REVIEW  ·  Q1</a:t>
             </a:r>
             <a:endParaRPr lang="en-US" sz="1100" dirty="0"/>
           </a:p>
@@ -7225,7 +7349,7 @@
                 <a:ea typeface="Calibri" pitchFamily="34" charset="-122"/>
                 <a:cs typeface="Calibri" pitchFamily="34" charset="-120"/>
               </a:rPr>
-              <a:t>An acutely elevated tryptase that returns toward a normal baseline is most consistent with:</a:t>
+              <a:t>A positive allergen-specific IgE indicates:</a:t>
             </a:r>
             <a:endParaRPr lang="en-US" sz="1450" dirty="0"/>
           </a:p>
@@ -7267,7 +7391,7 @@
                 <a:ea typeface="Calibri" pitchFamily="34" charset="-122"/>
                 <a:cs typeface="Calibri" pitchFamily="34" charset="-120"/>
               </a:rPr>
-              <a:t>A. Mastocytosis</a:t>
+              <a:t>A. Definite clinical allergy</a:t>
             </a:r>
             <a:endParaRPr lang="en-US" sz="1350" dirty="0"/>
           </a:p>
@@ -7287,7 +7411,7 @@
                 <a:ea typeface="Calibri" pitchFamily="34" charset="-122"/>
                 <a:cs typeface="Calibri" pitchFamily="34" charset="-120"/>
               </a:rPr>
-              <a:t>B. An anaphylactic (mast-cell activation) event</a:t>
+              <a:t>B. Sensitization, meaningful only with a matching history</a:t>
             </a:r>
             <a:endParaRPr lang="en-US" sz="1350" dirty="0"/>
           </a:p>
@@ -7307,7 +7431,7 @@
                 <a:ea typeface="Calibri" pitchFamily="34" charset="-122"/>
                 <a:cs typeface="Calibri" pitchFamily="34" charset="-120"/>
               </a:rPr>
-              <a:t>C. Chronic allergy</a:t>
+              <a:t>C. Immunodeficiency</a:t>
             </a:r>
             <a:endParaRPr lang="en-US" sz="1350" dirty="0"/>
           </a:p>
@@ -7327,7 +7451,7 @@
                 <a:ea typeface="Calibri" pitchFamily="34" charset="-122"/>
                 <a:cs typeface="Calibri" pitchFamily="34" charset="-120"/>
               </a:rPr>
-              <a:t>D. Complement deficiency</a:t>
+              <a:t>D. Active infection</a:t>
             </a:r>
             <a:endParaRPr lang="en-US" sz="1350" dirty="0"/>
           </a:p>
@@ -7347,7 +7471,7 @@
                 <a:ea typeface="Calibri" pitchFamily="34" charset="-122"/>
                 <a:cs typeface="Calibri" pitchFamily="34" charset="-120"/>
               </a:rPr>
-              <a:t>E. Immunodeficiency</a:t>
+              <a:t>E. Past infection</a:t>
             </a:r>
             <a:endParaRPr lang="en-US" sz="1350" dirty="0"/>
           </a:p>
@@ -7429,7 +7553,7 @@
                 <a:ea typeface="Calibri" pitchFamily="34" charset="-122"/>
                 <a:cs typeface="Calibri" pitchFamily="34" charset="-120"/>
               </a:rPr>
-              <a:t>B — Anaphylaxis (mast-cell activation)</a:t>
+              <a:t>B — Sensitization, needs history</a:t>
             </a:r>
             <a:endParaRPr lang="en-US" sz="1500" dirty="0"/>
           </a:p>
@@ -7471,7 +7595,7 @@
                 <a:ea typeface="Calibri" pitchFamily="34" charset="-122"/>
                 <a:cs typeface="Calibri" pitchFamily="34" charset="-120"/>
               </a:rPr>
-              <a:t>A transient rise and fall of tryptase around baseline supports acute mast-cell activation (anaphylaxis); a persistently high baseline suggests mastocytosis.</a:t>
+              <a:t>Specific IgE shows sensitization; clinical allergy requires a corresponding reaction history.</a:t>
             </a:r>
             <a:endParaRPr lang="en-US" sz="1250" dirty="0"/>
           </a:p>
@@ -7755,7 +7879,7 @@
                 <a:ea typeface="Calibri" pitchFamily="34" charset="-122"/>
                 <a:cs typeface="Calibri" pitchFamily="34" charset="-120"/>
               </a:rPr>
-              <a:t>Ig</a:t>
+              <a:t>sIgE</a:t>
             </a:r>
             <a:endParaRPr lang="en-US" sz="3600" dirty="0"/>
           </a:p>
@@ -7794,7 +7918,7 @@
                 <a:ea typeface="Calibri" pitchFamily="34" charset="-122"/>
                 <a:cs typeface="Calibri" pitchFamily="34" charset="-120"/>
               </a:rPr>
-              <a:t>Quantitative immunoglobulins anchor the immunodeficiency workup</a:t>
+              <a:t>Sensitization is not the same as clinical allergy</a:t>
             </a:r>
             <a:endParaRPr lang="en-US" sz="1150" dirty="0"/>
           </a:p>
@@ -7862,7 +7986,7 @@
                 <a:ea typeface="Calibri" pitchFamily="34" charset="-122"/>
                 <a:cs typeface="Calibri" pitchFamily="34" charset="-120"/>
               </a:rPr>
-              <a:t>IgE</a:t>
+              <a:t>Tiers</a:t>
             </a:r>
             <a:endParaRPr lang="en-US" sz="3600" dirty="0"/>
           </a:p>
@@ -7901,7 +8025,7 @@
                 <a:ea typeface="Calibri" pitchFamily="34" charset="-122"/>
                 <a:cs typeface="Calibri" pitchFamily="34" charset="-120"/>
               </a:rPr>
-              <a:t>Specific IgE and tryptase support allergy diagnosis</a:t>
+              <a:t>Immunodeficiency is worked up in steps</a:t>
             </a:r>
             <a:endParaRPr lang="en-US" sz="1150" dirty="0"/>
           </a:p>
@@ -7969,7 +8093,7 @@
                 <a:ea typeface="Calibri" pitchFamily="34" charset="-122"/>
                 <a:cs typeface="Calibri" pitchFamily="34" charset="-120"/>
               </a:rPr>
-              <a:t>C3/C4</a:t>
+              <a:t>Ig</a:t>
             </a:r>
             <a:endParaRPr lang="en-US" sz="3600" dirty="0"/>
           </a:p>
@@ -8008,7 +8132,7 @@
                 <a:ea typeface="Calibri" pitchFamily="34" charset="-122"/>
                 <a:cs typeface="Calibri" pitchFamily="34" charset="-120"/>
               </a:rPr>
-              <a:t>Complement reveals consumption and deficiency</a:t>
+              <a:t>Quantitative immunoglobulins anchor the protein workup</a:t>
             </a:r>
             <a:endParaRPr lang="en-US" sz="1150" dirty="0"/>
           </a:p>
@@ -8079,7 +8203,7 @@
                 <a:ea typeface="Calibri" pitchFamily="34" charset="-122"/>
                 <a:cs typeface="Calibri" pitchFamily="34" charset="-120"/>
               </a:rPr>
-              <a:t>This area ties together the protein-based immune tests residents interpret in consultation: immunoglobulins, specific IgE and tryptase, complement, and the targeted immunodeficiency workup.</a:t>
+              <a:t>This lecture brings together allergy testing, the tiered evaluation of suspected immunodeficiency, and immunoglobulin/protein assessment — areas where interpretation depends heavily on pairing the laboratory result with the clinical history. Protein electrophoresis interpretation follows the department’s teaching (D. Keren).</a:t>
             </a:r>
             <a:endParaRPr lang="en-US" sz="1450" dirty="0"/>
           </a:p>
@@ -8122,7 +8246,7 @@
                 <a:ea typeface="Calibri" pitchFamily="34" charset="-122"/>
                 <a:cs typeface="Calibri" pitchFamily="34" charset="-120"/>
               </a:rPr>
-              <a:t>Low immunoglobulins plus a suggestive SPEP can be the first laboratory clue to a primary or secondary immunodeficiency.</a:t>
+              <a:t>Allergy and immunodeficiency tests are only meaningful alongside the clinical phenotype — the lab result is half the answer.</a:t>
             </a:r>
             <a:endParaRPr lang="en-US" sz="1300" dirty="0"/>
           </a:p>
@@ -8248,7 +8372,7 @@
     <p:bg>
       <p:bgPr>
         <a:solidFill>
-          <a:srgbClr val="0A2A45"/>
+          <a:srgbClr val="FFFFFF"/>
         </a:solidFill>
       </p:bgPr>
     </p:bg>
@@ -8275,7 +8399,7 @@
         <p:spPr>
           <a:xfrm>
             <a:off x="566928" y="329184"/>
-            <a:ext cx="10058400" cy="310896"/>
+            <a:ext cx="10515600" cy="310896"/>
           </a:xfrm>
           <a:prstGeom prst="rect">
             <a:avLst/>
@@ -8287,7 +8411,7 @@
           <a:bodyPr wrap="square" lIns="0" tIns="0" rIns="0" bIns="0" rtlCol="0" anchor="ctr"/>
           <a:lstStyle/>
           <a:p>
-            <a:pPr indent="0" marL="0">
+            <a:pPr algn="l" indent="0" marL="0">
               <a:buNone/>
             </a:pPr>
             <a:r>
@@ -8299,7 +8423,7 @@
                 <a:ea typeface="Calibri" pitchFamily="34" charset="-122"/>
                 <a:cs typeface="Calibri" pitchFamily="34" charset="-120"/>
               </a:rPr>
-              <a:t>IMMUNOLOGY &amp; SEROLOGY</a:t>
+              <a:t>IMMUNOLOGY &amp; SEROLOGY   ·   BOARD REVIEW  ·  Q2</a:t>
             </a:r>
             <a:endParaRPr lang="en-US" sz="1100" dirty="0"/>
           </a:p>
@@ -8313,8 +8437,8 @@
         </p:nvSpPr>
         <p:spPr>
           <a:xfrm>
-            <a:off x="566928" y="676656"/>
-            <a:ext cx="10972800" cy="749808"/>
+            <a:off x="566928" y="713232"/>
+            <a:ext cx="11064240" cy="749808"/>
           </a:xfrm>
           <a:prstGeom prst="rect">
             <a:avLst/>
@@ -8326,62 +8450,206 @@
           <a:bodyPr wrap="square" lIns="0" tIns="0" rIns="0" bIns="0" rtlCol="0" anchor="ctr"/>
           <a:lstStyle/>
           <a:p>
-            <a:pPr indent="0" marL="0">
-              <a:buNone/>
-            </a:pPr>
-            <a:r>
-              <a:rPr lang="en-US" sz="3000" b="1" dirty="0">
-                <a:solidFill>
-                  <a:srgbClr val="FFFFFF"/>
-                </a:solidFill>
-                <a:latin typeface="Calibri" pitchFamily="34" charset="0"/>
-                <a:ea typeface="Calibri" pitchFamily="34" charset="-122"/>
-                <a:cs typeface="Calibri" pitchFamily="34" charset="-120"/>
-              </a:rPr>
-              <a:t>Key Take-Home Points</a:t>
-            </a:r>
-            <a:endParaRPr lang="en-US" sz="3000" dirty="0"/>
-          </a:p>
-        </p:txBody>
-      </p:sp>
-      <p:sp>
-        <p:nvSpPr>
-          <p:cNvPr id="4" name="Shape 2"/>
-          <p:cNvSpPr/>
-          <p:nvPr/>
-        </p:nvSpPr>
-        <p:spPr>
-          <a:xfrm>
-            <a:off x="566928" y="1517904"/>
-            <a:ext cx="11057839" cy="841248"/>
+            <a:pPr algn="l" indent="0" marL="0">
+              <a:buNone/>
+            </a:pPr>
+            <a:r>
+              <a:rPr lang="en-US" sz="2600" b="1" dirty="0">
+                <a:solidFill>
+                  <a:srgbClr val="0E3A5F"/>
+                </a:solidFill>
+                <a:latin typeface="Calibri" pitchFamily="34" charset="0"/>
+                <a:ea typeface="Calibri" pitchFamily="34" charset="-122"/>
+                <a:cs typeface="Calibri" pitchFamily="34" charset="-120"/>
+              </a:rPr>
+              <a:t>Board-Style Review</a:t>
+            </a:r>
+            <a:endParaRPr lang="en-US" sz="2600" dirty="0"/>
+          </a:p>
+        </p:txBody>
+      </p:sp>
+      <p:sp>
+        <p:nvSpPr>
+          <p:cNvPr id="4" name="Text 2"/>
+          <p:cNvSpPr/>
+          <p:nvPr/>
+        </p:nvSpPr>
+        <p:spPr>
+          <a:xfrm>
+            <a:off x="566928" y="1417320"/>
+            <a:ext cx="11057839" cy="914400"/>
+          </a:xfrm>
+          <a:prstGeom prst="rect">
+            <a:avLst/>
+          </a:prstGeom>
+          <a:noFill/>
+          <a:ln/>
+        </p:spPr>
+        <p:txBody>
+          <a:bodyPr wrap="square" lIns="0" tIns="0" rIns="0" bIns="0" rtlCol="0" anchor="t"/>
+          <a:lstStyle/>
+          <a:p>
+            <a:pPr algn="l" indent="0" marL="0">
+              <a:lnSpc>
+                <a:spcPct val="105000"/>
+              </a:lnSpc>
+              <a:buNone/>
+            </a:pPr>
+            <a:r>
+              <a:rPr lang="en-US" sz="1450" b="1" dirty="0">
+                <a:solidFill>
+                  <a:srgbClr val="1B2A38"/>
+                </a:solidFill>
+                <a:latin typeface="Calibri" pitchFamily="34" charset="0"/>
+                <a:ea typeface="Calibri" pitchFamily="34" charset="-122"/>
+                <a:cs typeface="Calibri" pitchFamily="34" charset="-120"/>
+              </a:rPr>
+              <a:t>The best initial functional test of humoral immunity is:</a:t>
+            </a:r>
+            <a:endParaRPr lang="en-US" sz="1450" dirty="0"/>
+          </a:p>
+        </p:txBody>
+      </p:sp>
+      <p:sp>
+        <p:nvSpPr>
+          <p:cNvPr id="5" name="Text 3"/>
+          <p:cNvSpPr/>
+          <p:nvPr/>
+        </p:nvSpPr>
+        <p:spPr>
+          <a:xfrm>
+            <a:off x="658368" y="2395728"/>
+            <a:ext cx="6192390" cy="3017520"/>
+          </a:xfrm>
+          <a:prstGeom prst="rect">
+            <a:avLst/>
+          </a:prstGeom>
+          <a:noFill/>
+          <a:ln/>
+        </p:spPr>
+        <p:txBody>
+          <a:bodyPr wrap="square" lIns="0" tIns="0" rIns="0" bIns="0" rtlCol="0" anchor="t"/>
+          <a:lstStyle/>
+          <a:p>
+            <a:pPr algn="l" indent="0" marL="0">
+              <a:spcAft>
+                <a:spcPts val="600"/>
+              </a:spcAft>
+              <a:buNone/>
+            </a:pPr>
+            <a:r>
+              <a:rPr lang="en-US" sz="1350" dirty="0">
+                <a:solidFill>
+                  <a:srgbClr val="33444F"/>
+                </a:solidFill>
+                <a:latin typeface="Calibri" pitchFamily="34" charset="0"/>
+                <a:ea typeface="Calibri" pitchFamily="34" charset="-122"/>
+                <a:cs typeface="Calibri" pitchFamily="34" charset="-120"/>
+              </a:rPr>
+              <a:t>A. Total IgE</a:t>
+            </a:r>
+            <a:endParaRPr lang="en-US" sz="1350" dirty="0"/>
+          </a:p>
+          <a:p>
+            <a:pPr algn="l" indent="0" marL="0">
+              <a:spcAft>
+                <a:spcPts val="600"/>
+              </a:spcAft>
+              <a:buNone/>
+            </a:pPr>
+            <a:r>
+              <a:rPr lang="en-US" sz="1350" b="1" dirty="0">
+                <a:solidFill>
+                  <a:srgbClr val="4A1269"/>
+                </a:solidFill>
+                <a:latin typeface="Calibri" pitchFamily="34" charset="0"/>
+                <a:ea typeface="Calibri" pitchFamily="34" charset="-122"/>
+                <a:cs typeface="Calibri" pitchFamily="34" charset="-120"/>
+              </a:rPr>
+              <a:t>B. Vaccine (antibody) response titers</a:t>
+            </a:r>
+            <a:endParaRPr lang="en-US" sz="1350" dirty="0"/>
+          </a:p>
+          <a:p>
+            <a:pPr algn="l" indent="0" marL="0">
+              <a:spcAft>
+                <a:spcPts val="600"/>
+              </a:spcAft>
+              <a:buNone/>
+            </a:pPr>
+            <a:r>
+              <a:rPr lang="en-US" sz="1350" dirty="0">
+                <a:solidFill>
+                  <a:srgbClr val="33444F"/>
+                </a:solidFill>
+                <a:latin typeface="Calibri" pitchFamily="34" charset="0"/>
+                <a:ea typeface="Calibri" pitchFamily="34" charset="-122"/>
+                <a:cs typeface="Calibri" pitchFamily="34" charset="-120"/>
+              </a:rPr>
+              <a:t>C. CH50</a:t>
+            </a:r>
+            <a:endParaRPr lang="en-US" sz="1350" dirty="0"/>
+          </a:p>
+          <a:p>
+            <a:pPr algn="l" indent="0" marL="0">
+              <a:spcAft>
+                <a:spcPts val="600"/>
+              </a:spcAft>
+              <a:buNone/>
+            </a:pPr>
+            <a:r>
+              <a:rPr lang="en-US" sz="1350" dirty="0">
+                <a:solidFill>
+                  <a:srgbClr val="33444F"/>
+                </a:solidFill>
+                <a:latin typeface="Calibri" pitchFamily="34" charset="0"/>
+                <a:ea typeface="Calibri" pitchFamily="34" charset="-122"/>
+                <a:cs typeface="Calibri" pitchFamily="34" charset="-120"/>
+              </a:rPr>
+              <a:t>D. Lymphocyte subsets</a:t>
+            </a:r>
+            <a:endParaRPr lang="en-US" sz="1350" dirty="0"/>
+          </a:p>
+          <a:p>
+            <a:pPr algn="l" indent="0" marL="0">
+              <a:spcAft>
+                <a:spcPts val="600"/>
+              </a:spcAft>
+              <a:buNone/>
+            </a:pPr>
+            <a:r>
+              <a:rPr lang="en-US" sz="1350" dirty="0">
+                <a:solidFill>
+                  <a:srgbClr val="33444F"/>
+                </a:solidFill>
+                <a:latin typeface="Calibri" pitchFamily="34" charset="0"/>
+                <a:ea typeface="Calibri" pitchFamily="34" charset="-122"/>
+                <a:cs typeface="Calibri" pitchFamily="34" charset="-120"/>
+              </a:rPr>
+              <a:t>E. SPEP</a:t>
+            </a:r>
+            <a:endParaRPr lang="en-US" sz="1350" dirty="0"/>
+          </a:p>
+        </p:txBody>
+      </p:sp>
+      <p:sp>
+        <p:nvSpPr>
+          <p:cNvPr id="6" name="Shape 4"/>
+          <p:cNvSpPr/>
+          <p:nvPr/>
+        </p:nvSpPr>
+        <p:spPr>
+          <a:xfrm>
+            <a:off x="7201632" y="2395728"/>
+            <a:ext cx="4423136" cy="3246120"/>
           </a:xfrm>
           <a:prstGeom prst="roundRect">
             <a:avLst>
-              <a:gd name="adj" fmla="val 7609"/>
+              <a:gd name="adj" fmla="val 2535"/>
             </a:avLst>
           </a:prstGeom>
           <a:solidFill>
-            <a:srgbClr val="143651"/>
-          </a:solidFill>
-          <a:ln/>
-        </p:spPr>
-      </p:sp>
-      <p:sp>
-        <p:nvSpPr>
-          <p:cNvPr id="5" name="Shape 3"/>
-          <p:cNvSpPr/>
-          <p:nvPr/>
-        </p:nvSpPr>
-        <p:spPr>
-          <a:xfrm>
-            <a:off x="749808" y="1755648"/>
-            <a:ext cx="365760" cy="365760"/>
-          </a:xfrm>
-          <a:prstGeom prst="ellipse">
-            <a:avLst/>
-          </a:prstGeom>
-          <a:solidFill>
-            <a:srgbClr val="6A1B9A"/>
+            <a:srgbClr val="F1E8F7"/>
           </a:solidFill>
           <a:ln/>
           <a:effectLst>
@@ -8395,14 +8663,14 @@
       </p:sp>
       <p:sp>
         <p:nvSpPr>
-          <p:cNvPr id="6" name="Text 4"/>
-          <p:cNvSpPr/>
-          <p:nvPr/>
-        </p:nvSpPr>
-        <p:spPr>
-          <a:xfrm>
-            <a:off x="749808" y="1755648"/>
-            <a:ext cx="365760" cy="365760"/>
+          <p:cNvPr id="7" name="Text 5"/>
+          <p:cNvSpPr/>
+          <p:nvPr/>
+        </p:nvSpPr>
+        <p:spPr>
+          <a:xfrm>
+            <a:off x="7439376" y="2578608"/>
+            <a:ext cx="3965936" cy="457200"/>
           </a:xfrm>
           <a:prstGeom prst="rect">
             <a:avLst/>
@@ -8414,19 +8682,33 @@
           <a:bodyPr wrap="square" lIns="0" tIns="0" rIns="0" bIns="0" rtlCol="0" anchor="ctr"/>
           <a:lstStyle/>
           <a:p>
-            <a:pPr algn="ctr" indent="0" marL="0">
+            <a:pPr indent="0" marL="0">
               <a:buNone/>
             </a:pPr>
             <a:r>
               <a:rPr lang="en-US" sz="1500" b="1" dirty="0">
                 <a:solidFill>
-                  <a:srgbClr val="FFFFFF"/>
-                </a:solidFill>
-                <a:latin typeface="Calibri" pitchFamily="34" charset="0"/>
-                <a:ea typeface="Calibri" pitchFamily="34" charset="-122"/>
-                <a:cs typeface="Calibri" pitchFamily="34" charset="-120"/>
-              </a:rPr>
-              <a:t>1</a:t>
+                  <a:srgbClr val="6A1B9A"/>
+                </a:solidFill>
+                <a:latin typeface="Calibri" pitchFamily="34" charset="0"/>
+                <a:ea typeface="Calibri" pitchFamily="34" charset="-122"/>
+                <a:cs typeface="Calibri" pitchFamily="34" charset="-120"/>
+              </a:rPr>
+              <a:t>ANSWER  </a:t>
+            </a:r>
+            <a:pPr indent="0" marL="0">
+              <a:buNone/>
+            </a:pPr>
+            <a:r>
+              <a:rPr lang="en-US" sz="1500" b="1" dirty="0">
+                <a:solidFill>
+                  <a:srgbClr val="1B2A38"/>
+                </a:solidFill>
+                <a:latin typeface="Calibri" pitchFamily="34" charset="0"/>
+                <a:ea typeface="Calibri" pitchFamily="34" charset="-122"/>
+                <a:cs typeface="Calibri" pitchFamily="34" charset="-120"/>
+              </a:rPr>
+              <a:t>B — Vaccine response titers</a:t>
             </a:r>
             <a:endParaRPr lang="en-US" sz="1500" dirty="0"/>
           </a:p>
@@ -8434,14 +8716,56 @@
       </p:sp>
       <p:sp>
         <p:nvSpPr>
-          <p:cNvPr id="7" name="Text 5"/>
-          <p:cNvSpPr/>
-          <p:nvPr/>
-        </p:nvSpPr>
-        <p:spPr>
-          <a:xfrm>
-            <a:off x="1280160" y="1517904"/>
-            <a:ext cx="10143439" cy="841248"/>
+          <p:cNvPr id="8" name="Text 6"/>
+          <p:cNvSpPr/>
+          <p:nvPr/>
+        </p:nvSpPr>
+        <p:spPr>
+          <a:xfrm>
+            <a:off x="7439376" y="3127248"/>
+            <a:ext cx="3947648" cy="2377440"/>
+          </a:xfrm>
+          <a:prstGeom prst="rect">
+            <a:avLst/>
+          </a:prstGeom>
+          <a:noFill/>
+          <a:ln/>
+        </p:spPr>
+        <p:txBody>
+          <a:bodyPr wrap="square" lIns="0" tIns="0" rIns="0" bIns="0" rtlCol="0" anchor="t"/>
+          <a:lstStyle/>
+          <a:p>
+            <a:pPr algn="l" indent="0" marL="0">
+              <a:lnSpc>
+                <a:spcPct val="108000"/>
+              </a:lnSpc>
+              <a:buNone/>
+            </a:pPr>
+            <a:r>
+              <a:rPr lang="en-US" sz="1250" dirty="0">
+                <a:solidFill>
+                  <a:srgbClr val="33444F"/>
+                </a:solidFill>
+                <a:latin typeface="Calibri" pitchFamily="34" charset="0"/>
+                <a:ea typeface="Calibri" pitchFamily="34" charset="-122"/>
+                <a:cs typeface="Calibri" pitchFamily="34" charset="-120"/>
+              </a:rPr>
+              <a:t>Pre/post-vaccine antibody titers assess the ability to mount a protective humoral response.</a:t>
+            </a:r>
+            <a:endParaRPr lang="en-US" sz="1250" dirty="0"/>
+          </a:p>
+        </p:txBody>
+      </p:sp>
+      <p:sp>
+        <p:nvSpPr>
+          <p:cNvPr id="9" name="Text 7"/>
+          <p:cNvSpPr/>
+          <p:nvPr/>
+        </p:nvSpPr>
+        <p:spPr>
+          <a:xfrm>
+            <a:off x="566928" y="6473952"/>
+            <a:ext cx="7772400" cy="274320"/>
           </a:xfrm>
           <a:prstGeom prst="rect">
             <a:avLst/>
@@ -8457,68 +8781,19 @@
               <a:buNone/>
             </a:pPr>
             <a:r>
-              <a:rPr lang="en-US" sz="1350" dirty="0">
-                <a:solidFill>
-                  <a:srgbClr val="E7EEF4"/>
-                </a:solidFill>
-                <a:latin typeface="Calibri" pitchFamily="34" charset="0"/>
-                <a:ea typeface="Calibri" pitchFamily="34" charset="-122"/>
-                <a:cs typeface="Calibri" pitchFamily="34" charset="-120"/>
-              </a:rPr>
-              <a:t>Quantitative immunoglobulins anchor the humoral workup; vaccine-response titers test FUNCTION.</a:t>
-            </a:r>
-            <a:endParaRPr lang="en-US" sz="1350" dirty="0"/>
-          </a:p>
-        </p:txBody>
-      </p:sp>
-      <p:sp>
-        <p:nvSpPr>
-          <p:cNvPr id="8" name="Shape 6"/>
-          <p:cNvSpPr/>
-          <p:nvPr/>
-        </p:nvSpPr>
-        <p:spPr>
-          <a:xfrm>
-            <a:off x="566928" y="2505456"/>
-            <a:ext cx="11057839" cy="841248"/>
-          </a:xfrm>
-          <a:prstGeom prst="roundRect">
-            <a:avLst>
-              <a:gd name="adj" fmla="val 7609"/>
-            </a:avLst>
-          </a:prstGeom>
-          <a:solidFill>
-            <a:srgbClr val="143651"/>
-          </a:solidFill>
-          <a:ln/>
-        </p:spPr>
-      </p:sp>
-      <p:sp>
-        <p:nvSpPr>
-          <p:cNvPr id="9" name="Shape 7"/>
-          <p:cNvSpPr/>
-          <p:nvPr/>
-        </p:nvSpPr>
-        <p:spPr>
-          <a:xfrm>
-            <a:off x="749808" y="2743200"/>
-            <a:ext cx="365760" cy="365760"/>
-          </a:xfrm>
-          <a:prstGeom prst="ellipse">
-            <a:avLst/>
-          </a:prstGeom>
-          <a:solidFill>
-            <a:srgbClr val="6A1B9A"/>
-          </a:solidFill>
-          <a:ln/>
-          <a:effectLst>
-            <a:outerShdw sx="100000" sy="100000" kx="0" ky="0" algn="bl" rotWithShape="0" blurRad="88900" dist="25400" dir="5400000">
-              <a:srgbClr val="22303C">
-                <a:alpha val="12000"/>
-              </a:srgbClr>
-            </a:outerShdw>
-          </a:effectLst>
-        </p:spPr>
+              <a:rPr lang="en-US" sz="850" dirty="0">
+                <a:solidFill>
+                  <a:srgbClr val="9AA8B4"/>
+                </a:solidFill>
+                <a:latin typeface="Calibri" pitchFamily="34" charset="0"/>
+                <a:ea typeface="Calibri" pitchFamily="34" charset="-122"/>
+                <a:cs typeface="Calibri" pitchFamily="34" charset="-120"/>
+              </a:rPr>
+              <a:t>Makassed General Hospital  ·  Department of Laboratory Medicine</a:t>
+            </a:r>
+            <a:endParaRPr lang="en-US" sz="850" dirty="0"/>
+          </a:p>
+        </p:txBody>
       </p:sp>
       <p:sp>
         <p:nvSpPr>
@@ -8528,8 +8803,8 @@
         </p:nvSpPr>
         <p:spPr>
           <a:xfrm>
-            <a:off x="749808" y="2743200"/>
-            <a:ext cx="365760" cy="365760"/>
+            <a:off x="9814255" y="6473952"/>
+            <a:ext cx="1828800" cy="274320"/>
           </a:xfrm>
           <a:prstGeom prst="rect">
             <a:avLst/>
@@ -8541,504 +8816,34 @@
           <a:bodyPr wrap="square" lIns="0" tIns="0" rIns="0" bIns="0" rtlCol="0" anchor="ctr"/>
           <a:lstStyle/>
           <a:p>
-            <a:pPr algn="ctr" indent="0" marL="0">
-              <a:buNone/>
-            </a:pPr>
-            <a:r>
-              <a:rPr lang="en-US" sz="1500" b="1" dirty="0">
-                <a:solidFill>
-                  <a:srgbClr val="FFFFFF"/>
-                </a:solidFill>
-                <a:latin typeface="Calibri" pitchFamily="34" charset="0"/>
-                <a:ea typeface="Calibri" pitchFamily="34" charset="-122"/>
-                <a:cs typeface="Calibri" pitchFamily="34" charset="-120"/>
-              </a:rPr>
-              <a:t>2</a:t>
-            </a:r>
-            <a:endParaRPr lang="en-US" sz="1500" dirty="0"/>
-          </a:p>
-        </p:txBody>
-      </p:sp>
-      <p:sp>
-        <p:nvSpPr>
-          <p:cNvPr id="11" name="Text 9"/>
-          <p:cNvSpPr/>
-          <p:nvPr/>
-        </p:nvSpPr>
-        <p:spPr>
-          <a:xfrm>
-            <a:off x="1280160" y="2505456"/>
-            <a:ext cx="10143439" cy="841248"/>
-          </a:xfrm>
-          <a:prstGeom prst="rect">
-            <a:avLst/>
-          </a:prstGeom>
-          <a:noFill/>
-          <a:ln/>
-        </p:spPr>
-        <p:txBody>
-          <a:bodyPr wrap="square" lIns="0" tIns="0" rIns="0" bIns="0" rtlCol="0" anchor="ctr"/>
-          <a:lstStyle/>
-          <a:p>
-            <a:pPr algn="l" indent="0" marL="0">
-              <a:buNone/>
-            </a:pPr>
-            <a:r>
-              <a:rPr lang="en-US" sz="1350" dirty="0">
-                <a:solidFill>
-                  <a:srgbClr val="E7EEF4"/>
-                </a:solidFill>
-                <a:latin typeface="Calibri" pitchFamily="34" charset="0"/>
-                <a:ea typeface="Calibri" pitchFamily="34" charset="-122"/>
-                <a:cs typeface="Calibri" pitchFamily="34" charset="-120"/>
-              </a:rPr>
-              <a:t>Selective IgA deficiency is the commonest primary immunodeficiency — and matters for transfusion (anti-IgA).</a:t>
-            </a:r>
-            <a:endParaRPr lang="en-US" sz="1350" dirty="0"/>
-          </a:p>
-        </p:txBody>
-      </p:sp>
-      <p:sp>
-        <p:nvSpPr>
-          <p:cNvPr id="12" name="Shape 10"/>
-          <p:cNvSpPr/>
-          <p:nvPr/>
-        </p:nvSpPr>
-        <p:spPr>
-          <a:xfrm>
-            <a:off x="566928" y="3493008"/>
-            <a:ext cx="11057839" cy="841248"/>
-          </a:xfrm>
-          <a:prstGeom prst="roundRect">
-            <a:avLst>
-              <a:gd name="adj" fmla="val 7609"/>
-            </a:avLst>
-          </a:prstGeom>
-          <a:solidFill>
-            <a:srgbClr val="143651"/>
-          </a:solidFill>
-          <a:ln/>
-        </p:spPr>
-      </p:sp>
-      <p:sp>
-        <p:nvSpPr>
-          <p:cNvPr id="13" name="Shape 11"/>
-          <p:cNvSpPr/>
-          <p:nvPr/>
-        </p:nvSpPr>
-        <p:spPr>
-          <a:xfrm>
-            <a:off x="749808" y="3730752"/>
-            <a:ext cx="365760" cy="365760"/>
-          </a:xfrm>
-          <a:prstGeom prst="ellipse">
-            <a:avLst/>
-          </a:prstGeom>
-          <a:solidFill>
-            <a:srgbClr val="6A1B9A"/>
-          </a:solidFill>
-          <a:ln/>
-          <a:effectLst>
-            <a:outerShdw sx="100000" sy="100000" kx="0" ky="0" algn="bl" rotWithShape="0" blurRad="88900" dist="25400" dir="5400000">
-              <a:srgbClr val="22303C">
-                <a:alpha val="12000"/>
-              </a:srgbClr>
-            </a:outerShdw>
-          </a:effectLst>
-        </p:spPr>
-      </p:sp>
-      <p:sp>
-        <p:nvSpPr>
-          <p:cNvPr id="14" name="Text 12"/>
-          <p:cNvSpPr/>
-          <p:nvPr/>
-        </p:nvSpPr>
-        <p:spPr>
-          <a:xfrm>
-            <a:off x="749808" y="3730752"/>
-            <a:ext cx="365760" cy="365760"/>
-          </a:xfrm>
-          <a:prstGeom prst="rect">
-            <a:avLst/>
-          </a:prstGeom>
-          <a:noFill/>
-          <a:ln/>
-        </p:spPr>
-        <p:txBody>
-          <a:bodyPr wrap="square" lIns="0" tIns="0" rIns="0" bIns="0" rtlCol="0" anchor="ctr"/>
-          <a:lstStyle/>
-          <a:p>
-            <a:pPr algn="ctr" indent="0" marL="0">
-              <a:buNone/>
-            </a:pPr>
-            <a:r>
-              <a:rPr lang="en-US" sz="1500" b="1" dirty="0">
-                <a:solidFill>
-                  <a:srgbClr val="FFFFFF"/>
-                </a:solidFill>
-                <a:latin typeface="Calibri" pitchFamily="34" charset="0"/>
-                <a:ea typeface="Calibri" pitchFamily="34" charset="-122"/>
-                <a:cs typeface="Calibri" pitchFamily="34" charset="-120"/>
-              </a:rPr>
-              <a:t>3</a:t>
-            </a:r>
-            <a:endParaRPr lang="en-US" sz="1500" dirty="0"/>
-          </a:p>
-        </p:txBody>
-      </p:sp>
-      <p:sp>
-        <p:nvSpPr>
-          <p:cNvPr id="15" name="Text 13"/>
-          <p:cNvSpPr/>
-          <p:nvPr/>
-        </p:nvSpPr>
-        <p:spPr>
-          <a:xfrm>
-            <a:off x="1280160" y="3493008"/>
-            <a:ext cx="10143439" cy="841248"/>
-          </a:xfrm>
-          <a:prstGeom prst="rect">
-            <a:avLst/>
-          </a:prstGeom>
-          <a:noFill/>
-          <a:ln/>
-        </p:spPr>
-        <p:txBody>
-          <a:bodyPr wrap="square" lIns="0" tIns="0" rIns="0" bIns="0" rtlCol="0" anchor="ctr"/>
-          <a:lstStyle/>
-          <a:p>
-            <a:pPr algn="l" indent="0" marL="0">
-              <a:buNone/>
-            </a:pPr>
-            <a:r>
-              <a:rPr lang="en-US" sz="1350" dirty="0">
-                <a:solidFill>
-                  <a:srgbClr val="E7EEF4"/>
-                </a:solidFill>
-                <a:latin typeface="Calibri" pitchFamily="34" charset="0"/>
-                <a:ea typeface="Calibri" pitchFamily="34" charset="-122"/>
-                <a:cs typeface="Calibri" pitchFamily="34" charset="-120"/>
-              </a:rPr>
-              <a:t>Specific IgE shows sensitization (not clinical allergy); acute-vs-baseline tryptase supports anaphylaxis.</a:t>
-            </a:r>
-            <a:endParaRPr lang="en-US" sz="1350" dirty="0"/>
-          </a:p>
-        </p:txBody>
-      </p:sp>
-      <p:sp>
-        <p:nvSpPr>
-          <p:cNvPr id="16" name="Shape 14"/>
-          <p:cNvSpPr/>
-          <p:nvPr/>
-        </p:nvSpPr>
-        <p:spPr>
-          <a:xfrm>
-            <a:off x="566928" y="4480560"/>
-            <a:ext cx="11057839" cy="841248"/>
-          </a:xfrm>
-          <a:prstGeom prst="roundRect">
-            <a:avLst>
-              <a:gd name="adj" fmla="val 7609"/>
-            </a:avLst>
-          </a:prstGeom>
-          <a:solidFill>
-            <a:srgbClr val="143651"/>
-          </a:solidFill>
-          <a:ln/>
-        </p:spPr>
-      </p:sp>
-      <p:sp>
-        <p:nvSpPr>
-          <p:cNvPr id="17" name="Shape 15"/>
-          <p:cNvSpPr/>
-          <p:nvPr/>
-        </p:nvSpPr>
-        <p:spPr>
-          <a:xfrm>
-            <a:off x="749808" y="4718304"/>
-            <a:ext cx="365760" cy="365760"/>
-          </a:xfrm>
-          <a:prstGeom prst="ellipse">
-            <a:avLst/>
-          </a:prstGeom>
-          <a:solidFill>
-            <a:srgbClr val="6A1B9A"/>
-          </a:solidFill>
-          <a:ln/>
-          <a:effectLst>
-            <a:outerShdw sx="100000" sy="100000" kx="0" ky="0" algn="bl" rotWithShape="0" blurRad="88900" dist="25400" dir="5400000">
-              <a:srgbClr val="22303C">
-                <a:alpha val="12000"/>
-              </a:srgbClr>
-            </a:outerShdw>
-          </a:effectLst>
-        </p:spPr>
-      </p:sp>
-      <p:sp>
-        <p:nvSpPr>
-          <p:cNvPr id="18" name="Text 16"/>
-          <p:cNvSpPr/>
-          <p:nvPr/>
-        </p:nvSpPr>
-        <p:spPr>
-          <a:xfrm>
-            <a:off x="749808" y="4718304"/>
-            <a:ext cx="365760" cy="365760"/>
-          </a:xfrm>
-          <a:prstGeom prst="rect">
-            <a:avLst/>
-          </a:prstGeom>
-          <a:noFill/>
-          <a:ln/>
-        </p:spPr>
-        <p:txBody>
-          <a:bodyPr wrap="square" lIns="0" tIns="0" rIns="0" bIns="0" rtlCol="0" anchor="ctr"/>
-          <a:lstStyle/>
-          <a:p>
-            <a:pPr algn="ctr" indent="0" marL="0">
-              <a:buNone/>
-            </a:pPr>
-            <a:r>
-              <a:rPr lang="en-US" sz="1500" b="1" dirty="0">
-                <a:solidFill>
-                  <a:srgbClr val="FFFFFF"/>
-                </a:solidFill>
-                <a:latin typeface="Calibri" pitchFamily="34" charset="0"/>
-                <a:ea typeface="Calibri" pitchFamily="34" charset="-122"/>
-                <a:cs typeface="Calibri" pitchFamily="34" charset="-120"/>
-              </a:rPr>
-              <a:t>4</a:t>
-            </a:r>
-            <a:endParaRPr lang="en-US" sz="1500" dirty="0"/>
-          </a:p>
-        </p:txBody>
-      </p:sp>
-      <p:sp>
-        <p:nvSpPr>
-          <p:cNvPr id="19" name="Text 17"/>
-          <p:cNvSpPr/>
-          <p:nvPr/>
-        </p:nvSpPr>
-        <p:spPr>
-          <a:xfrm>
-            <a:off x="1280160" y="4480560"/>
-            <a:ext cx="10143439" cy="841248"/>
-          </a:xfrm>
-          <a:prstGeom prst="rect">
-            <a:avLst/>
-          </a:prstGeom>
-          <a:noFill/>
-          <a:ln/>
-        </p:spPr>
-        <p:txBody>
-          <a:bodyPr wrap="square" lIns="0" tIns="0" rIns="0" bIns="0" rtlCol="0" anchor="ctr"/>
-          <a:lstStyle/>
-          <a:p>
-            <a:pPr algn="l" indent="0" marL="0">
-              <a:buNone/>
-            </a:pPr>
-            <a:r>
-              <a:rPr lang="en-US" sz="1350" dirty="0">
-                <a:solidFill>
-                  <a:srgbClr val="E7EEF4"/>
-                </a:solidFill>
-                <a:latin typeface="Calibri" pitchFamily="34" charset="0"/>
-                <a:ea typeface="Calibri" pitchFamily="34" charset="-122"/>
-                <a:cs typeface="Calibri" pitchFamily="34" charset="-120"/>
-              </a:rPr>
-              <a:t>Low C3/C4 indicate consumption or deficiency; terminal complement deficiency predisposes to Neisseria; low C4 in hereditary angioedema.</a:t>
-            </a:r>
-            <a:endParaRPr lang="en-US" sz="1350" dirty="0"/>
-          </a:p>
-        </p:txBody>
-      </p:sp>
-      <p:sp>
-        <p:nvSpPr>
-          <p:cNvPr id="20" name="Shape 18"/>
-          <p:cNvSpPr/>
-          <p:nvPr/>
-        </p:nvSpPr>
-        <p:spPr>
-          <a:xfrm>
-            <a:off x="566928" y="5468112"/>
-            <a:ext cx="11057839" cy="841248"/>
-          </a:xfrm>
-          <a:prstGeom prst="roundRect">
-            <a:avLst>
-              <a:gd name="adj" fmla="val 7609"/>
-            </a:avLst>
-          </a:prstGeom>
-          <a:solidFill>
-            <a:srgbClr val="143651"/>
-          </a:solidFill>
-          <a:ln/>
-        </p:spPr>
-      </p:sp>
-      <p:sp>
-        <p:nvSpPr>
-          <p:cNvPr id="21" name="Shape 19"/>
-          <p:cNvSpPr/>
-          <p:nvPr/>
-        </p:nvSpPr>
-        <p:spPr>
-          <a:xfrm>
-            <a:off x="749808" y="5705856"/>
-            <a:ext cx="365760" cy="365760"/>
-          </a:xfrm>
-          <a:prstGeom prst="ellipse">
-            <a:avLst/>
-          </a:prstGeom>
-          <a:solidFill>
-            <a:srgbClr val="6A1B9A"/>
-          </a:solidFill>
-          <a:ln/>
-          <a:effectLst>
-            <a:outerShdw sx="100000" sy="100000" kx="0" ky="0" algn="bl" rotWithShape="0" blurRad="88900" dist="25400" dir="5400000">
-              <a:srgbClr val="22303C">
-                <a:alpha val="12000"/>
-              </a:srgbClr>
-            </a:outerShdw>
-          </a:effectLst>
-        </p:spPr>
-      </p:sp>
-      <p:sp>
-        <p:nvSpPr>
-          <p:cNvPr id="22" name="Text 20"/>
-          <p:cNvSpPr/>
-          <p:nvPr/>
-        </p:nvSpPr>
-        <p:spPr>
-          <a:xfrm>
-            <a:off x="749808" y="5705856"/>
-            <a:ext cx="365760" cy="365760"/>
-          </a:xfrm>
-          <a:prstGeom prst="rect">
-            <a:avLst/>
-          </a:prstGeom>
-          <a:noFill/>
-          <a:ln/>
-        </p:spPr>
-        <p:txBody>
-          <a:bodyPr wrap="square" lIns="0" tIns="0" rIns="0" bIns="0" rtlCol="0" anchor="ctr"/>
-          <a:lstStyle/>
-          <a:p>
-            <a:pPr algn="ctr" indent="0" marL="0">
-              <a:buNone/>
-            </a:pPr>
-            <a:r>
-              <a:rPr lang="en-US" sz="1500" b="1" dirty="0">
-                <a:solidFill>
-                  <a:srgbClr val="FFFFFF"/>
-                </a:solidFill>
-                <a:latin typeface="Calibri" pitchFamily="34" charset="0"/>
-                <a:ea typeface="Calibri" pitchFamily="34" charset="-122"/>
-                <a:cs typeface="Calibri" pitchFamily="34" charset="-120"/>
-              </a:rPr>
-              <a:t>5</a:t>
-            </a:r>
-            <a:endParaRPr lang="en-US" sz="1500" dirty="0"/>
-          </a:p>
-        </p:txBody>
-      </p:sp>
-      <p:sp>
-        <p:nvSpPr>
-          <p:cNvPr id="23" name="Text 21"/>
-          <p:cNvSpPr/>
-          <p:nvPr/>
-        </p:nvSpPr>
-        <p:spPr>
-          <a:xfrm>
-            <a:off x="1280160" y="5468112"/>
-            <a:ext cx="10143439" cy="841248"/>
-          </a:xfrm>
-          <a:prstGeom prst="rect">
-            <a:avLst/>
-          </a:prstGeom>
-          <a:noFill/>
-          <a:ln/>
-        </p:spPr>
-        <p:txBody>
-          <a:bodyPr wrap="square" lIns="0" tIns="0" rIns="0" bIns="0" rtlCol="0" anchor="ctr"/>
-          <a:lstStyle/>
-          <a:p>
-            <a:pPr algn="l" indent="0" marL="0">
-              <a:buNone/>
-            </a:pPr>
-            <a:r>
-              <a:rPr lang="en-US" sz="1350" dirty="0">
-                <a:solidFill>
-                  <a:srgbClr val="E7EEF4"/>
-                </a:solidFill>
-                <a:latin typeface="Calibri" pitchFamily="34" charset="0"/>
-                <a:ea typeface="Calibri" pitchFamily="34" charset="-122"/>
-                <a:cs typeface="Calibri" pitchFamily="34" charset="-120"/>
-              </a:rPr>
-              <a:t>Match the immunodeficiency workup to the infection pattern and refer for definitive evaluation.</a:t>
-            </a:r>
-            <a:endParaRPr lang="en-US" sz="1350" dirty="0"/>
-          </a:p>
-        </p:txBody>
-      </p:sp>
-      <p:sp>
-        <p:nvSpPr>
-          <p:cNvPr id="24" name="Text 22"/>
-          <p:cNvSpPr/>
-          <p:nvPr/>
-        </p:nvSpPr>
-        <p:spPr>
-          <a:xfrm>
-            <a:off x="566928" y="6473952"/>
-            <a:ext cx="8229600" cy="274320"/>
-          </a:xfrm>
-          <a:prstGeom prst="rect">
-            <a:avLst/>
-          </a:prstGeom>
-          <a:noFill/>
-          <a:ln/>
-        </p:spPr>
-        <p:txBody>
-          <a:bodyPr wrap="square" lIns="0" tIns="0" rIns="0" bIns="0" rtlCol="0" anchor="ctr"/>
-          <a:lstStyle/>
-          <a:p>
-            <a:pPr indent="0" marL="0">
+            <a:pPr algn="r" indent="0" marL="0">
               <a:buNone/>
             </a:pPr>
             <a:r>
               <a:rPr lang="en-US" sz="850" dirty="0">
                 <a:solidFill>
-                  <a:srgbClr val="5E7488"/>
-                </a:solidFill>
-                <a:latin typeface="Calibri" pitchFamily="34" charset="0"/>
-                <a:ea typeface="Calibri" pitchFamily="34" charset="-122"/>
-                <a:cs typeface="Calibri" pitchFamily="34" charset="-120"/>
-              </a:rPr>
-              <a:t>Makassed General Hospital  ·  Department of Laboratory Medicine</a:t>
-            </a:r>
-            <a:endParaRPr lang="en-US" sz="850" dirty="0"/>
-          </a:p>
-        </p:txBody>
-      </p:sp>
-      <p:sp>
-        <p:nvSpPr>
-          <p:cNvPr id="25" name="Text 23"/>
-          <p:cNvSpPr/>
-          <p:nvPr/>
-        </p:nvSpPr>
-        <p:spPr>
-          <a:xfrm>
-            <a:off x="11002975" y="6473952"/>
-            <a:ext cx="640080" cy="274320"/>
-          </a:xfrm>
-          <a:prstGeom prst="rect">
-            <a:avLst/>
-          </a:prstGeom>
-          <a:noFill/>
-          <a:ln/>
-        </p:spPr>
-        <p:txBody>
-          <a:bodyPr wrap="square" lIns="0" tIns="0" rIns="0" bIns="0" rtlCol="0" anchor="ctr"/>
-          <a:lstStyle/>
-          <a:p>
+                  <a:srgbClr val="9AA8B4"/>
+                </a:solidFill>
+                <a:latin typeface="Calibri" pitchFamily="34" charset="0"/>
+                <a:ea typeface="Calibri" pitchFamily="34" charset="-122"/>
+                <a:cs typeface="Calibri" pitchFamily="34" charset="-120"/>
+              </a:rPr>
+              <a:t>CP Lecture Series</a:t>
+            </a:r>
+            <a:pPr algn="r" indent="0" marL="0">
+              <a:buNone/>
+            </a:pPr>
+            <a:r>
+              <a:rPr lang="en-US" sz="850" dirty="0">
+                <a:solidFill>
+                  <a:srgbClr val="DCE4EC"/>
+                </a:solidFill>
+                <a:latin typeface="Calibri" pitchFamily="34" charset="0"/>
+                <a:ea typeface="Calibri" pitchFamily="34" charset="-122"/>
+                <a:cs typeface="Calibri" pitchFamily="34" charset="-120"/>
+              </a:rPr>
+              <a:t>   ·   </a:t>
+            </a:r>
             <a:pPr algn="r" indent="0" marL="0">
               <a:buNone/>
             </a:pPr>
@@ -9122,6 +8927,1837 @@
                 <a:ea typeface="Calibri" pitchFamily="34" charset="-122"/>
                 <a:cs typeface="Calibri" pitchFamily="34" charset="-120"/>
               </a:rPr>
+              <a:t>IMMUNOLOGY &amp; SEROLOGY   ·   BOARD REVIEW  ·  Q3</a:t>
+            </a:r>
+            <a:endParaRPr lang="en-US" sz="1100" dirty="0"/>
+          </a:p>
+        </p:txBody>
+      </p:sp>
+      <p:sp>
+        <p:nvSpPr>
+          <p:cNvPr id="3" name="Text 1"/>
+          <p:cNvSpPr/>
+          <p:nvPr/>
+        </p:nvSpPr>
+        <p:spPr>
+          <a:xfrm>
+            <a:off x="566928" y="713232"/>
+            <a:ext cx="11064240" cy="749808"/>
+          </a:xfrm>
+          <a:prstGeom prst="rect">
+            <a:avLst/>
+          </a:prstGeom>
+          <a:noFill/>
+          <a:ln/>
+        </p:spPr>
+        <p:txBody>
+          <a:bodyPr wrap="square" lIns="0" tIns="0" rIns="0" bIns="0" rtlCol="0" anchor="ctr"/>
+          <a:lstStyle/>
+          <a:p>
+            <a:pPr algn="l" indent="0" marL="0">
+              <a:buNone/>
+            </a:pPr>
+            <a:r>
+              <a:rPr lang="en-US" sz="2600" b="1" dirty="0">
+                <a:solidFill>
+                  <a:srgbClr val="0E3A5F"/>
+                </a:solidFill>
+                <a:latin typeface="Calibri" pitchFamily="34" charset="0"/>
+                <a:ea typeface="Calibri" pitchFamily="34" charset="-122"/>
+                <a:cs typeface="Calibri" pitchFamily="34" charset="-120"/>
+              </a:rPr>
+              <a:t>Board-Style Review</a:t>
+            </a:r>
+            <a:endParaRPr lang="en-US" sz="2600" dirty="0"/>
+          </a:p>
+        </p:txBody>
+      </p:sp>
+      <p:sp>
+        <p:nvSpPr>
+          <p:cNvPr id="4" name="Text 2"/>
+          <p:cNvSpPr/>
+          <p:nvPr/>
+        </p:nvSpPr>
+        <p:spPr>
+          <a:xfrm>
+            <a:off x="566928" y="1417320"/>
+            <a:ext cx="11057839" cy="914400"/>
+          </a:xfrm>
+          <a:prstGeom prst="rect">
+            <a:avLst/>
+          </a:prstGeom>
+          <a:noFill/>
+          <a:ln/>
+        </p:spPr>
+        <p:txBody>
+          <a:bodyPr wrap="square" lIns="0" tIns="0" rIns="0" bIns="0" rtlCol="0" anchor="t"/>
+          <a:lstStyle/>
+          <a:p>
+            <a:pPr algn="l" indent="0" marL="0">
+              <a:lnSpc>
+                <a:spcPct val="105000"/>
+              </a:lnSpc>
+              <a:buNone/>
+            </a:pPr>
+            <a:r>
+              <a:rPr lang="en-US" sz="1450" b="1" dirty="0">
+                <a:solidFill>
+                  <a:srgbClr val="1B2A38"/>
+                </a:solidFill>
+                <a:latin typeface="Calibri" pitchFamily="34" charset="0"/>
+                <a:ea typeface="Calibri" pitchFamily="34" charset="-122"/>
+                <a:cs typeface="Calibri" pitchFamily="34" charset="-120"/>
+              </a:rPr>
+              <a:t>On SPEP, a broad-based increase in the gamma region indicates:</a:t>
+            </a:r>
+            <a:endParaRPr lang="en-US" sz="1450" dirty="0"/>
+          </a:p>
+        </p:txBody>
+      </p:sp>
+      <p:sp>
+        <p:nvSpPr>
+          <p:cNvPr id="5" name="Text 3"/>
+          <p:cNvSpPr/>
+          <p:nvPr/>
+        </p:nvSpPr>
+        <p:spPr>
+          <a:xfrm>
+            <a:off x="658368" y="2395728"/>
+            <a:ext cx="6192390" cy="3017520"/>
+          </a:xfrm>
+          <a:prstGeom prst="rect">
+            <a:avLst/>
+          </a:prstGeom>
+          <a:noFill/>
+          <a:ln/>
+        </p:spPr>
+        <p:txBody>
+          <a:bodyPr wrap="square" lIns="0" tIns="0" rIns="0" bIns="0" rtlCol="0" anchor="t"/>
+          <a:lstStyle/>
+          <a:p>
+            <a:pPr algn="l" indent="0" marL="0">
+              <a:spcAft>
+                <a:spcPts val="600"/>
+              </a:spcAft>
+              <a:buNone/>
+            </a:pPr>
+            <a:r>
+              <a:rPr lang="en-US" sz="1350" dirty="0">
+                <a:solidFill>
+                  <a:srgbClr val="33444F"/>
+                </a:solidFill>
+                <a:latin typeface="Calibri" pitchFamily="34" charset="0"/>
+                <a:ea typeface="Calibri" pitchFamily="34" charset="-122"/>
+                <a:cs typeface="Calibri" pitchFamily="34" charset="-120"/>
+              </a:rPr>
+              <a:t>A. Monoclonal gammopathy</a:t>
+            </a:r>
+            <a:endParaRPr lang="en-US" sz="1350" dirty="0"/>
+          </a:p>
+          <a:p>
+            <a:pPr algn="l" indent="0" marL="0">
+              <a:spcAft>
+                <a:spcPts val="600"/>
+              </a:spcAft>
+              <a:buNone/>
+            </a:pPr>
+            <a:r>
+              <a:rPr lang="en-US" sz="1350" b="1" dirty="0">
+                <a:solidFill>
+                  <a:srgbClr val="4A1269"/>
+                </a:solidFill>
+                <a:latin typeface="Calibri" pitchFamily="34" charset="0"/>
+                <a:ea typeface="Calibri" pitchFamily="34" charset="-122"/>
+                <a:cs typeface="Calibri" pitchFamily="34" charset="-120"/>
+              </a:rPr>
+              <a:t>B. Polyclonal increase (infection/inflammation/liver disease)</a:t>
+            </a:r>
+            <a:endParaRPr lang="en-US" sz="1350" dirty="0"/>
+          </a:p>
+          <a:p>
+            <a:pPr algn="l" indent="0" marL="0">
+              <a:spcAft>
+                <a:spcPts val="600"/>
+              </a:spcAft>
+              <a:buNone/>
+            </a:pPr>
+            <a:r>
+              <a:rPr lang="en-US" sz="1350" dirty="0">
+                <a:solidFill>
+                  <a:srgbClr val="33444F"/>
+                </a:solidFill>
+                <a:latin typeface="Calibri" pitchFamily="34" charset="0"/>
+                <a:ea typeface="Calibri" pitchFamily="34" charset="-122"/>
+                <a:cs typeface="Calibri" pitchFamily="34" charset="-120"/>
+              </a:rPr>
+              <a:t>C. Hypogammaglobulinemia</a:t>
+            </a:r>
+            <a:endParaRPr lang="en-US" sz="1350" dirty="0"/>
+          </a:p>
+          <a:p>
+            <a:pPr algn="l" indent="0" marL="0">
+              <a:spcAft>
+                <a:spcPts val="600"/>
+              </a:spcAft>
+              <a:buNone/>
+            </a:pPr>
+            <a:r>
+              <a:rPr lang="en-US" sz="1350" dirty="0">
+                <a:solidFill>
+                  <a:srgbClr val="33444F"/>
+                </a:solidFill>
+                <a:latin typeface="Calibri" pitchFamily="34" charset="0"/>
+                <a:ea typeface="Calibri" pitchFamily="34" charset="-122"/>
+                <a:cs typeface="Calibri" pitchFamily="34" charset="-120"/>
+              </a:rPr>
+              <a:t>D. Nephrotic syndrome</a:t>
+            </a:r>
+            <a:endParaRPr lang="en-US" sz="1350" dirty="0"/>
+          </a:p>
+          <a:p>
+            <a:pPr algn="l" indent="0" marL="0">
+              <a:spcAft>
+                <a:spcPts val="600"/>
+              </a:spcAft>
+              <a:buNone/>
+            </a:pPr>
+            <a:r>
+              <a:rPr lang="en-US" sz="1350" dirty="0">
+                <a:solidFill>
+                  <a:srgbClr val="33444F"/>
+                </a:solidFill>
+                <a:latin typeface="Calibri" pitchFamily="34" charset="0"/>
+                <a:ea typeface="Calibri" pitchFamily="34" charset="-122"/>
+                <a:cs typeface="Calibri" pitchFamily="34" charset="-120"/>
+              </a:rPr>
+              <a:t>E. Light-chain disease</a:t>
+            </a:r>
+            <a:endParaRPr lang="en-US" sz="1350" dirty="0"/>
+          </a:p>
+        </p:txBody>
+      </p:sp>
+      <p:sp>
+        <p:nvSpPr>
+          <p:cNvPr id="6" name="Shape 4"/>
+          <p:cNvSpPr/>
+          <p:nvPr/>
+        </p:nvSpPr>
+        <p:spPr>
+          <a:xfrm>
+            <a:off x="7201632" y="2395728"/>
+            <a:ext cx="4423136" cy="3246120"/>
+          </a:xfrm>
+          <a:prstGeom prst="roundRect">
+            <a:avLst>
+              <a:gd name="adj" fmla="val 2535"/>
+            </a:avLst>
+          </a:prstGeom>
+          <a:solidFill>
+            <a:srgbClr val="F1E8F7"/>
+          </a:solidFill>
+          <a:ln/>
+          <a:effectLst>
+            <a:outerShdw sx="100000" sy="100000" kx="0" ky="0" algn="bl" rotWithShape="0" blurRad="88900" dist="25400" dir="5400000">
+              <a:srgbClr val="22303C">
+                <a:alpha val="12000"/>
+              </a:srgbClr>
+            </a:outerShdw>
+          </a:effectLst>
+        </p:spPr>
+      </p:sp>
+      <p:sp>
+        <p:nvSpPr>
+          <p:cNvPr id="7" name="Text 5"/>
+          <p:cNvSpPr/>
+          <p:nvPr/>
+        </p:nvSpPr>
+        <p:spPr>
+          <a:xfrm>
+            <a:off x="7439376" y="2578608"/>
+            <a:ext cx="3965936" cy="457200"/>
+          </a:xfrm>
+          <a:prstGeom prst="rect">
+            <a:avLst/>
+          </a:prstGeom>
+          <a:noFill/>
+          <a:ln/>
+        </p:spPr>
+        <p:txBody>
+          <a:bodyPr wrap="square" lIns="0" tIns="0" rIns="0" bIns="0" rtlCol="0" anchor="ctr"/>
+          <a:lstStyle/>
+          <a:p>
+            <a:pPr indent="0" marL="0">
+              <a:buNone/>
+            </a:pPr>
+            <a:r>
+              <a:rPr lang="en-US" sz="1500" b="1" dirty="0">
+                <a:solidFill>
+                  <a:srgbClr val="6A1B9A"/>
+                </a:solidFill>
+                <a:latin typeface="Calibri" pitchFamily="34" charset="0"/>
+                <a:ea typeface="Calibri" pitchFamily="34" charset="-122"/>
+                <a:cs typeface="Calibri" pitchFamily="34" charset="-120"/>
+              </a:rPr>
+              <a:t>ANSWER  </a:t>
+            </a:r>
+            <a:pPr indent="0" marL="0">
+              <a:buNone/>
+            </a:pPr>
+            <a:r>
+              <a:rPr lang="en-US" sz="1500" b="1" dirty="0">
+                <a:solidFill>
+                  <a:srgbClr val="1B2A38"/>
+                </a:solidFill>
+                <a:latin typeface="Calibri" pitchFamily="34" charset="0"/>
+                <a:ea typeface="Calibri" pitchFamily="34" charset="-122"/>
+                <a:cs typeface="Calibri" pitchFamily="34" charset="-120"/>
+              </a:rPr>
+              <a:t>B — Polyclonal increase</a:t>
+            </a:r>
+            <a:endParaRPr lang="en-US" sz="1500" dirty="0"/>
+          </a:p>
+        </p:txBody>
+      </p:sp>
+      <p:sp>
+        <p:nvSpPr>
+          <p:cNvPr id="8" name="Text 6"/>
+          <p:cNvSpPr/>
+          <p:nvPr/>
+        </p:nvSpPr>
+        <p:spPr>
+          <a:xfrm>
+            <a:off x="7439376" y="3127248"/>
+            <a:ext cx="3947648" cy="2377440"/>
+          </a:xfrm>
+          <a:prstGeom prst="rect">
+            <a:avLst/>
+          </a:prstGeom>
+          <a:noFill/>
+          <a:ln/>
+        </p:spPr>
+        <p:txBody>
+          <a:bodyPr wrap="square" lIns="0" tIns="0" rIns="0" bIns="0" rtlCol="0" anchor="t"/>
+          <a:lstStyle/>
+          <a:p>
+            <a:pPr algn="l" indent="0" marL="0">
+              <a:lnSpc>
+                <a:spcPct val="108000"/>
+              </a:lnSpc>
+              <a:buNone/>
+            </a:pPr>
+            <a:r>
+              <a:rPr lang="en-US" sz="1250" dirty="0">
+                <a:solidFill>
+                  <a:srgbClr val="33444F"/>
+                </a:solidFill>
+                <a:latin typeface="Calibri" pitchFamily="34" charset="0"/>
+                <a:ea typeface="Calibri" pitchFamily="34" charset="-122"/>
+                <a:cs typeface="Calibri" pitchFamily="34" charset="-120"/>
+              </a:rPr>
+              <a:t>A broad gamma rise reflects polyclonal immunoglobulin from infection, inflammation, or liver disease; a discrete spike suggests monoclonality.</a:t>
+            </a:r>
+            <a:endParaRPr lang="en-US" sz="1250" dirty="0"/>
+          </a:p>
+        </p:txBody>
+      </p:sp>
+      <p:sp>
+        <p:nvSpPr>
+          <p:cNvPr id="9" name="Text 7"/>
+          <p:cNvSpPr/>
+          <p:nvPr/>
+        </p:nvSpPr>
+        <p:spPr>
+          <a:xfrm>
+            <a:off x="566928" y="6473952"/>
+            <a:ext cx="7772400" cy="274320"/>
+          </a:xfrm>
+          <a:prstGeom prst="rect">
+            <a:avLst/>
+          </a:prstGeom>
+          <a:noFill/>
+          <a:ln/>
+        </p:spPr>
+        <p:txBody>
+          <a:bodyPr wrap="square" lIns="0" tIns="0" rIns="0" bIns="0" rtlCol="0" anchor="ctr"/>
+          <a:lstStyle/>
+          <a:p>
+            <a:pPr algn="l" indent="0" marL="0">
+              <a:buNone/>
+            </a:pPr>
+            <a:r>
+              <a:rPr lang="en-US" sz="850" dirty="0">
+                <a:solidFill>
+                  <a:srgbClr val="9AA8B4"/>
+                </a:solidFill>
+                <a:latin typeface="Calibri" pitchFamily="34" charset="0"/>
+                <a:ea typeface="Calibri" pitchFamily="34" charset="-122"/>
+                <a:cs typeface="Calibri" pitchFamily="34" charset="-120"/>
+              </a:rPr>
+              <a:t>Makassed General Hospital  ·  Department of Laboratory Medicine</a:t>
+            </a:r>
+            <a:endParaRPr lang="en-US" sz="850" dirty="0"/>
+          </a:p>
+        </p:txBody>
+      </p:sp>
+      <p:sp>
+        <p:nvSpPr>
+          <p:cNvPr id="10" name="Text 8"/>
+          <p:cNvSpPr/>
+          <p:nvPr/>
+        </p:nvSpPr>
+        <p:spPr>
+          <a:xfrm>
+            <a:off x="9814255" y="6473952"/>
+            <a:ext cx="1828800" cy="274320"/>
+          </a:xfrm>
+          <a:prstGeom prst="rect">
+            <a:avLst/>
+          </a:prstGeom>
+          <a:noFill/>
+          <a:ln/>
+        </p:spPr>
+        <p:txBody>
+          <a:bodyPr wrap="square" lIns="0" tIns="0" rIns="0" bIns="0" rtlCol="0" anchor="ctr"/>
+          <a:lstStyle/>
+          <a:p>
+            <a:pPr algn="r" indent="0" marL="0">
+              <a:buNone/>
+            </a:pPr>
+            <a:r>
+              <a:rPr lang="en-US" sz="850" dirty="0">
+                <a:solidFill>
+                  <a:srgbClr val="9AA8B4"/>
+                </a:solidFill>
+                <a:latin typeface="Calibri" pitchFamily="34" charset="0"/>
+                <a:ea typeface="Calibri" pitchFamily="34" charset="-122"/>
+                <a:cs typeface="Calibri" pitchFamily="34" charset="-120"/>
+              </a:rPr>
+              <a:t>CP Lecture Series</a:t>
+            </a:r>
+            <a:pPr algn="r" indent="0" marL="0">
+              <a:buNone/>
+            </a:pPr>
+            <a:r>
+              <a:rPr lang="en-US" sz="850" dirty="0">
+                <a:solidFill>
+                  <a:srgbClr val="DCE4EC"/>
+                </a:solidFill>
+                <a:latin typeface="Calibri" pitchFamily="34" charset="0"/>
+                <a:ea typeface="Calibri" pitchFamily="34" charset="-122"/>
+                <a:cs typeface="Calibri" pitchFamily="34" charset="-120"/>
+              </a:rPr>
+              <a:t>   ·   </a:t>
+            </a:r>
+            <a:pPr algn="r" indent="0" marL="0">
+              <a:buNone/>
+            </a:pPr>
+            <a:r>
+              <a:rPr lang="en-US" sz="850" b="1" dirty="0">
+                <a:solidFill>
+                  <a:srgbClr val="6A1B9A"/>
+                </a:solidFill>
+                <a:latin typeface="Calibri" pitchFamily="34" charset="0"/>
+                <a:ea typeface="Calibri" pitchFamily="34" charset="-122"/>
+                <a:cs typeface="Calibri" pitchFamily="34" charset="-120"/>
+              </a:rPr>
+              <a:t>18</a:t>
+            </a:r>
+            <a:endParaRPr lang="en-US" sz="850" dirty="0"/>
+          </a:p>
+        </p:txBody>
+      </p:sp>
+    </p:spTree>
+  </p:cSld>
+  <p:clrMapOvr>
+    <a:masterClrMapping/>
+  </p:clrMapOvr>
+</p:sld>
+</file>
+
+<file path=ppt/slides/slide22.xml><?xml version="1.0" encoding="utf-8"?>
+<p:sld xmlns:a="http://schemas.openxmlformats.org/drawingml/2006/main" xmlns:r="http://schemas.openxmlformats.org/officeDocument/2006/relationships" xmlns:p="http://schemas.openxmlformats.org/presentationml/2006/main">
+  <p:cSld name="Slide 22">
+    <p:bg>
+      <p:bgPr>
+        <a:solidFill>
+          <a:srgbClr val="FFFFFF"/>
+        </a:solidFill>
+      </p:bgPr>
+    </p:bg>
+    <p:spTree>
+      <p:nvGrpSpPr>
+        <p:cNvPr id="1" name=""/>
+        <p:cNvGrpSpPr/>
+        <p:nvPr/>
+      </p:nvGrpSpPr>
+      <p:grpSpPr>
+        <a:xfrm>
+          <a:off x="0" y="0"/>
+          <a:ext cx="0" cy="0"/>
+          <a:chOff x="0" y="0"/>
+          <a:chExt cx="0" cy="0"/>
+        </a:xfrm>
+      </p:grpSpPr>
+      <p:sp>
+        <p:nvSpPr>
+          <p:cNvPr id="2" name="Text 0"/>
+          <p:cNvSpPr/>
+          <p:nvPr/>
+        </p:nvSpPr>
+        <p:spPr>
+          <a:xfrm>
+            <a:off x="566928" y="329184"/>
+            <a:ext cx="10515600" cy="310896"/>
+          </a:xfrm>
+          <a:prstGeom prst="rect">
+            <a:avLst/>
+          </a:prstGeom>
+          <a:noFill/>
+          <a:ln/>
+        </p:spPr>
+        <p:txBody>
+          <a:bodyPr wrap="square" lIns="0" tIns="0" rIns="0" bIns="0" rtlCol="0" anchor="ctr"/>
+          <a:lstStyle/>
+          <a:p>
+            <a:pPr algn="l" indent="0" marL="0">
+              <a:buNone/>
+            </a:pPr>
+            <a:r>
+              <a:rPr lang="en-US" sz="1100" b="1" spc="150" kern="0" dirty="0">
+                <a:solidFill>
+                  <a:srgbClr val="6A1B9A"/>
+                </a:solidFill>
+                <a:latin typeface="Calibri" pitchFamily="34" charset="0"/>
+                <a:ea typeface="Calibri" pitchFamily="34" charset="-122"/>
+                <a:cs typeface="Calibri" pitchFamily="34" charset="-120"/>
+              </a:rPr>
+              <a:t>IMMUNOLOGY &amp; SEROLOGY   ·   BOARD REVIEW  ·  Q4</a:t>
+            </a:r>
+            <a:endParaRPr lang="en-US" sz="1100" dirty="0"/>
+          </a:p>
+        </p:txBody>
+      </p:sp>
+      <p:sp>
+        <p:nvSpPr>
+          <p:cNvPr id="3" name="Text 1"/>
+          <p:cNvSpPr/>
+          <p:nvPr/>
+        </p:nvSpPr>
+        <p:spPr>
+          <a:xfrm>
+            <a:off x="566928" y="713232"/>
+            <a:ext cx="11064240" cy="749808"/>
+          </a:xfrm>
+          <a:prstGeom prst="rect">
+            <a:avLst/>
+          </a:prstGeom>
+          <a:noFill/>
+          <a:ln/>
+        </p:spPr>
+        <p:txBody>
+          <a:bodyPr wrap="square" lIns="0" tIns="0" rIns="0" bIns="0" rtlCol="0" anchor="ctr"/>
+          <a:lstStyle/>
+          <a:p>
+            <a:pPr algn="l" indent="0" marL="0">
+              <a:buNone/>
+            </a:pPr>
+            <a:r>
+              <a:rPr lang="en-US" sz="2600" b="1" dirty="0">
+                <a:solidFill>
+                  <a:srgbClr val="0E3A5F"/>
+                </a:solidFill>
+                <a:latin typeface="Calibri" pitchFamily="34" charset="0"/>
+                <a:ea typeface="Calibri" pitchFamily="34" charset="-122"/>
+                <a:cs typeface="Calibri" pitchFamily="34" charset="-120"/>
+              </a:rPr>
+              <a:t>Board-Style Review</a:t>
+            </a:r>
+            <a:endParaRPr lang="en-US" sz="2600" dirty="0"/>
+          </a:p>
+        </p:txBody>
+      </p:sp>
+      <p:sp>
+        <p:nvSpPr>
+          <p:cNvPr id="4" name="Text 2"/>
+          <p:cNvSpPr/>
+          <p:nvPr/>
+        </p:nvSpPr>
+        <p:spPr>
+          <a:xfrm>
+            <a:off x="566928" y="1417320"/>
+            <a:ext cx="11057839" cy="914400"/>
+          </a:xfrm>
+          <a:prstGeom prst="rect">
+            <a:avLst/>
+          </a:prstGeom>
+          <a:noFill/>
+          <a:ln/>
+        </p:spPr>
+        <p:txBody>
+          <a:bodyPr wrap="square" lIns="0" tIns="0" rIns="0" bIns="0" rtlCol="0" anchor="t"/>
+          <a:lstStyle/>
+          <a:p>
+            <a:pPr algn="l" indent="0" marL="0">
+              <a:lnSpc>
+                <a:spcPct val="105000"/>
+              </a:lnSpc>
+              <a:buNone/>
+            </a:pPr>
+            <a:r>
+              <a:rPr lang="en-US" sz="1450" b="1" dirty="0">
+                <a:solidFill>
+                  <a:srgbClr val="1B2A38"/>
+                </a:solidFill>
+                <a:latin typeface="Calibri" pitchFamily="34" charset="0"/>
+                <a:ea typeface="Calibri" pitchFamily="34" charset="-122"/>
+                <a:cs typeface="Calibri" pitchFamily="34" charset="-120"/>
+              </a:rPr>
+              <a:t>An elevated total IgE is LEAST specific for which of the following?</a:t>
+            </a:r>
+            <a:endParaRPr lang="en-US" sz="1450" dirty="0"/>
+          </a:p>
+        </p:txBody>
+      </p:sp>
+      <p:sp>
+        <p:nvSpPr>
+          <p:cNvPr id="5" name="Text 3"/>
+          <p:cNvSpPr/>
+          <p:nvPr/>
+        </p:nvSpPr>
+        <p:spPr>
+          <a:xfrm>
+            <a:off x="658368" y="2395728"/>
+            <a:ext cx="6192390" cy="3017520"/>
+          </a:xfrm>
+          <a:prstGeom prst="rect">
+            <a:avLst/>
+          </a:prstGeom>
+          <a:noFill/>
+          <a:ln/>
+        </p:spPr>
+        <p:txBody>
+          <a:bodyPr wrap="square" lIns="0" tIns="0" rIns="0" bIns="0" rtlCol="0" anchor="t"/>
+          <a:lstStyle/>
+          <a:p>
+            <a:pPr algn="l" indent="0" marL="0">
+              <a:spcAft>
+                <a:spcPts val="600"/>
+              </a:spcAft>
+              <a:buNone/>
+            </a:pPr>
+            <a:r>
+              <a:rPr lang="en-US" sz="1350" dirty="0">
+                <a:solidFill>
+                  <a:srgbClr val="33444F"/>
+                </a:solidFill>
+                <a:latin typeface="Calibri" pitchFamily="34" charset="0"/>
+                <a:ea typeface="Calibri" pitchFamily="34" charset="-122"/>
+                <a:cs typeface="Calibri" pitchFamily="34" charset="-120"/>
+              </a:rPr>
+              <a:t>A. Atopy</a:t>
+            </a:r>
+            <a:endParaRPr lang="en-US" sz="1350" dirty="0"/>
+          </a:p>
+          <a:p>
+            <a:pPr algn="l" indent="0" marL="0">
+              <a:spcAft>
+                <a:spcPts val="600"/>
+              </a:spcAft>
+              <a:buNone/>
+            </a:pPr>
+            <a:r>
+              <a:rPr lang="en-US" sz="1350" dirty="0">
+                <a:solidFill>
+                  <a:srgbClr val="33444F"/>
+                </a:solidFill>
+                <a:latin typeface="Calibri" pitchFamily="34" charset="0"/>
+                <a:ea typeface="Calibri" pitchFamily="34" charset="-122"/>
+                <a:cs typeface="Calibri" pitchFamily="34" charset="-120"/>
+              </a:rPr>
+              <a:t>B. Parasitic infection</a:t>
+            </a:r>
+            <a:endParaRPr lang="en-US" sz="1350" dirty="0"/>
+          </a:p>
+          <a:p>
+            <a:pPr algn="l" indent="0" marL="0">
+              <a:spcAft>
+                <a:spcPts val="600"/>
+              </a:spcAft>
+              <a:buNone/>
+            </a:pPr>
+            <a:r>
+              <a:rPr lang="en-US" sz="1350" b="1" dirty="0">
+                <a:solidFill>
+                  <a:srgbClr val="4A1269"/>
+                </a:solidFill>
+                <a:latin typeface="Calibri" pitchFamily="34" charset="0"/>
+                <a:ea typeface="Calibri" pitchFamily="34" charset="-122"/>
+                <a:cs typeface="Calibri" pitchFamily="34" charset="-120"/>
+              </a:rPr>
+              <a:t>C. A single defined food allergy</a:t>
+            </a:r>
+            <a:endParaRPr lang="en-US" sz="1350" dirty="0"/>
+          </a:p>
+          <a:p>
+            <a:pPr algn="l" indent="0" marL="0">
+              <a:spcAft>
+                <a:spcPts val="600"/>
+              </a:spcAft>
+              <a:buNone/>
+            </a:pPr>
+            <a:r>
+              <a:rPr lang="en-US" sz="1350" dirty="0">
+                <a:solidFill>
+                  <a:srgbClr val="33444F"/>
+                </a:solidFill>
+                <a:latin typeface="Calibri" pitchFamily="34" charset="0"/>
+                <a:ea typeface="Calibri" pitchFamily="34" charset="-122"/>
+                <a:cs typeface="Calibri" pitchFamily="34" charset="-120"/>
+              </a:rPr>
+              <a:t>D. Some immunodeficiencies (hyper-IgE)</a:t>
+            </a:r>
+            <a:endParaRPr lang="en-US" sz="1350" dirty="0"/>
+          </a:p>
+          <a:p>
+            <a:pPr algn="l" indent="0" marL="0">
+              <a:spcAft>
+                <a:spcPts val="600"/>
+              </a:spcAft>
+              <a:buNone/>
+            </a:pPr>
+            <a:r>
+              <a:rPr lang="en-US" sz="1350" dirty="0">
+                <a:solidFill>
+                  <a:srgbClr val="33444F"/>
+                </a:solidFill>
+                <a:latin typeface="Calibri" pitchFamily="34" charset="0"/>
+                <a:ea typeface="Calibri" pitchFamily="34" charset="-122"/>
+                <a:cs typeface="Calibri" pitchFamily="34" charset="-120"/>
+              </a:rPr>
+              <a:t>E. Allergic conditions generally</a:t>
+            </a:r>
+            <a:endParaRPr lang="en-US" sz="1350" dirty="0"/>
+          </a:p>
+        </p:txBody>
+      </p:sp>
+      <p:sp>
+        <p:nvSpPr>
+          <p:cNvPr id="6" name="Shape 4"/>
+          <p:cNvSpPr/>
+          <p:nvPr/>
+        </p:nvSpPr>
+        <p:spPr>
+          <a:xfrm>
+            <a:off x="7201632" y="2395728"/>
+            <a:ext cx="4423136" cy="3246120"/>
+          </a:xfrm>
+          <a:prstGeom prst="roundRect">
+            <a:avLst>
+              <a:gd name="adj" fmla="val 2535"/>
+            </a:avLst>
+          </a:prstGeom>
+          <a:solidFill>
+            <a:srgbClr val="F1E8F7"/>
+          </a:solidFill>
+          <a:ln/>
+          <a:effectLst>
+            <a:outerShdw sx="100000" sy="100000" kx="0" ky="0" algn="bl" rotWithShape="0" blurRad="88900" dist="25400" dir="5400000">
+              <a:srgbClr val="22303C">
+                <a:alpha val="12000"/>
+              </a:srgbClr>
+            </a:outerShdw>
+          </a:effectLst>
+        </p:spPr>
+      </p:sp>
+      <p:sp>
+        <p:nvSpPr>
+          <p:cNvPr id="7" name="Text 5"/>
+          <p:cNvSpPr/>
+          <p:nvPr/>
+        </p:nvSpPr>
+        <p:spPr>
+          <a:xfrm>
+            <a:off x="7439376" y="2578608"/>
+            <a:ext cx="3965936" cy="457200"/>
+          </a:xfrm>
+          <a:prstGeom prst="rect">
+            <a:avLst/>
+          </a:prstGeom>
+          <a:noFill/>
+          <a:ln/>
+        </p:spPr>
+        <p:txBody>
+          <a:bodyPr wrap="square" lIns="0" tIns="0" rIns="0" bIns="0" rtlCol="0" anchor="ctr"/>
+          <a:lstStyle/>
+          <a:p>
+            <a:pPr indent="0" marL="0">
+              <a:buNone/>
+            </a:pPr>
+            <a:r>
+              <a:rPr lang="en-US" sz="1500" b="1" dirty="0">
+                <a:solidFill>
+                  <a:srgbClr val="6A1B9A"/>
+                </a:solidFill>
+                <a:latin typeface="Calibri" pitchFamily="34" charset="0"/>
+                <a:ea typeface="Calibri" pitchFamily="34" charset="-122"/>
+                <a:cs typeface="Calibri" pitchFamily="34" charset="-120"/>
+              </a:rPr>
+              <a:t>ANSWER  </a:t>
+            </a:r>
+            <a:pPr indent="0" marL="0">
+              <a:buNone/>
+            </a:pPr>
+            <a:r>
+              <a:rPr lang="en-US" sz="1500" b="1" dirty="0">
+                <a:solidFill>
+                  <a:srgbClr val="1B2A38"/>
+                </a:solidFill>
+                <a:latin typeface="Calibri" pitchFamily="34" charset="0"/>
+                <a:ea typeface="Calibri" pitchFamily="34" charset="-122"/>
+                <a:cs typeface="Calibri" pitchFamily="34" charset="-120"/>
+              </a:rPr>
+              <a:t>C — A single defined food allergy</a:t>
+            </a:r>
+            <a:endParaRPr lang="en-US" sz="1500" dirty="0"/>
+          </a:p>
+        </p:txBody>
+      </p:sp>
+      <p:sp>
+        <p:nvSpPr>
+          <p:cNvPr id="8" name="Text 6"/>
+          <p:cNvSpPr/>
+          <p:nvPr/>
+        </p:nvSpPr>
+        <p:spPr>
+          <a:xfrm>
+            <a:off x="7439376" y="3127248"/>
+            <a:ext cx="3947648" cy="2377440"/>
+          </a:xfrm>
+          <a:prstGeom prst="rect">
+            <a:avLst/>
+          </a:prstGeom>
+          <a:noFill/>
+          <a:ln/>
+        </p:spPr>
+        <p:txBody>
+          <a:bodyPr wrap="square" lIns="0" tIns="0" rIns="0" bIns="0" rtlCol="0" anchor="t"/>
+          <a:lstStyle/>
+          <a:p>
+            <a:pPr algn="l" indent="0" marL="0">
+              <a:lnSpc>
+                <a:spcPct val="108000"/>
+              </a:lnSpc>
+              <a:buNone/>
+            </a:pPr>
+            <a:r>
+              <a:rPr lang="en-US" sz="1250" dirty="0">
+                <a:solidFill>
+                  <a:srgbClr val="33444F"/>
+                </a:solidFill>
+                <a:latin typeface="Calibri" pitchFamily="34" charset="0"/>
+                <a:ea typeface="Calibri" pitchFamily="34" charset="-122"/>
+                <a:cs typeface="Calibri" pitchFamily="34" charset="-120"/>
+              </a:rPr>
+              <a:t>Total IgE is non-specific; identifying a specific allergy requires allergen-specific IgE and clinical correlation.</a:t>
+            </a:r>
+            <a:endParaRPr lang="en-US" sz="1250" dirty="0"/>
+          </a:p>
+        </p:txBody>
+      </p:sp>
+      <p:sp>
+        <p:nvSpPr>
+          <p:cNvPr id="9" name="Text 7"/>
+          <p:cNvSpPr/>
+          <p:nvPr/>
+        </p:nvSpPr>
+        <p:spPr>
+          <a:xfrm>
+            <a:off x="566928" y="6473952"/>
+            <a:ext cx="7772400" cy="274320"/>
+          </a:xfrm>
+          <a:prstGeom prst="rect">
+            <a:avLst/>
+          </a:prstGeom>
+          <a:noFill/>
+          <a:ln/>
+        </p:spPr>
+        <p:txBody>
+          <a:bodyPr wrap="square" lIns="0" tIns="0" rIns="0" bIns="0" rtlCol="0" anchor="ctr"/>
+          <a:lstStyle/>
+          <a:p>
+            <a:pPr algn="l" indent="0" marL="0">
+              <a:buNone/>
+            </a:pPr>
+            <a:r>
+              <a:rPr lang="en-US" sz="850" dirty="0">
+                <a:solidFill>
+                  <a:srgbClr val="9AA8B4"/>
+                </a:solidFill>
+                <a:latin typeface="Calibri" pitchFamily="34" charset="0"/>
+                <a:ea typeface="Calibri" pitchFamily="34" charset="-122"/>
+                <a:cs typeface="Calibri" pitchFamily="34" charset="-120"/>
+              </a:rPr>
+              <a:t>Makassed General Hospital  ·  Department of Laboratory Medicine</a:t>
+            </a:r>
+            <a:endParaRPr lang="en-US" sz="850" dirty="0"/>
+          </a:p>
+        </p:txBody>
+      </p:sp>
+      <p:sp>
+        <p:nvSpPr>
+          <p:cNvPr id="10" name="Text 8"/>
+          <p:cNvSpPr/>
+          <p:nvPr/>
+        </p:nvSpPr>
+        <p:spPr>
+          <a:xfrm>
+            <a:off x="9814255" y="6473952"/>
+            <a:ext cx="1828800" cy="274320"/>
+          </a:xfrm>
+          <a:prstGeom prst="rect">
+            <a:avLst/>
+          </a:prstGeom>
+          <a:noFill/>
+          <a:ln/>
+        </p:spPr>
+        <p:txBody>
+          <a:bodyPr wrap="square" lIns="0" tIns="0" rIns="0" bIns="0" rtlCol="0" anchor="ctr"/>
+          <a:lstStyle/>
+          <a:p>
+            <a:pPr algn="r" indent="0" marL="0">
+              <a:buNone/>
+            </a:pPr>
+            <a:r>
+              <a:rPr lang="en-US" sz="850" dirty="0">
+                <a:solidFill>
+                  <a:srgbClr val="9AA8B4"/>
+                </a:solidFill>
+                <a:latin typeface="Calibri" pitchFamily="34" charset="0"/>
+                <a:ea typeface="Calibri" pitchFamily="34" charset="-122"/>
+                <a:cs typeface="Calibri" pitchFamily="34" charset="-120"/>
+              </a:rPr>
+              <a:t>CP Lecture Series</a:t>
+            </a:r>
+            <a:pPr algn="r" indent="0" marL="0">
+              <a:buNone/>
+            </a:pPr>
+            <a:r>
+              <a:rPr lang="en-US" sz="850" dirty="0">
+                <a:solidFill>
+                  <a:srgbClr val="DCE4EC"/>
+                </a:solidFill>
+                <a:latin typeface="Calibri" pitchFamily="34" charset="0"/>
+                <a:ea typeface="Calibri" pitchFamily="34" charset="-122"/>
+                <a:cs typeface="Calibri" pitchFamily="34" charset="-120"/>
+              </a:rPr>
+              <a:t>   ·   </a:t>
+            </a:r>
+            <a:pPr algn="r" indent="0" marL="0">
+              <a:buNone/>
+            </a:pPr>
+            <a:r>
+              <a:rPr lang="en-US" sz="850" b="1" dirty="0">
+                <a:solidFill>
+                  <a:srgbClr val="6A1B9A"/>
+                </a:solidFill>
+                <a:latin typeface="Calibri" pitchFamily="34" charset="0"/>
+                <a:ea typeface="Calibri" pitchFamily="34" charset="-122"/>
+                <a:cs typeface="Calibri" pitchFamily="34" charset="-120"/>
+              </a:rPr>
+              <a:t>19</a:t>
+            </a:r>
+            <a:endParaRPr lang="en-US" sz="850" dirty="0"/>
+          </a:p>
+        </p:txBody>
+      </p:sp>
+    </p:spTree>
+  </p:cSld>
+  <p:clrMapOvr>
+    <a:masterClrMapping/>
+  </p:clrMapOvr>
+</p:sld>
+</file>
+
+<file path=ppt/slides/slide23.xml><?xml version="1.0" encoding="utf-8"?>
+<p:sld xmlns:a="http://schemas.openxmlformats.org/drawingml/2006/main" xmlns:r="http://schemas.openxmlformats.org/officeDocument/2006/relationships" xmlns:p="http://schemas.openxmlformats.org/presentationml/2006/main">
+  <p:cSld name="Slide 23">
+    <p:bg>
+      <p:bgPr>
+        <a:solidFill>
+          <a:srgbClr val="0A2A45"/>
+        </a:solidFill>
+      </p:bgPr>
+    </p:bg>
+    <p:spTree>
+      <p:nvGrpSpPr>
+        <p:cNvPr id="1" name=""/>
+        <p:cNvGrpSpPr/>
+        <p:nvPr/>
+      </p:nvGrpSpPr>
+      <p:grpSpPr>
+        <a:xfrm>
+          <a:off x="0" y="0"/>
+          <a:ext cx="0" cy="0"/>
+          <a:chOff x="0" y="0"/>
+          <a:chExt cx="0" cy="0"/>
+        </a:xfrm>
+      </p:grpSpPr>
+      <p:sp>
+        <p:nvSpPr>
+          <p:cNvPr id="2" name="Text 0"/>
+          <p:cNvSpPr/>
+          <p:nvPr/>
+        </p:nvSpPr>
+        <p:spPr>
+          <a:xfrm>
+            <a:off x="566928" y="329184"/>
+            <a:ext cx="10058400" cy="310896"/>
+          </a:xfrm>
+          <a:prstGeom prst="rect">
+            <a:avLst/>
+          </a:prstGeom>
+          <a:noFill/>
+          <a:ln/>
+        </p:spPr>
+        <p:txBody>
+          <a:bodyPr wrap="square" lIns="0" tIns="0" rIns="0" bIns="0" rtlCol="0" anchor="ctr"/>
+          <a:lstStyle/>
+          <a:p>
+            <a:pPr indent="0" marL="0">
+              <a:buNone/>
+            </a:pPr>
+            <a:r>
+              <a:rPr lang="en-US" sz="1100" b="1" spc="150" kern="0" dirty="0">
+                <a:solidFill>
+                  <a:srgbClr val="6A1B9A"/>
+                </a:solidFill>
+                <a:latin typeface="Calibri" pitchFamily="34" charset="0"/>
+                <a:ea typeface="Calibri" pitchFamily="34" charset="-122"/>
+                <a:cs typeface="Calibri" pitchFamily="34" charset="-120"/>
+              </a:rPr>
+              <a:t>IMMUNOLOGY &amp; SEROLOGY</a:t>
+            </a:r>
+            <a:endParaRPr lang="en-US" sz="1100" dirty="0"/>
+          </a:p>
+        </p:txBody>
+      </p:sp>
+      <p:sp>
+        <p:nvSpPr>
+          <p:cNvPr id="3" name="Text 1"/>
+          <p:cNvSpPr/>
+          <p:nvPr/>
+        </p:nvSpPr>
+        <p:spPr>
+          <a:xfrm>
+            <a:off x="566928" y="676656"/>
+            <a:ext cx="10972800" cy="749808"/>
+          </a:xfrm>
+          <a:prstGeom prst="rect">
+            <a:avLst/>
+          </a:prstGeom>
+          <a:noFill/>
+          <a:ln/>
+        </p:spPr>
+        <p:txBody>
+          <a:bodyPr wrap="square" lIns="0" tIns="0" rIns="0" bIns="0" rtlCol="0" anchor="ctr"/>
+          <a:lstStyle/>
+          <a:p>
+            <a:pPr indent="0" marL="0">
+              <a:buNone/>
+            </a:pPr>
+            <a:r>
+              <a:rPr lang="en-US" sz="3000" b="1" dirty="0">
+                <a:solidFill>
+                  <a:srgbClr val="FFFFFF"/>
+                </a:solidFill>
+                <a:latin typeface="Calibri" pitchFamily="34" charset="0"/>
+                <a:ea typeface="Calibri" pitchFamily="34" charset="-122"/>
+                <a:cs typeface="Calibri" pitchFamily="34" charset="-120"/>
+              </a:rPr>
+              <a:t>Key Take-Home Points</a:t>
+            </a:r>
+            <a:endParaRPr lang="en-US" sz="3000" dirty="0"/>
+          </a:p>
+        </p:txBody>
+      </p:sp>
+      <p:sp>
+        <p:nvSpPr>
+          <p:cNvPr id="4" name="Shape 2"/>
+          <p:cNvSpPr/>
+          <p:nvPr/>
+        </p:nvSpPr>
+        <p:spPr>
+          <a:xfrm>
+            <a:off x="566928" y="1517904"/>
+            <a:ext cx="11057839" cy="841248"/>
+          </a:xfrm>
+          <a:prstGeom prst="roundRect">
+            <a:avLst>
+              <a:gd name="adj" fmla="val 7609"/>
+            </a:avLst>
+          </a:prstGeom>
+          <a:solidFill>
+            <a:srgbClr val="143651"/>
+          </a:solidFill>
+          <a:ln/>
+        </p:spPr>
+      </p:sp>
+      <p:sp>
+        <p:nvSpPr>
+          <p:cNvPr id="5" name="Shape 3"/>
+          <p:cNvSpPr/>
+          <p:nvPr/>
+        </p:nvSpPr>
+        <p:spPr>
+          <a:xfrm>
+            <a:off x="749808" y="1755648"/>
+            <a:ext cx="365760" cy="365760"/>
+          </a:xfrm>
+          <a:prstGeom prst="ellipse">
+            <a:avLst/>
+          </a:prstGeom>
+          <a:solidFill>
+            <a:srgbClr val="6A1B9A"/>
+          </a:solidFill>
+          <a:ln/>
+          <a:effectLst>
+            <a:outerShdw sx="100000" sy="100000" kx="0" ky="0" algn="bl" rotWithShape="0" blurRad="88900" dist="25400" dir="5400000">
+              <a:srgbClr val="22303C">
+                <a:alpha val="12000"/>
+              </a:srgbClr>
+            </a:outerShdw>
+          </a:effectLst>
+        </p:spPr>
+      </p:sp>
+      <p:sp>
+        <p:nvSpPr>
+          <p:cNvPr id="6" name="Text 4"/>
+          <p:cNvSpPr/>
+          <p:nvPr/>
+        </p:nvSpPr>
+        <p:spPr>
+          <a:xfrm>
+            <a:off x="749808" y="1755648"/>
+            <a:ext cx="365760" cy="365760"/>
+          </a:xfrm>
+          <a:prstGeom prst="rect">
+            <a:avLst/>
+          </a:prstGeom>
+          <a:noFill/>
+          <a:ln/>
+        </p:spPr>
+        <p:txBody>
+          <a:bodyPr wrap="square" lIns="0" tIns="0" rIns="0" bIns="0" rtlCol="0" anchor="ctr"/>
+          <a:lstStyle/>
+          <a:p>
+            <a:pPr algn="ctr" indent="0" marL="0">
+              <a:buNone/>
+            </a:pPr>
+            <a:r>
+              <a:rPr lang="en-US" sz="1500" b="1" dirty="0">
+                <a:solidFill>
+                  <a:srgbClr val="FFFFFF"/>
+                </a:solidFill>
+                <a:latin typeface="Calibri" pitchFamily="34" charset="0"/>
+                <a:ea typeface="Calibri" pitchFamily="34" charset="-122"/>
+                <a:cs typeface="Calibri" pitchFamily="34" charset="-120"/>
+              </a:rPr>
+              <a:t>1</a:t>
+            </a:r>
+            <a:endParaRPr lang="en-US" sz="1500" dirty="0"/>
+          </a:p>
+        </p:txBody>
+      </p:sp>
+      <p:sp>
+        <p:nvSpPr>
+          <p:cNvPr id="7" name="Text 5"/>
+          <p:cNvSpPr/>
+          <p:nvPr/>
+        </p:nvSpPr>
+        <p:spPr>
+          <a:xfrm>
+            <a:off x="1280160" y="1517904"/>
+            <a:ext cx="10143439" cy="841248"/>
+          </a:xfrm>
+          <a:prstGeom prst="rect">
+            <a:avLst/>
+          </a:prstGeom>
+          <a:noFill/>
+          <a:ln/>
+        </p:spPr>
+        <p:txBody>
+          <a:bodyPr wrap="square" lIns="0" tIns="0" rIns="0" bIns="0" rtlCol="0" anchor="ctr"/>
+          <a:lstStyle/>
+          <a:p>
+            <a:pPr algn="l" indent="0" marL="0">
+              <a:buNone/>
+            </a:pPr>
+            <a:r>
+              <a:rPr lang="en-US" sz="1350" dirty="0">
+                <a:solidFill>
+                  <a:srgbClr val="E7EEF4"/>
+                </a:solidFill>
+                <a:latin typeface="Calibri" pitchFamily="34" charset="0"/>
+                <a:ea typeface="Calibri" pitchFamily="34" charset="-122"/>
+                <a:cs typeface="Calibri" pitchFamily="34" charset="-120"/>
+              </a:rPr>
+              <a:t>Total IgE is non-specific; allergen-specific IgE shows sensitization — clinical allergy requires a matching history.</a:t>
+            </a:r>
+            <a:endParaRPr lang="en-US" sz="1350" dirty="0"/>
+          </a:p>
+        </p:txBody>
+      </p:sp>
+      <p:sp>
+        <p:nvSpPr>
+          <p:cNvPr id="8" name="Shape 6"/>
+          <p:cNvSpPr/>
+          <p:nvPr/>
+        </p:nvSpPr>
+        <p:spPr>
+          <a:xfrm>
+            <a:off x="566928" y="2505456"/>
+            <a:ext cx="11057839" cy="841248"/>
+          </a:xfrm>
+          <a:prstGeom prst="roundRect">
+            <a:avLst>
+              <a:gd name="adj" fmla="val 7609"/>
+            </a:avLst>
+          </a:prstGeom>
+          <a:solidFill>
+            <a:srgbClr val="143651"/>
+          </a:solidFill>
+          <a:ln/>
+        </p:spPr>
+      </p:sp>
+      <p:sp>
+        <p:nvSpPr>
+          <p:cNvPr id="9" name="Shape 7"/>
+          <p:cNvSpPr/>
+          <p:nvPr/>
+        </p:nvSpPr>
+        <p:spPr>
+          <a:xfrm>
+            <a:off x="749808" y="2743200"/>
+            <a:ext cx="365760" cy="365760"/>
+          </a:xfrm>
+          <a:prstGeom prst="ellipse">
+            <a:avLst/>
+          </a:prstGeom>
+          <a:solidFill>
+            <a:srgbClr val="6A1B9A"/>
+          </a:solidFill>
+          <a:ln/>
+          <a:effectLst>
+            <a:outerShdw sx="100000" sy="100000" kx="0" ky="0" algn="bl" rotWithShape="0" blurRad="88900" dist="25400" dir="5400000">
+              <a:srgbClr val="22303C">
+                <a:alpha val="12000"/>
+              </a:srgbClr>
+            </a:outerShdw>
+          </a:effectLst>
+        </p:spPr>
+      </p:sp>
+      <p:sp>
+        <p:nvSpPr>
+          <p:cNvPr id="10" name="Text 8"/>
+          <p:cNvSpPr/>
+          <p:nvPr/>
+        </p:nvSpPr>
+        <p:spPr>
+          <a:xfrm>
+            <a:off x="749808" y="2743200"/>
+            <a:ext cx="365760" cy="365760"/>
+          </a:xfrm>
+          <a:prstGeom prst="rect">
+            <a:avLst/>
+          </a:prstGeom>
+          <a:noFill/>
+          <a:ln/>
+        </p:spPr>
+        <p:txBody>
+          <a:bodyPr wrap="square" lIns="0" tIns="0" rIns="0" bIns="0" rtlCol="0" anchor="ctr"/>
+          <a:lstStyle/>
+          <a:p>
+            <a:pPr algn="ctr" indent="0" marL="0">
+              <a:buNone/>
+            </a:pPr>
+            <a:r>
+              <a:rPr lang="en-US" sz="1500" b="1" dirty="0">
+                <a:solidFill>
+                  <a:srgbClr val="FFFFFF"/>
+                </a:solidFill>
+                <a:latin typeface="Calibri" pitchFamily="34" charset="0"/>
+                <a:ea typeface="Calibri" pitchFamily="34" charset="-122"/>
+                <a:cs typeface="Calibri" pitchFamily="34" charset="-120"/>
+              </a:rPr>
+              <a:t>2</a:t>
+            </a:r>
+            <a:endParaRPr lang="en-US" sz="1500" dirty="0"/>
+          </a:p>
+        </p:txBody>
+      </p:sp>
+      <p:sp>
+        <p:nvSpPr>
+          <p:cNvPr id="11" name="Text 9"/>
+          <p:cNvSpPr/>
+          <p:nvPr/>
+        </p:nvSpPr>
+        <p:spPr>
+          <a:xfrm>
+            <a:off x="1280160" y="2505456"/>
+            <a:ext cx="10143439" cy="841248"/>
+          </a:xfrm>
+          <a:prstGeom prst="rect">
+            <a:avLst/>
+          </a:prstGeom>
+          <a:noFill/>
+          <a:ln/>
+        </p:spPr>
+        <p:txBody>
+          <a:bodyPr wrap="square" lIns="0" tIns="0" rIns="0" bIns="0" rtlCol="0" anchor="ctr"/>
+          <a:lstStyle/>
+          <a:p>
+            <a:pPr algn="l" indent="0" marL="0">
+              <a:buNone/>
+            </a:pPr>
+            <a:r>
+              <a:rPr lang="en-US" sz="1350" dirty="0">
+                <a:solidFill>
+                  <a:srgbClr val="E7EEF4"/>
+                </a:solidFill>
+                <a:latin typeface="Calibri" pitchFamily="34" charset="0"/>
+                <a:ea typeface="Calibri" pitchFamily="34" charset="-122"/>
+                <a:cs typeface="Calibri" pitchFamily="34" charset="-120"/>
+              </a:rPr>
+              <a:t>Avoid broad untargeted IgE panels: they detect clinically irrelevant sensitization.</a:t>
+            </a:r>
+            <a:endParaRPr lang="en-US" sz="1350" dirty="0"/>
+          </a:p>
+        </p:txBody>
+      </p:sp>
+      <p:sp>
+        <p:nvSpPr>
+          <p:cNvPr id="12" name="Shape 10"/>
+          <p:cNvSpPr/>
+          <p:nvPr/>
+        </p:nvSpPr>
+        <p:spPr>
+          <a:xfrm>
+            <a:off x="566928" y="3493008"/>
+            <a:ext cx="11057839" cy="841248"/>
+          </a:xfrm>
+          <a:prstGeom prst="roundRect">
+            <a:avLst>
+              <a:gd name="adj" fmla="val 7609"/>
+            </a:avLst>
+          </a:prstGeom>
+          <a:solidFill>
+            <a:srgbClr val="143651"/>
+          </a:solidFill>
+          <a:ln/>
+        </p:spPr>
+      </p:sp>
+      <p:sp>
+        <p:nvSpPr>
+          <p:cNvPr id="13" name="Shape 11"/>
+          <p:cNvSpPr/>
+          <p:nvPr/>
+        </p:nvSpPr>
+        <p:spPr>
+          <a:xfrm>
+            <a:off x="749808" y="3730752"/>
+            <a:ext cx="365760" cy="365760"/>
+          </a:xfrm>
+          <a:prstGeom prst="ellipse">
+            <a:avLst/>
+          </a:prstGeom>
+          <a:solidFill>
+            <a:srgbClr val="6A1B9A"/>
+          </a:solidFill>
+          <a:ln/>
+          <a:effectLst>
+            <a:outerShdw sx="100000" sy="100000" kx="0" ky="0" algn="bl" rotWithShape="0" blurRad="88900" dist="25400" dir="5400000">
+              <a:srgbClr val="22303C">
+                <a:alpha val="12000"/>
+              </a:srgbClr>
+            </a:outerShdw>
+          </a:effectLst>
+        </p:spPr>
+      </p:sp>
+      <p:sp>
+        <p:nvSpPr>
+          <p:cNvPr id="14" name="Text 12"/>
+          <p:cNvSpPr/>
+          <p:nvPr/>
+        </p:nvSpPr>
+        <p:spPr>
+          <a:xfrm>
+            <a:off x="749808" y="3730752"/>
+            <a:ext cx="365760" cy="365760"/>
+          </a:xfrm>
+          <a:prstGeom prst="rect">
+            <a:avLst/>
+          </a:prstGeom>
+          <a:noFill/>
+          <a:ln/>
+        </p:spPr>
+        <p:txBody>
+          <a:bodyPr wrap="square" lIns="0" tIns="0" rIns="0" bIns="0" rtlCol="0" anchor="ctr"/>
+          <a:lstStyle/>
+          <a:p>
+            <a:pPr algn="ctr" indent="0" marL="0">
+              <a:buNone/>
+            </a:pPr>
+            <a:r>
+              <a:rPr lang="en-US" sz="1500" b="1" dirty="0">
+                <a:solidFill>
+                  <a:srgbClr val="FFFFFF"/>
+                </a:solidFill>
+                <a:latin typeface="Calibri" pitchFamily="34" charset="0"/>
+                <a:ea typeface="Calibri" pitchFamily="34" charset="-122"/>
+                <a:cs typeface="Calibri" pitchFamily="34" charset="-120"/>
+              </a:rPr>
+              <a:t>3</a:t>
+            </a:r>
+            <a:endParaRPr lang="en-US" sz="1500" dirty="0"/>
+          </a:p>
+        </p:txBody>
+      </p:sp>
+      <p:sp>
+        <p:nvSpPr>
+          <p:cNvPr id="15" name="Text 13"/>
+          <p:cNvSpPr/>
+          <p:nvPr/>
+        </p:nvSpPr>
+        <p:spPr>
+          <a:xfrm>
+            <a:off x="1280160" y="3493008"/>
+            <a:ext cx="10143439" cy="841248"/>
+          </a:xfrm>
+          <a:prstGeom prst="rect">
+            <a:avLst/>
+          </a:prstGeom>
+          <a:noFill/>
+          <a:ln/>
+        </p:spPr>
+        <p:txBody>
+          <a:bodyPr wrap="square" lIns="0" tIns="0" rIns="0" bIns="0" rtlCol="0" anchor="ctr"/>
+          <a:lstStyle/>
+          <a:p>
+            <a:pPr algn="l" indent="0" marL="0">
+              <a:buNone/>
+            </a:pPr>
+            <a:r>
+              <a:rPr lang="en-US" sz="1350" dirty="0">
+                <a:solidFill>
+                  <a:srgbClr val="E7EEF4"/>
+                </a:solidFill>
+                <a:latin typeface="Calibri" pitchFamily="34" charset="0"/>
+                <a:ea typeface="Calibri" pitchFamily="34" charset="-122"/>
+                <a:cs typeface="Calibri" pitchFamily="34" charset="-120"/>
+              </a:rPr>
+              <a:t>Work up immunodeficiency in tiers: screen (CBC, quantitative Ig, HIV) → function (vaccine response, subsets, complement) → advanced/genetic.</a:t>
+            </a:r>
+            <a:endParaRPr lang="en-US" sz="1350" dirty="0"/>
+          </a:p>
+        </p:txBody>
+      </p:sp>
+      <p:sp>
+        <p:nvSpPr>
+          <p:cNvPr id="16" name="Shape 14"/>
+          <p:cNvSpPr/>
+          <p:nvPr/>
+        </p:nvSpPr>
+        <p:spPr>
+          <a:xfrm>
+            <a:off x="566928" y="4480560"/>
+            <a:ext cx="11057839" cy="841248"/>
+          </a:xfrm>
+          <a:prstGeom prst="roundRect">
+            <a:avLst>
+              <a:gd name="adj" fmla="val 7609"/>
+            </a:avLst>
+          </a:prstGeom>
+          <a:solidFill>
+            <a:srgbClr val="143651"/>
+          </a:solidFill>
+          <a:ln/>
+        </p:spPr>
+      </p:sp>
+      <p:sp>
+        <p:nvSpPr>
+          <p:cNvPr id="17" name="Shape 15"/>
+          <p:cNvSpPr/>
+          <p:nvPr/>
+        </p:nvSpPr>
+        <p:spPr>
+          <a:xfrm>
+            <a:off x="749808" y="4718304"/>
+            <a:ext cx="365760" cy="365760"/>
+          </a:xfrm>
+          <a:prstGeom prst="ellipse">
+            <a:avLst/>
+          </a:prstGeom>
+          <a:solidFill>
+            <a:srgbClr val="6A1B9A"/>
+          </a:solidFill>
+          <a:ln/>
+          <a:effectLst>
+            <a:outerShdw sx="100000" sy="100000" kx="0" ky="0" algn="bl" rotWithShape="0" blurRad="88900" dist="25400" dir="5400000">
+              <a:srgbClr val="22303C">
+                <a:alpha val="12000"/>
+              </a:srgbClr>
+            </a:outerShdw>
+          </a:effectLst>
+        </p:spPr>
+      </p:sp>
+      <p:sp>
+        <p:nvSpPr>
+          <p:cNvPr id="18" name="Text 16"/>
+          <p:cNvSpPr/>
+          <p:nvPr/>
+        </p:nvSpPr>
+        <p:spPr>
+          <a:xfrm>
+            <a:off x="749808" y="4718304"/>
+            <a:ext cx="365760" cy="365760"/>
+          </a:xfrm>
+          <a:prstGeom prst="rect">
+            <a:avLst/>
+          </a:prstGeom>
+          <a:noFill/>
+          <a:ln/>
+        </p:spPr>
+        <p:txBody>
+          <a:bodyPr wrap="square" lIns="0" tIns="0" rIns="0" bIns="0" rtlCol="0" anchor="ctr"/>
+          <a:lstStyle/>
+          <a:p>
+            <a:pPr algn="ctr" indent="0" marL="0">
+              <a:buNone/>
+            </a:pPr>
+            <a:r>
+              <a:rPr lang="en-US" sz="1500" b="1" dirty="0">
+                <a:solidFill>
+                  <a:srgbClr val="FFFFFF"/>
+                </a:solidFill>
+                <a:latin typeface="Calibri" pitchFamily="34" charset="0"/>
+                <a:ea typeface="Calibri" pitchFamily="34" charset="-122"/>
+                <a:cs typeface="Calibri" pitchFamily="34" charset="-120"/>
+              </a:rPr>
+              <a:t>4</a:t>
+            </a:r>
+            <a:endParaRPr lang="en-US" sz="1500" dirty="0"/>
+          </a:p>
+        </p:txBody>
+      </p:sp>
+      <p:sp>
+        <p:nvSpPr>
+          <p:cNvPr id="19" name="Text 17"/>
+          <p:cNvSpPr/>
+          <p:nvPr/>
+        </p:nvSpPr>
+        <p:spPr>
+          <a:xfrm>
+            <a:off x="1280160" y="4480560"/>
+            <a:ext cx="10143439" cy="841248"/>
+          </a:xfrm>
+          <a:prstGeom prst="rect">
+            <a:avLst/>
+          </a:prstGeom>
+          <a:noFill/>
+          <a:ln/>
+        </p:spPr>
+        <p:txBody>
+          <a:bodyPr wrap="square" lIns="0" tIns="0" rIns="0" bIns="0" rtlCol="0" anchor="ctr"/>
+          <a:lstStyle/>
+          <a:p>
+            <a:pPr algn="l" indent="0" marL="0">
+              <a:buNone/>
+            </a:pPr>
+            <a:r>
+              <a:rPr lang="en-US" sz="1350" dirty="0">
+                <a:solidFill>
+                  <a:srgbClr val="E7EEF4"/>
+                </a:solidFill>
+                <a:latin typeface="Calibri" pitchFamily="34" charset="0"/>
+                <a:ea typeface="Calibri" pitchFamily="34" charset="-122"/>
+                <a:cs typeface="Calibri" pitchFamily="34" charset="-120"/>
+              </a:rPr>
+              <a:t>Quantitative immunoglobulins plus functional antibody testing diagnose antibody deficiency — levels alone are insufficient.</a:t>
+            </a:r>
+            <a:endParaRPr lang="en-US" sz="1350" dirty="0"/>
+          </a:p>
+        </p:txBody>
+      </p:sp>
+      <p:sp>
+        <p:nvSpPr>
+          <p:cNvPr id="20" name="Shape 18"/>
+          <p:cNvSpPr/>
+          <p:nvPr/>
+        </p:nvSpPr>
+        <p:spPr>
+          <a:xfrm>
+            <a:off x="566928" y="5468112"/>
+            <a:ext cx="11057839" cy="841248"/>
+          </a:xfrm>
+          <a:prstGeom prst="roundRect">
+            <a:avLst>
+              <a:gd name="adj" fmla="val 7609"/>
+            </a:avLst>
+          </a:prstGeom>
+          <a:solidFill>
+            <a:srgbClr val="143651"/>
+          </a:solidFill>
+          <a:ln/>
+        </p:spPr>
+      </p:sp>
+      <p:sp>
+        <p:nvSpPr>
+          <p:cNvPr id="21" name="Shape 19"/>
+          <p:cNvSpPr/>
+          <p:nvPr/>
+        </p:nvSpPr>
+        <p:spPr>
+          <a:xfrm>
+            <a:off x="749808" y="5705856"/>
+            <a:ext cx="365760" cy="365760"/>
+          </a:xfrm>
+          <a:prstGeom prst="ellipse">
+            <a:avLst/>
+          </a:prstGeom>
+          <a:solidFill>
+            <a:srgbClr val="6A1B9A"/>
+          </a:solidFill>
+          <a:ln/>
+          <a:effectLst>
+            <a:outerShdw sx="100000" sy="100000" kx="0" ky="0" algn="bl" rotWithShape="0" blurRad="88900" dist="25400" dir="5400000">
+              <a:srgbClr val="22303C">
+                <a:alpha val="12000"/>
+              </a:srgbClr>
+            </a:outerShdw>
+          </a:effectLst>
+        </p:spPr>
+      </p:sp>
+      <p:sp>
+        <p:nvSpPr>
+          <p:cNvPr id="22" name="Text 20"/>
+          <p:cNvSpPr/>
+          <p:nvPr/>
+        </p:nvSpPr>
+        <p:spPr>
+          <a:xfrm>
+            <a:off x="749808" y="5705856"/>
+            <a:ext cx="365760" cy="365760"/>
+          </a:xfrm>
+          <a:prstGeom prst="rect">
+            <a:avLst/>
+          </a:prstGeom>
+          <a:noFill/>
+          <a:ln/>
+        </p:spPr>
+        <p:txBody>
+          <a:bodyPr wrap="square" lIns="0" tIns="0" rIns="0" bIns="0" rtlCol="0" anchor="ctr"/>
+          <a:lstStyle/>
+          <a:p>
+            <a:pPr algn="ctr" indent="0" marL="0">
+              <a:buNone/>
+            </a:pPr>
+            <a:r>
+              <a:rPr lang="en-US" sz="1500" b="1" dirty="0">
+                <a:solidFill>
+                  <a:srgbClr val="FFFFFF"/>
+                </a:solidFill>
+                <a:latin typeface="Calibri" pitchFamily="34" charset="0"/>
+                <a:ea typeface="Calibri" pitchFamily="34" charset="-122"/>
+                <a:cs typeface="Calibri" pitchFamily="34" charset="-120"/>
+              </a:rPr>
+              <a:t>5</a:t>
+            </a:r>
+            <a:endParaRPr lang="en-US" sz="1500" dirty="0"/>
+          </a:p>
+        </p:txBody>
+      </p:sp>
+      <p:sp>
+        <p:nvSpPr>
+          <p:cNvPr id="23" name="Text 21"/>
+          <p:cNvSpPr/>
+          <p:nvPr/>
+        </p:nvSpPr>
+        <p:spPr>
+          <a:xfrm>
+            <a:off x="1280160" y="5468112"/>
+            <a:ext cx="10143439" cy="841248"/>
+          </a:xfrm>
+          <a:prstGeom prst="rect">
+            <a:avLst/>
+          </a:prstGeom>
+          <a:noFill/>
+          <a:ln/>
+        </p:spPr>
+        <p:txBody>
+          <a:bodyPr wrap="square" lIns="0" tIns="0" rIns="0" bIns="0" rtlCol="0" anchor="ctr"/>
+          <a:lstStyle/>
+          <a:p>
+            <a:pPr algn="l" indent="0" marL="0">
+              <a:buNone/>
+            </a:pPr>
+            <a:r>
+              <a:rPr lang="en-US" sz="1350" dirty="0">
+                <a:solidFill>
+                  <a:srgbClr val="E7EEF4"/>
+                </a:solidFill>
+                <a:latin typeface="Calibri" pitchFamily="34" charset="0"/>
+                <a:ea typeface="Calibri" pitchFamily="34" charset="-122"/>
+                <a:cs typeface="Calibri" pitchFamily="34" charset="-120"/>
+              </a:rPr>
+              <a:t>Interpret SPEP/IFE/free light chains together; hypogammaglobulinemia does not exclude clonal light-chain disease.</a:t>
+            </a:r>
+            <a:endParaRPr lang="en-US" sz="1350" dirty="0"/>
+          </a:p>
+        </p:txBody>
+      </p:sp>
+      <p:sp>
+        <p:nvSpPr>
+          <p:cNvPr id="24" name="Text 22"/>
+          <p:cNvSpPr/>
+          <p:nvPr/>
+        </p:nvSpPr>
+        <p:spPr>
+          <a:xfrm>
+            <a:off x="566928" y="6473952"/>
+            <a:ext cx="8229600" cy="274320"/>
+          </a:xfrm>
+          <a:prstGeom prst="rect">
+            <a:avLst/>
+          </a:prstGeom>
+          <a:noFill/>
+          <a:ln/>
+        </p:spPr>
+        <p:txBody>
+          <a:bodyPr wrap="square" lIns="0" tIns="0" rIns="0" bIns="0" rtlCol="0" anchor="ctr"/>
+          <a:lstStyle/>
+          <a:p>
+            <a:pPr indent="0" marL="0">
+              <a:buNone/>
+            </a:pPr>
+            <a:r>
+              <a:rPr lang="en-US" sz="850" dirty="0">
+                <a:solidFill>
+                  <a:srgbClr val="5E7488"/>
+                </a:solidFill>
+                <a:latin typeface="Calibri" pitchFamily="34" charset="0"/>
+                <a:ea typeface="Calibri" pitchFamily="34" charset="-122"/>
+                <a:cs typeface="Calibri" pitchFamily="34" charset="-120"/>
+              </a:rPr>
+              <a:t>Makassed General Hospital  ·  Department of Laboratory Medicine</a:t>
+            </a:r>
+            <a:endParaRPr lang="en-US" sz="850" dirty="0"/>
+          </a:p>
+        </p:txBody>
+      </p:sp>
+      <p:sp>
+        <p:nvSpPr>
+          <p:cNvPr id="25" name="Text 23"/>
+          <p:cNvSpPr/>
+          <p:nvPr/>
+        </p:nvSpPr>
+        <p:spPr>
+          <a:xfrm>
+            <a:off x="11002975" y="6473952"/>
+            <a:ext cx="640080" cy="274320"/>
+          </a:xfrm>
+          <a:prstGeom prst="rect">
+            <a:avLst/>
+          </a:prstGeom>
+          <a:noFill/>
+          <a:ln/>
+        </p:spPr>
+        <p:txBody>
+          <a:bodyPr wrap="square" lIns="0" tIns="0" rIns="0" bIns="0" rtlCol="0" anchor="ctr"/>
+          <a:lstStyle/>
+          <a:p>
+            <a:pPr algn="r" indent="0" marL="0">
+              <a:buNone/>
+            </a:pPr>
+            <a:r>
+              <a:rPr lang="en-US" sz="850" b="1" dirty="0">
+                <a:solidFill>
+                  <a:srgbClr val="6A1B9A"/>
+                </a:solidFill>
+                <a:latin typeface="Calibri" pitchFamily="34" charset="0"/>
+                <a:ea typeface="Calibri" pitchFamily="34" charset="-122"/>
+                <a:cs typeface="Calibri" pitchFamily="34" charset="-120"/>
+              </a:rPr>
+              <a:t>20</a:t>
+            </a:r>
+            <a:endParaRPr lang="en-US" sz="850" dirty="0"/>
+          </a:p>
+        </p:txBody>
+      </p:sp>
+    </p:spTree>
+  </p:cSld>
+  <p:clrMapOvr>
+    <a:masterClrMapping/>
+  </p:clrMapOvr>
+</p:sld>
+</file>
+
+<file path=ppt/slides/slide24.xml><?xml version="1.0" encoding="utf-8"?>
+<p:sld xmlns:a="http://schemas.openxmlformats.org/drawingml/2006/main" xmlns:r="http://schemas.openxmlformats.org/officeDocument/2006/relationships" xmlns:p="http://schemas.openxmlformats.org/presentationml/2006/main">
+  <p:cSld name="Slide 24">
+    <p:bg>
+      <p:bgPr>
+        <a:solidFill>
+          <a:srgbClr val="FFFFFF"/>
+        </a:solidFill>
+      </p:bgPr>
+    </p:bg>
+    <p:spTree>
+      <p:nvGrpSpPr>
+        <p:cNvPr id="1" name=""/>
+        <p:cNvGrpSpPr/>
+        <p:nvPr/>
+      </p:nvGrpSpPr>
+      <p:grpSpPr>
+        <a:xfrm>
+          <a:off x="0" y="0"/>
+          <a:ext cx="0" cy="0"/>
+          <a:chOff x="0" y="0"/>
+          <a:chExt cx="0" cy="0"/>
+        </a:xfrm>
+      </p:grpSpPr>
+      <p:sp>
+        <p:nvSpPr>
+          <p:cNvPr id="2" name="Text 0"/>
+          <p:cNvSpPr/>
+          <p:nvPr/>
+        </p:nvSpPr>
+        <p:spPr>
+          <a:xfrm>
+            <a:off x="566928" y="329184"/>
+            <a:ext cx="10515600" cy="310896"/>
+          </a:xfrm>
+          <a:prstGeom prst="rect">
+            <a:avLst/>
+          </a:prstGeom>
+          <a:noFill/>
+          <a:ln/>
+        </p:spPr>
+        <p:txBody>
+          <a:bodyPr wrap="square" lIns="0" tIns="0" rIns="0" bIns="0" rtlCol="0" anchor="ctr"/>
+          <a:lstStyle/>
+          <a:p>
+            <a:pPr algn="l" indent="0" marL="0">
+              <a:buNone/>
+            </a:pPr>
+            <a:r>
+              <a:rPr lang="en-US" sz="1100" b="1" spc="150" kern="0" dirty="0">
+                <a:solidFill>
+                  <a:srgbClr val="6A1B9A"/>
+                </a:solidFill>
+                <a:latin typeface="Calibri" pitchFamily="34" charset="0"/>
+                <a:ea typeface="Calibri" pitchFamily="34" charset="-122"/>
+                <a:cs typeface="Calibri" pitchFamily="34" charset="-120"/>
+              </a:rPr>
               <a:t>IMMUNOLOGY &amp; SEROLOGY   ·   REFERENCES &amp; FURTHER READING</a:t>
             </a:r>
             <a:endParaRPr lang="en-US" sz="1100" dirty="0"/>
@@ -9203,7 +10839,7 @@
                 <a:ea typeface="Calibri" pitchFamily="34" charset="-122"/>
                 <a:cs typeface="Calibri" pitchFamily="34" charset="-120"/>
               </a:rPr>
-              <a:t>1.   Rifai N, et al. Tietz Textbook of Clinical Chemistry, 6th ed. Elsevier, 2018.</a:t>
+              <a:t>1.   Rich RR, et al. Clinical Immunology: Principles and Practice, 5th ed.</a:t>
             </a:r>
             <a:endParaRPr lang="en-US" sz="1150" dirty="0"/>
           </a:p>
@@ -9223,7 +10859,7 @@
                 <a:ea typeface="Calibri" pitchFamily="34" charset="-122"/>
                 <a:cs typeface="Calibri" pitchFamily="34" charset="-120"/>
               </a:rPr>
-              <a:t>2.   Bonilla FA, et al. Practice parameter for the diagnosis of primary immunodeficiency. J Allergy Clin Immunol. 2015.</a:t>
+              <a:t>2.   Keren DF. Protein Electrophoresis in Clinical Diagnosis (department teaching reference).</a:t>
             </a:r>
             <a:endParaRPr lang="en-US" sz="1150" dirty="0"/>
           </a:p>
@@ -9243,7 +10879,7 @@
                 <a:ea typeface="Calibri" pitchFamily="34" charset="-122"/>
                 <a:cs typeface="Calibri" pitchFamily="34" charset="-120"/>
               </a:rPr>
-              <a:t>3.   Shoenfeld Y, et al. Autoantibodies, 3rd ed. (reference).</a:t>
+              <a:t>3.   Bonilla FA, et al. Practice parameter for primary immunodeficiency. J Allergy Clin Immunol.</a:t>
             </a:r>
             <a:endParaRPr lang="en-US" sz="1150" dirty="0"/>
           </a:p>
@@ -9263,7 +10899,7 @@
                 <a:ea typeface="Calibri" pitchFamily="34" charset="-122"/>
                 <a:cs typeface="Calibri" pitchFamily="34" charset="-120"/>
               </a:rPr>
-              <a:t>4.   CLSI immunology/serology guidance documents.</a:t>
+              <a:t>4.   Detrick B, et al. Manual of Molecular and Clinical Laboratory Immunology, 8th ed.</a:t>
             </a:r>
             <a:endParaRPr lang="en-US" sz="1150" dirty="0"/>
           </a:p>
@@ -9369,7 +11005,7 @@
                 <a:ea typeface="Calibri" pitchFamily="34" charset="-122"/>
                 <a:cs typeface="Calibri" pitchFamily="34" charset="-120"/>
               </a:rPr>
-              <a:t>18</a:t>
+              <a:t>21</a:t>
             </a:r>
             <a:endParaRPr lang="en-US" sz="850" dirty="0"/>
           </a:p>
@@ -9613,7 +11249,7 @@
                 <a:ea typeface="Calibri" pitchFamily="34" charset="-122"/>
                 <a:cs typeface="Calibri" pitchFamily="34" charset="-120"/>
               </a:rPr>
-              <a:t>Interpret quantitative immunoglobulins.</a:t>
+              <a:t>Interpret total IgE and allergen-specific IgE.</a:t>
             </a:r>
             <a:endParaRPr lang="en-US" sz="1350" dirty="0"/>
           </a:p>
@@ -9747,7 +11383,7 @@
                 <a:ea typeface="Calibri" pitchFamily="34" charset="-122"/>
                 <a:cs typeface="Calibri" pitchFamily="34" charset="-120"/>
               </a:rPr>
-              <a:t>Correlate SPEP with immune findings.</a:t>
+              <a:t>Distinguish sensitization from clinical allergy.</a:t>
             </a:r>
             <a:endParaRPr lang="en-US" sz="1350" dirty="0"/>
           </a:p>
@@ -9881,7 +11517,7 @@
                 <a:ea typeface="Calibri" pitchFamily="34" charset="-122"/>
                 <a:cs typeface="Calibri" pitchFamily="34" charset="-120"/>
               </a:rPr>
-              <a:t>Apply specific IgE and tryptase testing.</a:t>
+              <a:t>Apply a tiered workup for suspected immunodeficiency.</a:t>
             </a:r>
             <a:endParaRPr lang="en-US" sz="1350" dirty="0"/>
           </a:p>
@@ -10015,7 +11651,7 @@
                 <a:ea typeface="Calibri" pitchFamily="34" charset="-122"/>
                 <a:cs typeface="Calibri" pitchFamily="34" charset="-120"/>
               </a:rPr>
-              <a:t>Interpret complement (C3, C4, CH50) results.</a:t>
+              <a:t>Interpret quantitative immunoglobulins and functional antibody responses.</a:t>
             </a:r>
             <a:endParaRPr lang="en-US" sz="1350" dirty="0"/>
           </a:p>
@@ -10149,7 +11785,7 @@
                 <a:ea typeface="Calibri" pitchFamily="34" charset="-122"/>
                 <a:cs typeface="Calibri" pitchFamily="34" charset="-120"/>
               </a:rPr>
-              <a:t>Outline a targeted immunodeficiency workup.</a:t>
+              <a:t>Relate protein electrophoresis to immunoglobulin evaluation.</a:t>
             </a:r>
             <a:endParaRPr lang="en-US" sz="1350" dirty="0"/>
           </a:p>
@@ -10283,7 +11919,7 @@
                 <a:ea typeface="Calibri" pitchFamily="34" charset="-122"/>
                 <a:cs typeface="Calibri" pitchFamily="34" charset="-120"/>
               </a:rPr>
-              <a:t>Use vaccine-response testing appropriately.</a:t>
+              <a:t>Use complement and lymphocyte testing appropriately.</a:t>
             </a:r>
             <a:endParaRPr lang="en-US" sz="1350" dirty="0"/>
           </a:p>
@@ -10633,7 +12269,7 @@
                 <a:ea typeface="Calibri" pitchFamily="34" charset="-122"/>
                 <a:cs typeface="Calibri" pitchFamily="34" charset="-120"/>
               </a:rPr>
-              <a:t>Immunoglobulins &amp; SPEP</a:t>
+              <a:t>Allergy testing</a:t>
             </a:r>
             <a:pPr algn="l" indent="0" marL="0">
               <a:buNone/>
@@ -10647,7 +12283,7 @@
                 <a:ea typeface="Calibri" pitchFamily="34" charset="-122"/>
                 <a:cs typeface="Calibri" pitchFamily="34" charset="-120"/>
               </a:rPr>
-              <a:t>   —  quantitation and correlation</a:t>
+              <a:t>   —  total vs specific IgE</a:t>
             </a:r>
             <a:endParaRPr lang="en-US" sz="1400" dirty="0"/>
           </a:p>
@@ -10774,7 +12410,7 @@
                 <a:ea typeface="Calibri" pitchFamily="34" charset="-122"/>
                 <a:cs typeface="Calibri" pitchFamily="34" charset="-120"/>
               </a:rPr>
-              <a:t>Allergy testing</a:t>
+              <a:t>Sensitization vs allergy</a:t>
             </a:r>
             <a:pPr algn="l" indent="0" marL="0">
               <a:buNone/>
@@ -10788,7 +12424,7 @@
                 <a:ea typeface="Calibri" pitchFamily="34" charset="-122"/>
                 <a:cs typeface="Calibri" pitchFamily="34" charset="-120"/>
               </a:rPr>
-              <a:t>   —  specific IgE, tryptase</a:t>
+              <a:t>   —  interpretation</a:t>
             </a:r>
             <a:endParaRPr lang="en-US" sz="1400" dirty="0"/>
           </a:p>
@@ -10922,7 +12558,7 @@
                 <a:ea typeface="Calibri" pitchFamily="34" charset="-122"/>
                 <a:cs typeface="Calibri" pitchFamily="34" charset="-120"/>
               </a:rPr>
-              <a:t>Complement</a:t>
+              <a:t>Immunodeficiency tiers</a:t>
             </a:r>
             <a:pPr algn="l" indent="0" marL="0">
               <a:buNone/>
@@ -10936,7 +12572,7 @@
                 <a:ea typeface="Calibri" pitchFamily="34" charset="-122"/>
                 <a:cs typeface="Calibri" pitchFamily="34" charset="-120"/>
               </a:rPr>
-              <a:t>   —  consumption and deficiency</a:t>
+              <a:t>   —  screen → function → advanced</a:t>
             </a:r>
             <a:endParaRPr lang="en-US" sz="1400" dirty="0"/>
           </a:p>
@@ -11063,7 +12699,7 @@
                 <a:ea typeface="Calibri" pitchFamily="34" charset="-122"/>
                 <a:cs typeface="Calibri" pitchFamily="34" charset="-120"/>
               </a:rPr>
-              <a:t>Immunodeficiency workup</a:t>
+              <a:t>Immunoglobulins &amp; protein</a:t>
             </a:r>
             <a:pPr algn="l" indent="0" marL="0">
               <a:buNone/>
@@ -11077,7 +12713,7 @@
                 <a:ea typeface="Calibri" pitchFamily="34" charset="-122"/>
                 <a:cs typeface="Calibri" pitchFamily="34" charset="-120"/>
               </a:rPr>
-              <a:t>   —  targeted approach</a:t>
+              <a:t>   —  quant Ig, SPEP/IFE</a:t>
             </a:r>
             <a:endParaRPr lang="en-US" sz="1400" dirty="0"/>
           </a:p>
@@ -11211,7 +12847,7 @@
                 <a:ea typeface="Calibri" pitchFamily="34" charset="-122"/>
                 <a:cs typeface="Calibri" pitchFamily="34" charset="-120"/>
               </a:rPr>
-              <a:t>Cases &amp; board</a:t>
+              <a:t>Cases &amp; board review</a:t>
             </a:r>
             <a:endParaRPr lang="en-US" sz="1400" dirty="0"/>
           </a:p>
@@ -11510,7 +13146,7 @@
                 <a:ea typeface="Calibri" pitchFamily="34" charset="-122"/>
                 <a:cs typeface="Calibri" pitchFamily="34" charset="-120"/>
               </a:rPr>
-              <a:t>Immunoglobulins, Allergy &amp; Complement</a:t>
+              <a:t>Allergy Testing</a:t>
             </a:r>
             <a:endParaRPr lang="en-US" sz="3800" dirty="0"/>
           </a:p>
@@ -11581,7 +13217,7 @@
                 <a:ea typeface="Calibri" pitchFamily="34" charset="-122"/>
                 <a:cs typeface="Calibri" pitchFamily="34" charset="-120"/>
               </a:rPr>
-              <a:t>IMMUNOLOGY &amp; SEROLOGY   ·   IMMUNOGLOBULINS</a:t>
+              <a:t>IMMUNOLOGY &amp; SEROLOGY   ·   ALLERGY</a:t>
             </a:r>
             <a:endParaRPr lang="en-US" sz="1100" dirty="0"/>
           </a:p>
@@ -11620,7 +13256,7 @@
                 <a:ea typeface="Calibri" pitchFamily="34" charset="-122"/>
                 <a:cs typeface="Calibri" pitchFamily="34" charset="-120"/>
               </a:rPr>
-              <a:t>Quantitative Ig and SPEP Correlation</a:t>
+              <a:t>Total IgE vs Allergen-Specific IgE</a:t>
             </a:r>
             <a:endParaRPr lang="en-US" sz="3000" dirty="0"/>
           </a:p>
@@ -11634,18 +13270,23 @@
         </p:nvSpPr>
         <p:spPr>
           <a:xfrm>
-            <a:off x="566928" y="1517904"/>
-            <a:ext cx="5346040" cy="4114800"/>
+            <a:off x="883768" y="1481328"/>
+            <a:ext cx="10424160" cy="4343400"/>
           </a:xfrm>
           <a:prstGeom prst="roundRect">
             <a:avLst>
-              <a:gd name="adj" fmla="val 2000"/>
+              <a:gd name="adj" fmla="val 1895"/>
             </a:avLst>
           </a:prstGeom>
           <a:solidFill>
-            <a:srgbClr val="F1E8F7"/>
+            <a:srgbClr val="FFFFFF"/>
           </a:solidFill>
-          <a:ln/>
+          <a:ln w="12700">
+            <a:solidFill>
+              <a:srgbClr val="DCE4EC"/>
+            </a:solidFill>
+            <a:prstDash val="solid"/>
+          </a:ln>
           <a:effectLst>
             <a:outerShdw sx="100000" sy="100000" kx="0" ky="0" algn="bl" rotWithShape="0" blurRad="88900" dist="25400" dir="5400000">
               <a:srgbClr val="22303C">
@@ -11655,55 +13296,40 @@
           </a:effectLst>
         </p:spPr>
       </p:sp>
-      <p:sp>
-        <p:nvSpPr>
-          <p:cNvPr id="5" name="Text 3"/>
-          <p:cNvSpPr/>
-          <p:nvPr/>
-        </p:nvSpPr>
-        <p:spPr>
-          <a:xfrm>
-            <a:off x="804672" y="1682496"/>
-            <a:ext cx="4888840" cy="274320"/>
-          </a:xfrm>
-          <a:prstGeom prst="rect">
-            <a:avLst/>
-          </a:prstGeom>
-          <a:noFill/>
-          <a:ln/>
-        </p:spPr>
-        <p:txBody>
-          <a:bodyPr wrap="square" lIns="0" tIns="0" rIns="0" bIns="0" rtlCol="0" anchor="ctr"/>
-          <a:lstStyle/>
-          <a:p>
-            <a:pPr indent="0" marL="0">
-              <a:buNone/>
-            </a:pPr>
-            <a:r>
-              <a:rPr lang="en-US" sz="1200" b="1" spc="100" kern="0" dirty="0">
-                <a:solidFill>
-                  <a:srgbClr val="4A1269"/>
-                </a:solidFill>
-                <a:latin typeface="Calibri" pitchFamily="34" charset="0"/>
-                <a:ea typeface="Calibri" pitchFamily="34" charset="-122"/>
-                <a:cs typeface="Calibri" pitchFamily="34" charset="-120"/>
-              </a:rPr>
-              <a:t>READING IMMUNOGLOBULINS</a:t>
-            </a:r>
-            <a:endParaRPr lang="en-US" sz="1200" dirty="0"/>
-          </a:p>
-        </p:txBody>
-      </p:sp>
-      <p:sp>
-        <p:nvSpPr>
-          <p:cNvPr id="6" name="Text 4"/>
-          <p:cNvSpPr/>
-          <p:nvPr/>
-        </p:nvSpPr>
-        <p:spPr>
-          <a:xfrm>
-            <a:off x="804672" y="2029968"/>
-            <a:ext cx="4870552" cy="3474720"/>
+      <p:pic>
+        <p:nvPicPr>
+          <p:cNvPr id="5" name="Image 0" descr="/tmp/cp_work2/art/immuno_allergy.png">    </p:cNvPr>
+          <p:cNvPicPr>
+            <a:picLocks noChangeAspect="1"/>
+          </p:cNvPicPr>
+          <p:nvPr/>
+        </p:nvPicPr>
+        <p:blipFill>
+          <a:blip r:embed="rId1"/>
+          <a:stretch>
+            <a:fillRect/>
+          </a:stretch>
+        </p:blipFill>
+        <p:spPr>
+          <a:xfrm>
+            <a:off x="1011784" y="1609344"/>
+            <a:ext cx="10168128" cy="4087368"/>
+          </a:xfrm>
+          <a:prstGeom prst="rect">
+            <a:avLst/>
+          </a:prstGeom>
+        </p:spPr>
+      </p:pic>
+      <p:sp>
+        <p:nvSpPr>
+          <p:cNvPr id="6" name="Text 3"/>
+          <p:cNvSpPr/>
+          <p:nvPr/>
+        </p:nvSpPr>
+        <p:spPr>
+          <a:xfrm>
+            <a:off x="566928" y="5897880"/>
+            <a:ext cx="11057839" cy="365760"/>
           </a:xfrm>
           <a:prstGeom prst="rect">
             <a:avLst/>
@@ -11715,268 +13341,27 @@
           <a:bodyPr wrap="square" lIns="0" tIns="0" rIns="0" bIns="0" rtlCol="0" anchor="t"/>
           <a:lstStyle/>
           <a:p>
-            <a:pPr algn="l" marL="177800" indent="-177800">
-              <a:spcAft>
-                <a:spcPts val="900"/>
-              </a:spcAft>
-              <a:buSzPct val="100000"/>
-              <a:buChar char="•"/>
-            </a:pPr>
-            <a:r>
-              <a:rPr lang="en-US" sz="1250" b="1" dirty="0">
-                <a:solidFill>
-                  <a:srgbClr val="1B2A38"/>
-                </a:solidFill>
-                <a:latin typeface="Calibri" pitchFamily="34" charset="0"/>
-                <a:ea typeface="Calibri" pitchFamily="34" charset="-122"/>
-                <a:cs typeface="Calibri" pitchFamily="34" charset="-120"/>
-              </a:rPr>
-              <a:t>Quantify IgG, IgA, IgM (and IgE) to assess humoral immunity.</a:t>
-            </a:r>
-            <a:endParaRPr lang="en-US" sz="1250" dirty="0"/>
-          </a:p>
-          <a:p>
-            <a:pPr algn="l" marL="177800" indent="-177800">
-              <a:spcAft>
-                <a:spcPts val="900"/>
-              </a:spcAft>
-              <a:buSzPct val="100000"/>
-              <a:buChar char="•"/>
-            </a:pPr>
-            <a:r>
-              <a:rPr lang="en-US" sz="1250" dirty="0">
-                <a:solidFill>
-                  <a:srgbClr val="33444F"/>
-                </a:solidFill>
-                <a:latin typeface="Calibri" pitchFamily="34" charset="0"/>
-                <a:ea typeface="Calibri" pitchFamily="34" charset="-122"/>
-                <a:cs typeface="Calibri" pitchFamily="34" charset="-120"/>
-              </a:rPr>
-              <a:t>Low IgG (± IgA/IgM): primary (e.g., CVID) or secondary (myeloma, protein loss, drugs) immunodeficiency.</a:t>
-            </a:r>
-            <a:endParaRPr lang="en-US" sz="1250" dirty="0"/>
-          </a:p>
-          <a:p>
-            <a:pPr algn="l" marL="177800" indent="-177800">
-              <a:spcAft>
-                <a:spcPts val="900"/>
-              </a:spcAft>
-              <a:buSzPct val="100000"/>
-              <a:buChar char="•"/>
-            </a:pPr>
-            <a:r>
-              <a:rPr lang="en-US" sz="1250" dirty="0">
-                <a:solidFill>
-                  <a:srgbClr val="33444F"/>
-                </a:solidFill>
-                <a:latin typeface="Calibri" pitchFamily="34" charset="0"/>
-                <a:ea typeface="Calibri" pitchFamily="34" charset="-122"/>
-                <a:cs typeface="Calibri" pitchFamily="34" charset="-120"/>
-              </a:rPr>
-              <a:t>Selective IgA deficiency is the commonest primary immunodeficiency — relevant to transfusion (anti-IgA).</a:t>
-            </a:r>
-            <a:endParaRPr lang="en-US" sz="1250" dirty="0"/>
-          </a:p>
-          <a:p>
-            <a:pPr algn="l" marL="177800" indent="-177800">
-              <a:spcAft>
-                <a:spcPts val="900"/>
-              </a:spcAft>
-              <a:buSzPct val="100000"/>
-              <a:buChar char="•"/>
-            </a:pPr>
-            <a:r>
-              <a:rPr lang="en-US" sz="1250" dirty="0">
-                <a:solidFill>
-                  <a:srgbClr val="33444F"/>
-                </a:solidFill>
-                <a:latin typeface="Calibri" pitchFamily="34" charset="0"/>
-                <a:ea typeface="Calibri" pitchFamily="34" charset="-122"/>
-                <a:cs typeface="Calibri" pitchFamily="34" charset="-120"/>
-              </a:rPr>
-              <a:t>Polyclonal increase suggests chronic infection/inflammation/liver disease.</a:t>
-            </a:r>
-            <a:endParaRPr lang="en-US" sz="1250" dirty="0"/>
-          </a:p>
-        </p:txBody>
-      </p:sp>
-      <p:sp>
-        <p:nvSpPr>
-          <p:cNvPr id="7" name="Shape 5"/>
-          <p:cNvSpPr/>
-          <p:nvPr/>
-        </p:nvSpPr>
-        <p:spPr>
-          <a:xfrm>
-            <a:off x="6278728" y="1517904"/>
-            <a:ext cx="5346040" cy="4114800"/>
-          </a:xfrm>
-          <a:prstGeom prst="roundRect">
-            <a:avLst>
-              <a:gd name="adj" fmla="val 2000"/>
-            </a:avLst>
-          </a:prstGeom>
-          <a:solidFill>
-            <a:srgbClr val="F1E8F7"/>
-          </a:solidFill>
-          <a:ln/>
-          <a:effectLst>
-            <a:outerShdw sx="100000" sy="100000" kx="0" ky="0" algn="bl" rotWithShape="0" blurRad="88900" dist="25400" dir="5400000">
-              <a:srgbClr val="22303C">
-                <a:alpha val="12000"/>
-              </a:srgbClr>
-            </a:outerShdw>
-          </a:effectLst>
-        </p:spPr>
-      </p:sp>
-      <p:sp>
-        <p:nvSpPr>
-          <p:cNvPr id="8" name="Text 6"/>
-          <p:cNvSpPr/>
-          <p:nvPr/>
-        </p:nvSpPr>
-        <p:spPr>
-          <a:xfrm>
-            <a:off x="6516472" y="1682496"/>
-            <a:ext cx="4888840" cy="274320"/>
-          </a:xfrm>
-          <a:prstGeom prst="rect">
-            <a:avLst/>
-          </a:prstGeom>
-          <a:noFill/>
-          <a:ln/>
-        </p:spPr>
-        <p:txBody>
-          <a:bodyPr wrap="square" lIns="0" tIns="0" rIns="0" bIns="0" rtlCol="0" anchor="ctr"/>
-          <a:lstStyle/>
-          <a:p>
-            <a:pPr indent="0" marL="0">
-              <a:buNone/>
-            </a:pPr>
-            <a:r>
-              <a:rPr lang="en-US" sz="1200" b="1" spc="100" kern="0" dirty="0">
-                <a:solidFill>
-                  <a:srgbClr val="4A1269"/>
-                </a:solidFill>
-                <a:latin typeface="Calibri" pitchFamily="34" charset="0"/>
-                <a:ea typeface="Calibri" pitchFamily="34" charset="-122"/>
-                <a:cs typeface="Calibri" pitchFamily="34" charset="-120"/>
-              </a:rPr>
-              <a:t>SPEP CORRELATION</a:t>
-            </a:r>
-            <a:endParaRPr lang="en-US" sz="1200" dirty="0"/>
-          </a:p>
-        </p:txBody>
-      </p:sp>
-      <p:sp>
-        <p:nvSpPr>
-          <p:cNvPr id="9" name="Text 7"/>
-          <p:cNvSpPr/>
-          <p:nvPr/>
-        </p:nvSpPr>
-        <p:spPr>
-          <a:xfrm>
-            <a:off x="6516472" y="2029968"/>
-            <a:ext cx="4870552" cy="3474720"/>
-          </a:xfrm>
-          <a:prstGeom prst="rect">
-            <a:avLst/>
-          </a:prstGeom>
-          <a:noFill/>
-          <a:ln/>
-        </p:spPr>
-        <p:txBody>
-          <a:bodyPr wrap="square" lIns="0" tIns="0" rIns="0" bIns="0" rtlCol="0" anchor="t"/>
-          <a:lstStyle/>
-          <a:p>
-            <a:pPr algn="l" marL="177800" indent="-177800">
-              <a:spcAft>
-                <a:spcPts val="900"/>
-              </a:spcAft>
-              <a:buSzPct val="100000"/>
-              <a:buChar char="•"/>
-            </a:pPr>
-            <a:r>
-              <a:rPr lang="en-US" sz="1250" b="1" dirty="0">
-                <a:solidFill>
-                  <a:srgbClr val="1B2A38"/>
-                </a:solidFill>
-                <a:latin typeface="Calibri" pitchFamily="34" charset="0"/>
-                <a:ea typeface="Calibri" pitchFamily="34" charset="-122"/>
-                <a:cs typeface="Calibri" pitchFamily="34" charset="-120"/>
-              </a:rPr>
-              <a:t>Hypogammaglobulinemia on SPEP may signal immunodeficiency or light-chain myeloma.</a:t>
-            </a:r>
-            <a:endParaRPr lang="en-US" sz="1250" dirty="0"/>
-          </a:p>
-          <a:p>
-            <a:pPr algn="l" marL="177800" indent="-177800">
-              <a:spcAft>
-                <a:spcPts val="900"/>
-              </a:spcAft>
-              <a:buSzPct val="100000"/>
-              <a:buChar char="•"/>
-            </a:pPr>
-            <a:r>
-              <a:rPr lang="en-US" sz="1250" dirty="0">
-                <a:solidFill>
-                  <a:srgbClr val="33444F"/>
-                </a:solidFill>
-                <a:latin typeface="Calibri" pitchFamily="34" charset="0"/>
-                <a:ea typeface="Calibri" pitchFamily="34" charset="-122"/>
-                <a:cs typeface="Calibri" pitchFamily="34" charset="-120"/>
-              </a:rPr>
-              <a:t>A monoclonal spike points to a clonal process (see Chemistry lecture).</a:t>
-            </a:r>
-            <a:endParaRPr lang="en-US" sz="1250" dirty="0"/>
-          </a:p>
-          <a:p>
-            <a:pPr algn="l" marL="177800" indent="-177800">
-              <a:spcAft>
-                <a:spcPts val="900"/>
-              </a:spcAft>
-              <a:buSzPct val="100000"/>
-              <a:buChar char="•"/>
-            </a:pPr>
-            <a:r>
-              <a:rPr lang="en-US" sz="1250" dirty="0">
-                <a:solidFill>
-                  <a:srgbClr val="33444F"/>
-                </a:solidFill>
-                <a:latin typeface="Calibri" pitchFamily="34" charset="0"/>
-                <a:ea typeface="Calibri" pitchFamily="34" charset="-122"/>
-                <a:cs typeface="Calibri" pitchFamily="34" charset="-120"/>
-              </a:rPr>
-              <a:t>Combine SPEP/IFE with quantitative Ig and free light chains.</a:t>
-            </a:r>
-            <a:endParaRPr lang="en-US" sz="1250" dirty="0"/>
-          </a:p>
-          <a:p>
-            <a:pPr algn="l" marL="177800" indent="-177800">
-              <a:spcAft>
-                <a:spcPts val="900"/>
-              </a:spcAft>
-              <a:buSzPct val="100000"/>
-              <a:buChar char="•"/>
-            </a:pPr>
-            <a:r>
-              <a:rPr lang="en-US" sz="1250" dirty="0">
-                <a:solidFill>
-                  <a:srgbClr val="33444F"/>
-                </a:solidFill>
-                <a:latin typeface="Calibri" pitchFamily="34" charset="0"/>
-                <a:ea typeface="Calibri" pitchFamily="34" charset="-122"/>
-                <a:cs typeface="Calibri" pitchFamily="34" charset="-120"/>
-              </a:rPr>
-              <a:t>Protein-losing states lower albumin and immunoglobulins together.</a:t>
-            </a:r>
-            <a:endParaRPr lang="en-US" sz="1250" dirty="0"/>
-          </a:p>
-        </p:txBody>
-      </p:sp>
-      <p:sp>
-        <p:nvSpPr>
-          <p:cNvPr id="10" name="Text 8"/>
+            <a:pPr algn="ctr" indent="0" marL="0">
+              <a:buNone/>
+            </a:pPr>
+            <a:r>
+              <a:rPr lang="en-US" sz="1150" i="1" dirty="0">
+                <a:solidFill>
+                  <a:srgbClr val="6B7B8A"/>
+                </a:solidFill>
+                <a:latin typeface="Calibri" pitchFamily="34" charset="0"/>
+                <a:ea typeface="Calibri" pitchFamily="34" charset="-122"/>
+                <a:cs typeface="Calibri" pitchFamily="34" charset="-120"/>
+              </a:rPr>
+              <a:t>Original schematic. Specific IgE plus a matching clinical history confirms sensitization; total IgE is non-specific.</a:t>
+            </a:r>
+            <a:endParaRPr lang="en-US" sz="1150" dirty="0"/>
+          </a:p>
+        </p:txBody>
+      </p:sp>
+      <p:sp>
+        <p:nvSpPr>
+          <p:cNvPr id="7" name="Text 4"/>
           <p:cNvSpPr/>
           <p:nvPr/>
         </p:nvSpPr>
@@ -12015,7 +13400,7 @@
       </p:sp>
       <p:sp>
         <p:nvSpPr>
-          <p:cNvPr id="11" name="Text 9"/>
+          <p:cNvPr id="8" name="Text 5"/>
           <p:cNvSpPr/>
           <p:nvPr/>
         </p:nvSpPr>
@@ -12184,7 +13569,7 @@
                 <a:ea typeface="Calibri" pitchFamily="34" charset="-122"/>
                 <a:cs typeface="Calibri" pitchFamily="34" charset="-120"/>
               </a:rPr>
-              <a:t>Specific IgE and Tryptase</a:t>
+              <a:t>Interpreting IgE Results</a:t>
             </a:r>
             <a:endParaRPr lang="en-US" sz="3000" dirty="0"/>
           </a:p>
@@ -12252,7 +13637,7 @@
                 <a:ea typeface="Calibri" pitchFamily="34" charset="-122"/>
                 <a:cs typeface="Calibri" pitchFamily="34" charset="-120"/>
               </a:rPr>
-              <a:t>SPECIFIC IGE</a:t>
+              <a:t>TOTAL VS SPECIFIC IGE</a:t>
             </a:r>
             <a:endParaRPr lang="en-US" sz="1200" dirty="0"/>
           </a:p>
@@ -12295,7 +13680,7 @@
                 <a:ea typeface="Calibri" pitchFamily="34" charset="-122"/>
                 <a:cs typeface="Calibri" pitchFamily="34" charset="-120"/>
               </a:rPr>
-              <a:t>Allergen-specific IgE supports (does not alone diagnose) IgE-mediated allergy.</a:t>
+              <a:t>Total IgE is non-specific — elevated in atopy, parasites, and some immunodeficiencies (hyper-IgE).</a:t>
             </a:r>
             <a:endParaRPr lang="en-US" sz="1250" dirty="0"/>
           </a:p>
@@ -12316,7 +13701,7 @@
                 <a:ea typeface="Calibri" pitchFamily="34" charset="-122"/>
                 <a:cs typeface="Calibri" pitchFamily="34" charset="-120"/>
               </a:rPr>
-              <a:t>Sensitization (positive IgE) is not the same as clinical allergy — correlate with history.</a:t>
+              <a:t>Allergen-specific IgE (sIgE) quantifies IgE to a defined allergen.</a:t>
             </a:r>
             <a:endParaRPr lang="en-US" sz="1250" dirty="0"/>
           </a:p>
@@ -12337,7 +13722,7 @@
                 <a:ea typeface="Calibri" pitchFamily="34" charset="-122"/>
                 <a:cs typeface="Calibri" pitchFamily="34" charset="-120"/>
               </a:rPr>
-              <a:t>Total IgE is elevated in atopy, parasitic infection, and some immunodeficiencies.</a:t>
+              <a:t>Component-resolved testing refines cross-reactivity.</a:t>
             </a:r>
             <a:endParaRPr lang="en-US" sz="1250" dirty="0"/>
           </a:p>
@@ -12358,7 +13743,7 @@
                 <a:ea typeface="Calibri" pitchFamily="34" charset="-122"/>
                 <a:cs typeface="Calibri" pitchFamily="34" charset="-120"/>
               </a:rPr>
-              <a:t>Component-resolved testing refines risk for some allergens.</a:t>
+              <a:t>sIgE complements, not replaces, skin testing and history.</a:t>
             </a:r>
             <a:endParaRPr lang="en-US" sz="1250" dirty="0"/>
           </a:p>
@@ -12381,7 +13766,7 @@
             </a:avLst>
           </a:prstGeom>
           <a:solidFill>
-            <a:srgbClr val="F1E8F7"/>
+            <a:srgbClr val="F1E9F7"/>
           </a:solidFill>
           <a:ln/>
           <a:effectLst>
@@ -12426,7 +13811,7 @@
                 <a:ea typeface="Calibri" pitchFamily="34" charset="-122"/>
                 <a:cs typeface="Calibri" pitchFamily="34" charset="-120"/>
               </a:rPr>
-              <a:t>TRYPTASE</a:t>
+              <a:t>SENSITIZATION ≠ ALLERGY</a:t>
             </a:r>
             <a:endParaRPr lang="en-US" sz="1200" dirty="0"/>
           </a:p>
@@ -12469,7 +13854,7 @@
                 <a:ea typeface="Calibri" pitchFamily="34" charset="-122"/>
                 <a:cs typeface="Calibri" pitchFamily="34" charset="-120"/>
               </a:rPr>
-              <a:t>Acute tryptase rises in anaphylaxis (mast-cell activation) — draw during/after the event and compare to baseline.</a:t>
+              <a:t>A positive sIgE indicates sensitization, which is clinically meaningful only with a matching history.</a:t>
             </a:r>
             <a:endParaRPr lang="en-US" sz="1250" dirty="0"/>
           </a:p>
@@ -12490,7 +13875,7 @@
                 <a:ea typeface="Calibri" pitchFamily="34" charset="-122"/>
                 <a:cs typeface="Calibri" pitchFamily="34" charset="-120"/>
               </a:rPr>
-              <a:t>Persistently elevated baseline tryptase suggests mastocytosis.</a:t>
+              <a:t>Asymptomatic sensitization is common.</a:t>
             </a:r>
             <a:endParaRPr lang="en-US" sz="1250" dirty="0"/>
           </a:p>
@@ -12511,7 +13896,7 @@
                 <a:ea typeface="Calibri" pitchFamily="34" charset="-122"/>
                 <a:cs typeface="Calibri" pitchFamily="34" charset="-120"/>
               </a:rPr>
-              <a:t>Supports, with clinical criteria, the diagnosis of anaphylaxis.</a:t>
+              <a:t>Higher sIgE levels raise the probability of clinical allergy.</a:t>
             </a:r>
             <a:endParaRPr lang="en-US" sz="1250" dirty="0"/>
           </a:p>
@@ -12532,7 +13917,7 @@
                 <a:ea typeface="Calibri" pitchFamily="34" charset="-122"/>
                 <a:cs typeface="Calibri" pitchFamily="34" charset="-120"/>
               </a:rPr>
-              <a:t>Timing of the draw is critical.</a:t>
+              <a:t>Interpret panels in the clinical context to avoid over-diagnosis.</a:t>
             </a:r>
             <a:endParaRPr lang="en-US" sz="1250" dirty="0"/>
           </a:p>
@@ -12655,6 +14040,199 @@
 <file path=ppt/slides/slide8.xml><?xml version="1.0" encoding="utf-8"?>
 <p:sld xmlns:a="http://schemas.openxmlformats.org/drawingml/2006/main" xmlns:r="http://schemas.openxmlformats.org/officeDocument/2006/relationships" xmlns:p="http://schemas.openxmlformats.org/presentationml/2006/main">
   <p:cSld name="Slide 8">
+    <p:bg>
+      <p:bgPr>
+        <a:solidFill>
+          <a:srgbClr val="4A1269"/>
+        </a:solidFill>
+      </p:bgPr>
+    </p:bg>
+    <p:spTree>
+      <p:nvGrpSpPr>
+        <p:cNvPr id="1" name=""/>
+        <p:cNvGrpSpPr/>
+        <p:nvPr/>
+      </p:nvGrpSpPr>
+      <p:grpSpPr>
+        <a:xfrm>
+          <a:off x="0" y="0"/>
+          <a:ext cx="0" cy="0"/>
+          <a:chOff x="0" y="0"/>
+          <a:chExt cx="0" cy="0"/>
+        </a:xfrm>
+      </p:grpSpPr>
+      <p:sp>
+        <p:nvSpPr>
+          <p:cNvPr id="2" name="Shape 0"/>
+          <p:cNvSpPr/>
+          <p:nvPr/>
+        </p:nvSpPr>
+        <p:spPr>
+          <a:xfrm>
+            <a:off x="9509760" y="-1280160"/>
+            <a:ext cx="4754880" cy="4754880"/>
+          </a:xfrm>
+          <a:prstGeom prst="ellipse">
+            <a:avLst/>
+          </a:prstGeom>
+          <a:solidFill>
+            <a:srgbClr val="FFFFFF">
+              <a:alpha val="8000"/>
+            </a:srgbClr>
+          </a:solidFill>
+          <a:ln/>
+        </p:spPr>
+      </p:sp>
+      <p:sp>
+        <p:nvSpPr>
+          <p:cNvPr id="3" name="Shape 1"/>
+          <p:cNvSpPr/>
+          <p:nvPr/>
+        </p:nvSpPr>
+        <p:spPr>
+          <a:xfrm>
+            <a:off x="10607040" y="3931920"/>
+            <a:ext cx="3108960" cy="3108960"/>
+          </a:xfrm>
+          <a:prstGeom prst="ellipse">
+            <a:avLst/>
+          </a:prstGeom>
+          <a:solidFill>
+            <a:srgbClr val="FFFFFF">
+              <a:alpha val="6000"/>
+            </a:srgbClr>
+          </a:solidFill>
+          <a:ln/>
+        </p:spPr>
+      </p:sp>
+      <p:sp>
+        <p:nvSpPr>
+          <p:cNvPr id="4" name="Text 2"/>
+          <p:cNvSpPr/>
+          <p:nvPr/>
+        </p:nvSpPr>
+        <p:spPr>
+          <a:xfrm>
+            <a:off x="566928" y="1783080"/>
+            <a:ext cx="2743200" cy="1463040"/>
+          </a:xfrm>
+          <a:prstGeom prst="rect">
+            <a:avLst/>
+          </a:prstGeom>
+          <a:noFill/>
+          <a:ln/>
+        </p:spPr>
+        <p:txBody>
+          <a:bodyPr wrap="square" lIns="0" tIns="0" rIns="0" bIns="0" rtlCol="0" anchor="ctr"/>
+          <a:lstStyle/>
+          <a:p>
+            <a:pPr algn="l" indent="0" marL="0">
+              <a:buNone/>
+            </a:pPr>
+            <a:r>
+              <a:rPr lang="en-US" sz="6400" b="1" dirty="0">
+                <a:solidFill>
+                  <a:srgbClr val="F1E8F7"/>
+                </a:solidFill>
+                <a:latin typeface="Calibri" pitchFamily="34" charset="0"/>
+                <a:ea typeface="Calibri" pitchFamily="34" charset="-122"/>
+                <a:cs typeface="Calibri" pitchFamily="34" charset="-120"/>
+              </a:rPr>
+              <a:t>02</a:t>
+            </a:r>
+            <a:endParaRPr lang="en-US" sz="6400" dirty="0"/>
+          </a:p>
+        </p:txBody>
+      </p:sp>
+      <p:sp>
+        <p:nvSpPr>
+          <p:cNvPr id="5" name="Text 3"/>
+          <p:cNvSpPr/>
+          <p:nvPr/>
+        </p:nvSpPr>
+        <p:spPr>
+          <a:xfrm>
+            <a:off x="566928" y="3246120"/>
+            <a:ext cx="10058400" cy="365760"/>
+          </a:xfrm>
+          <a:prstGeom prst="rect">
+            <a:avLst/>
+          </a:prstGeom>
+          <a:noFill/>
+          <a:ln/>
+        </p:spPr>
+        <p:txBody>
+          <a:bodyPr wrap="square" lIns="0" tIns="0" rIns="0" bIns="0" rtlCol="0" anchor="ctr"/>
+          <a:lstStyle/>
+          <a:p>
+            <a:pPr algn="l" indent="0" marL="0">
+              <a:buNone/>
+            </a:pPr>
+            <a:r>
+              <a:rPr lang="en-US" sz="1300" b="1" spc="250" kern="0" dirty="0">
+                <a:solidFill>
+                  <a:srgbClr val="F2C9D9"/>
+                </a:solidFill>
+                <a:latin typeface="Calibri" pitchFamily="34" charset="0"/>
+                <a:ea typeface="Calibri" pitchFamily="34" charset="-122"/>
+                <a:cs typeface="Calibri" pitchFamily="34" charset="-120"/>
+              </a:rPr>
+              <a:t>PART TWO</a:t>
+            </a:r>
+            <a:endParaRPr lang="en-US" sz="1300" dirty="0"/>
+          </a:p>
+        </p:txBody>
+      </p:sp>
+      <p:sp>
+        <p:nvSpPr>
+          <p:cNvPr id="6" name="Text 4"/>
+          <p:cNvSpPr/>
+          <p:nvPr/>
+        </p:nvSpPr>
+        <p:spPr>
+          <a:xfrm>
+            <a:off x="566928" y="3611880"/>
+            <a:ext cx="10607040" cy="1463040"/>
+          </a:xfrm>
+          <a:prstGeom prst="rect">
+            <a:avLst/>
+          </a:prstGeom>
+          <a:noFill/>
+          <a:ln/>
+        </p:spPr>
+        <p:txBody>
+          <a:bodyPr wrap="square" lIns="0" tIns="0" rIns="0" bIns="0" rtlCol="0" anchor="t"/>
+          <a:lstStyle/>
+          <a:p>
+            <a:pPr algn="l" indent="0" marL="0">
+              <a:buNone/>
+            </a:pPr>
+            <a:r>
+              <a:rPr lang="en-US" sz="3800" b="1" dirty="0">
+                <a:solidFill>
+                  <a:srgbClr val="FFFFFF"/>
+                </a:solidFill>
+                <a:latin typeface="Calibri" pitchFamily="34" charset="0"/>
+                <a:ea typeface="Calibri" pitchFamily="34" charset="-122"/>
+                <a:cs typeface="Calibri" pitchFamily="34" charset="-120"/>
+              </a:rPr>
+              <a:t>Immunodeficiency &amp; Protein Testing</a:t>
+            </a:r>
+            <a:endParaRPr lang="en-US" sz="3800" dirty="0"/>
+          </a:p>
+        </p:txBody>
+      </p:sp>
+    </p:spTree>
+  </p:cSld>
+  <p:clrMapOvr>
+    <a:masterClrMapping/>
+  </p:clrMapOvr>
+</p:sld>
+</file>
+
+<file path=ppt/slides/slide9.xml><?xml version="1.0" encoding="utf-8"?>
+<p:sld xmlns:a="http://schemas.openxmlformats.org/drawingml/2006/main" xmlns:r="http://schemas.openxmlformats.org/officeDocument/2006/relationships" xmlns:p="http://schemas.openxmlformats.org/presentationml/2006/main">
+  <p:cSld name="Slide 9">
     <p:bg>
       <p:bgPr>
         <a:solidFill>
@@ -12709,7 +14287,7 @@
                 <a:ea typeface="Calibri" pitchFamily="34" charset="-122"/>
                 <a:cs typeface="Calibri" pitchFamily="34" charset="-120"/>
               </a:rPr>
-              <a:t>IMMUNOLOGY &amp; SEROLOGY   ·   COMPLEMENT</a:t>
+              <a:t>IMMUNOLOGY &amp; SEROLOGY   ·   IMMUNODEFICIENCY</a:t>
             </a:r>
             <a:endParaRPr lang="en-US" sz="1100" dirty="0"/>
           </a:p>
@@ -12748,7 +14326,7 @@
                 <a:ea typeface="Calibri" pitchFamily="34" charset="-122"/>
                 <a:cs typeface="Calibri" pitchFamily="34" charset="-120"/>
               </a:rPr>
-              <a:t>The Complement System</a:t>
+              <a:t>Tiered Workup of Suspected Immunodeficiency</a:t>
             </a:r>
             <a:endParaRPr lang="en-US" sz="3000" dirty="0"/>
           </a:p>
@@ -12762,12 +14340,12 @@
         </p:nvSpPr>
         <p:spPr>
           <a:xfrm>
-            <a:off x="1249528" y="1481328"/>
-            <a:ext cx="9692640" cy="3877056"/>
+            <a:off x="975208" y="1481328"/>
+            <a:ext cx="10241280" cy="4325112"/>
           </a:xfrm>
           <a:prstGeom prst="roundRect">
             <a:avLst>
-              <a:gd name="adj" fmla="val 2123"/>
+              <a:gd name="adj" fmla="val 1903"/>
             </a:avLst>
           </a:prstGeom>
           <a:solidFill>
@@ -12790,7 +14368,7 @@
       </p:sp>
       <p:pic>
         <p:nvPicPr>
-          <p:cNvPr id="5" name="Image 0" descr="/tmp/cp_work2/art/immuno_complement.png">    </p:cNvPr>
+          <p:cNvPr id="5" name="Image 0" descr="/tmp/cp_work2/art/immuno_idef.png">    </p:cNvPr>
           <p:cNvPicPr>
             <a:picLocks noChangeAspect="1"/>
           </p:cNvPicPr>
@@ -12804,8 +14382,8 @@
         </p:blipFill>
         <p:spPr>
           <a:xfrm>
-            <a:off x="1377544" y="1609344"/>
-            <a:ext cx="9436608" cy="3621024"/>
+            <a:off x="1103224" y="1609344"/>
+            <a:ext cx="9985248" cy="4069080"/>
           </a:xfrm>
           <a:prstGeom prst="rect">
             <a:avLst/>
@@ -12820,7 +14398,7 @@
         </p:nvSpPr>
         <p:spPr>
           <a:xfrm>
-            <a:off x="566928" y="5431536"/>
+            <a:off x="566928" y="5879592"/>
             <a:ext cx="11057839" cy="365760"/>
           </a:xfrm>
           <a:prstGeom prst="rect">
@@ -12845,7 +14423,7 @@
                 <a:ea typeface="Calibri" pitchFamily="34" charset="-122"/>
                 <a:cs typeface="Calibri" pitchFamily="34" charset="-120"/>
               </a:rPr>
-              <a:t>Original schematic. Three activation pathways converge on C3 and the membrane attack complex; consumption lowers C3/C4.</a:t>
+              <a:t>Original schematic. Screen (CBC, quantitative Ig, HIV) → function (vaccine response, subsets, complement) → advanced/genetic.</a:t>
             </a:r>
             <a:endParaRPr lang="en-US" sz="1150" dirty="0"/>
           </a:p>
@@ -12954,199 +14532,6 @@
               <a:t>7</a:t>
             </a:r>
             <a:endParaRPr lang="en-US" sz="850" dirty="0"/>
-          </a:p>
-        </p:txBody>
-      </p:sp>
-    </p:spTree>
-  </p:cSld>
-  <p:clrMapOvr>
-    <a:masterClrMapping/>
-  </p:clrMapOvr>
-</p:sld>
-</file>
-
-<file path=ppt/slides/slide9.xml><?xml version="1.0" encoding="utf-8"?>
-<p:sld xmlns:a="http://schemas.openxmlformats.org/drawingml/2006/main" xmlns:r="http://schemas.openxmlformats.org/officeDocument/2006/relationships" xmlns:p="http://schemas.openxmlformats.org/presentationml/2006/main">
-  <p:cSld name="Slide 9">
-    <p:bg>
-      <p:bgPr>
-        <a:solidFill>
-          <a:srgbClr val="4A1269"/>
-        </a:solidFill>
-      </p:bgPr>
-    </p:bg>
-    <p:spTree>
-      <p:nvGrpSpPr>
-        <p:cNvPr id="1" name=""/>
-        <p:cNvGrpSpPr/>
-        <p:nvPr/>
-      </p:nvGrpSpPr>
-      <p:grpSpPr>
-        <a:xfrm>
-          <a:off x="0" y="0"/>
-          <a:ext cx="0" cy="0"/>
-          <a:chOff x="0" y="0"/>
-          <a:chExt cx="0" cy="0"/>
-        </a:xfrm>
-      </p:grpSpPr>
-      <p:sp>
-        <p:nvSpPr>
-          <p:cNvPr id="2" name="Shape 0"/>
-          <p:cNvSpPr/>
-          <p:nvPr/>
-        </p:nvSpPr>
-        <p:spPr>
-          <a:xfrm>
-            <a:off x="9509760" y="-1280160"/>
-            <a:ext cx="4754880" cy="4754880"/>
-          </a:xfrm>
-          <a:prstGeom prst="ellipse">
-            <a:avLst/>
-          </a:prstGeom>
-          <a:solidFill>
-            <a:srgbClr val="FFFFFF">
-              <a:alpha val="8000"/>
-            </a:srgbClr>
-          </a:solidFill>
-          <a:ln/>
-        </p:spPr>
-      </p:sp>
-      <p:sp>
-        <p:nvSpPr>
-          <p:cNvPr id="3" name="Shape 1"/>
-          <p:cNvSpPr/>
-          <p:nvPr/>
-        </p:nvSpPr>
-        <p:spPr>
-          <a:xfrm>
-            <a:off x="10607040" y="3931920"/>
-            <a:ext cx="3108960" cy="3108960"/>
-          </a:xfrm>
-          <a:prstGeom prst="ellipse">
-            <a:avLst/>
-          </a:prstGeom>
-          <a:solidFill>
-            <a:srgbClr val="FFFFFF">
-              <a:alpha val="6000"/>
-            </a:srgbClr>
-          </a:solidFill>
-          <a:ln/>
-        </p:spPr>
-      </p:sp>
-      <p:sp>
-        <p:nvSpPr>
-          <p:cNvPr id="4" name="Text 2"/>
-          <p:cNvSpPr/>
-          <p:nvPr/>
-        </p:nvSpPr>
-        <p:spPr>
-          <a:xfrm>
-            <a:off x="566928" y="1783080"/>
-            <a:ext cx="2743200" cy="1463040"/>
-          </a:xfrm>
-          <a:prstGeom prst="rect">
-            <a:avLst/>
-          </a:prstGeom>
-          <a:noFill/>
-          <a:ln/>
-        </p:spPr>
-        <p:txBody>
-          <a:bodyPr wrap="square" lIns="0" tIns="0" rIns="0" bIns="0" rtlCol="0" anchor="ctr"/>
-          <a:lstStyle/>
-          <a:p>
-            <a:pPr algn="l" indent="0" marL="0">
-              <a:buNone/>
-            </a:pPr>
-            <a:r>
-              <a:rPr lang="en-US" sz="6400" b="1" dirty="0">
-                <a:solidFill>
-                  <a:srgbClr val="F1E8F7"/>
-                </a:solidFill>
-                <a:latin typeface="Calibri" pitchFamily="34" charset="0"/>
-                <a:ea typeface="Calibri" pitchFamily="34" charset="-122"/>
-                <a:cs typeface="Calibri" pitchFamily="34" charset="-120"/>
-              </a:rPr>
-              <a:t>02</a:t>
-            </a:r>
-            <a:endParaRPr lang="en-US" sz="6400" dirty="0"/>
-          </a:p>
-        </p:txBody>
-      </p:sp>
-      <p:sp>
-        <p:nvSpPr>
-          <p:cNvPr id="5" name="Text 3"/>
-          <p:cNvSpPr/>
-          <p:nvPr/>
-        </p:nvSpPr>
-        <p:spPr>
-          <a:xfrm>
-            <a:off x="566928" y="3246120"/>
-            <a:ext cx="10058400" cy="365760"/>
-          </a:xfrm>
-          <a:prstGeom prst="rect">
-            <a:avLst/>
-          </a:prstGeom>
-          <a:noFill/>
-          <a:ln/>
-        </p:spPr>
-        <p:txBody>
-          <a:bodyPr wrap="square" lIns="0" tIns="0" rIns="0" bIns="0" rtlCol="0" anchor="ctr"/>
-          <a:lstStyle/>
-          <a:p>
-            <a:pPr algn="l" indent="0" marL="0">
-              <a:buNone/>
-            </a:pPr>
-            <a:r>
-              <a:rPr lang="en-US" sz="1300" b="1" spc="250" kern="0" dirty="0">
-                <a:solidFill>
-                  <a:srgbClr val="F2C9D9"/>
-                </a:solidFill>
-                <a:latin typeface="Calibri" pitchFamily="34" charset="0"/>
-                <a:ea typeface="Calibri" pitchFamily="34" charset="-122"/>
-                <a:cs typeface="Calibri" pitchFamily="34" charset="-120"/>
-              </a:rPr>
-              <a:t>PART TWO</a:t>
-            </a:r>
-            <a:endParaRPr lang="en-US" sz="1300" dirty="0"/>
-          </a:p>
-        </p:txBody>
-      </p:sp>
-      <p:sp>
-        <p:nvSpPr>
-          <p:cNvPr id="6" name="Text 4"/>
-          <p:cNvSpPr/>
-          <p:nvPr/>
-        </p:nvSpPr>
-        <p:spPr>
-          <a:xfrm>
-            <a:off x="566928" y="3611880"/>
-            <a:ext cx="10607040" cy="1463040"/>
-          </a:xfrm>
-          <a:prstGeom prst="rect">
-            <a:avLst/>
-          </a:prstGeom>
-          <a:noFill/>
-          <a:ln/>
-        </p:spPr>
-        <p:txBody>
-          <a:bodyPr wrap="square" lIns="0" tIns="0" rIns="0" bIns="0" rtlCol="0" anchor="t"/>
-          <a:lstStyle/>
-          <a:p>
-            <a:pPr algn="l" indent="0" marL="0">
-              <a:buNone/>
-            </a:pPr>
-            <a:r>
-              <a:rPr lang="en-US" sz="3800" b="1" dirty="0">
-                <a:solidFill>
-                  <a:srgbClr val="FFFFFF"/>
-                </a:solidFill>
-                <a:latin typeface="Calibri" pitchFamily="34" charset="0"/>
-                <a:ea typeface="Calibri" pitchFamily="34" charset="-122"/>
-                <a:cs typeface="Calibri" pitchFamily="34" charset="-120"/>
-              </a:rPr>
-              <a:t>Complement &amp; Immunodeficiency Workup</a:t>
-            </a:r>
-            <a:endParaRPr lang="en-US" sz="3800" dirty="0"/>
           </a:p>
         </p:txBody>
       </p:sp>

--- a/decks/Immuno_04_Allergy-Immunodeficiency-Protein-Testing.pptx
+++ b/decks/Immuno_04_Allergy-Immunodeficiency-Protein-Testing.pptx
@@ -24,9 +24,13 @@
     <p:sldId id="272" r:id="rId18"/>
     <p:sldId id="273" r:id="rId19"/>
     <p:sldId id="274" r:id="rId20"/>
+    <p:sldId id="283" r:id="rId34"/>
     <p:sldId id="275" r:id="rId21"/>
+    <p:sldId id="282" r:id="rId33"/>
     <p:sldId id="276" r:id="rId22"/>
+    <p:sldId id="281" r:id="rId32"/>
     <p:sldId id="277" r:id="rId23"/>
+    <p:sldId id="280" r:id="rId31"/>
     <p:sldId id="278" r:id="rId24"/>
     <p:sldId id="279" r:id="rId25"/>
   </p:sldIdLst>
@@ -2943,6 +2947,10 @@
           </a:solidFill>
           <a:ln/>
         </p:spPr>
+        <p:txBody>
+          <a:bodyPr/>
+          <a:p/>
+        </p:txBody>
       </p:sp>
       <p:sp>
         <p:nvSpPr>
@@ -2965,6 +2973,10 @@
           </a:solidFill>
           <a:ln/>
         </p:spPr>
+        <p:txBody>
+          <a:bodyPr/>
+          <a:p/>
+        </p:txBody>
       </p:sp>
       <p:sp>
         <p:nvSpPr>
@@ -2987,6 +2999,10 @@
           </a:solidFill>
           <a:ln/>
         </p:spPr>
+        <p:txBody>
+          <a:bodyPr/>
+          <a:p/>
+        </p:txBody>
       </p:sp>
       <p:sp>
         <p:nvSpPr>
@@ -3009,6 +3025,10 @@
           </a:solidFill>
           <a:ln/>
         </p:spPr>
+        <p:txBody>
+          <a:bodyPr/>
+          <a:p/>
+        </p:txBody>
       </p:sp>
       <p:sp>
         <p:nvSpPr>
@@ -3425,6 +3445,10 @@
             </a:outerShdw>
           </a:effectLst>
         </p:spPr>
+        <p:txBody>
+          <a:bodyPr/>
+          <a:p/>
+        </p:txBody>
       </p:sp>
       <p:sp>
         <p:nvSpPr>
@@ -3599,6 +3623,10 @@
             </a:outerShdw>
           </a:effectLst>
         </p:spPr>
+        <p:txBody>
+          <a:bodyPr/>
+          <a:p/>
+        </p:txBody>
       </p:sp>
       <p:sp>
         <p:nvSpPr>
@@ -3989,6 +4017,10 @@
             </a:outerShdw>
           </a:effectLst>
         </p:spPr>
+        <p:txBody>
+          <a:bodyPr/>
+          <a:p/>
+        </p:txBody>
       </p:sp>
       <p:sp>
         <p:nvSpPr>
@@ -4163,6 +4195,10 @@
             </a:outerShdw>
           </a:effectLst>
         </p:spPr>
+        <p:txBody>
+          <a:bodyPr/>
+          <a:p/>
+        </p:txBody>
       </p:sp>
       <p:sp>
         <p:nvSpPr>
@@ -4468,6 +4504,10 @@
           </a:solidFill>
           <a:ln/>
         </p:spPr>
+        <p:txBody>
+          <a:bodyPr/>
+          <a:p/>
+        </p:txBody>
       </p:sp>
       <p:sp>
         <p:nvSpPr>
@@ -4490,6 +4530,10 @@
           </a:solidFill>
           <a:ln/>
         </p:spPr>
+        <p:txBody>
+          <a:bodyPr/>
+          <a:p/>
+        </p:txBody>
       </p:sp>
       <p:sp>
         <p:nvSpPr>
@@ -4746,6 +4790,10 @@
             </a:outerShdw>
           </a:effectLst>
         </p:spPr>
+        <p:txBody>
+          <a:bodyPr/>
+          <a:p/>
+        </p:txBody>
       </p:sp>
       <p:sp>
         <p:nvSpPr>
@@ -4856,6 +4904,10 @@
             </a:outerShdw>
           </a:effectLst>
         </p:spPr>
+        <p:txBody>
+          <a:bodyPr/>
+          <a:p/>
+        </p:txBody>
       </p:sp>
       <p:sp>
         <p:nvSpPr>
@@ -5285,6 +5337,10 @@
             </a:outerShdw>
           </a:effectLst>
         </p:spPr>
+        <p:txBody>
+          <a:bodyPr/>
+          <a:p/>
+        </p:txBody>
       </p:sp>
       <p:sp>
         <p:nvSpPr>
@@ -5611,6 +5667,10 @@
             </a:outerShdw>
           </a:effectLst>
         </p:spPr>
+        <p:txBody>
+          <a:bodyPr/>
+          <a:p/>
+        </p:txBody>
       </p:sp>
       <p:sp>
         <p:nvSpPr>
@@ -5721,6 +5781,10 @@
             </a:outerShdw>
           </a:effectLst>
         </p:spPr>
+        <p:txBody>
+          <a:bodyPr/>
+          <a:p/>
+        </p:txBody>
       </p:sp>
       <p:sp>
         <p:nvSpPr>
@@ -6150,6 +6214,10 @@
             </a:outerShdw>
           </a:effectLst>
         </p:spPr>
+        <p:txBody>
+          <a:bodyPr/>
+          <a:p/>
+        </p:txBody>
       </p:sp>
       <p:sp>
         <p:nvSpPr>
@@ -6476,6 +6544,10 @@
             </a:outerShdw>
           </a:effectLst>
         </p:spPr>
+        <p:txBody>
+          <a:bodyPr/>
+          <a:p/>
+        </p:txBody>
       </p:sp>
       <p:sp>
         <p:nvSpPr>
@@ -6586,6 +6658,10 @@
             </a:outerShdw>
           </a:effectLst>
         </p:spPr>
+        <p:txBody>
+          <a:bodyPr/>
+          <a:p/>
+        </p:txBody>
       </p:sp>
       <p:sp>
         <p:nvSpPr>
@@ -7015,6 +7091,10 @@
             </a:outerShdw>
           </a:effectLst>
         </p:spPr>
+        <p:txBody>
+          <a:bodyPr/>
+          <a:p/>
+        </p:txBody>
       </p:sp>
       <p:sp>
         <p:nvSpPr>
@@ -7403,9 +7483,9 @@
               <a:buNone/>
             </a:pPr>
             <a:r>
-              <a:rPr lang="en-US" sz="1350" b="1" dirty="0">
-                <a:solidFill>
-                  <a:srgbClr val="4A1269"/>
+              <a:rPr lang="en-US" sz="1350" b="0" dirty="0">
+                <a:solidFill>
+                  <a:srgbClr val="33444F"/>
                 </a:solidFill>
                 <a:latin typeface="Calibri" pitchFamily="34" charset="0"/>
                 <a:ea typeface="Calibri" pitchFamily="34" charset="-122"/>
@@ -7474,130 +7554,6 @@
               <a:t>E. Past infection</a:t>
             </a:r>
             <a:endParaRPr lang="en-US" sz="1350" dirty="0"/>
-          </a:p>
-        </p:txBody>
-      </p:sp>
-      <p:sp>
-        <p:nvSpPr>
-          <p:cNvPr id="6" name="Shape 4"/>
-          <p:cNvSpPr/>
-          <p:nvPr/>
-        </p:nvSpPr>
-        <p:spPr>
-          <a:xfrm>
-            <a:off x="7201632" y="2395728"/>
-            <a:ext cx="4423136" cy="3246120"/>
-          </a:xfrm>
-          <a:prstGeom prst="roundRect">
-            <a:avLst>
-              <a:gd name="adj" fmla="val 2535"/>
-            </a:avLst>
-          </a:prstGeom>
-          <a:solidFill>
-            <a:srgbClr val="F1E8F7"/>
-          </a:solidFill>
-          <a:ln/>
-          <a:effectLst>
-            <a:outerShdw sx="100000" sy="100000" kx="0" ky="0" algn="bl" rotWithShape="0" blurRad="88900" dist="25400" dir="5400000">
-              <a:srgbClr val="22303C">
-                <a:alpha val="12000"/>
-              </a:srgbClr>
-            </a:outerShdw>
-          </a:effectLst>
-        </p:spPr>
-      </p:sp>
-      <p:sp>
-        <p:nvSpPr>
-          <p:cNvPr id="7" name="Text 5"/>
-          <p:cNvSpPr/>
-          <p:nvPr/>
-        </p:nvSpPr>
-        <p:spPr>
-          <a:xfrm>
-            <a:off x="7439376" y="2578608"/>
-            <a:ext cx="3965936" cy="457200"/>
-          </a:xfrm>
-          <a:prstGeom prst="rect">
-            <a:avLst/>
-          </a:prstGeom>
-          <a:noFill/>
-          <a:ln/>
-        </p:spPr>
-        <p:txBody>
-          <a:bodyPr wrap="square" lIns="0" tIns="0" rIns="0" bIns="0" rtlCol="0" anchor="ctr"/>
-          <a:lstStyle/>
-          <a:p>
-            <a:pPr indent="0" marL="0">
-              <a:buNone/>
-            </a:pPr>
-            <a:r>
-              <a:rPr lang="en-US" sz="1500" b="1" dirty="0">
-                <a:solidFill>
-                  <a:srgbClr val="6A1B9A"/>
-                </a:solidFill>
-                <a:latin typeface="Calibri" pitchFamily="34" charset="0"/>
-                <a:ea typeface="Calibri" pitchFamily="34" charset="-122"/>
-                <a:cs typeface="Calibri" pitchFamily="34" charset="-120"/>
-              </a:rPr>
-              <a:t>ANSWER  </a:t>
-            </a:r>
-            <a:pPr indent="0" marL="0">
-              <a:buNone/>
-            </a:pPr>
-            <a:r>
-              <a:rPr lang="en-US" sz="1500" b="1" dirty="0">
-                <a:solidFill>
-                  <a:srgbClr val="1B2A38"/>
-                </a:solidFill>
-                <a:latin typeface="Calibri" pitchFamily="34" charset="0"/>
-                <a:ea typeface="Calibri" pitchFamily="34" charset="-122"/>
-                <a:cs typeface="Calibri" pitchFamily="34" charset="-120"/>
-              </a:rPr>
-              <a:t>B — Sensitization, needs history</a:t>
-            </a:r>
-            <a:endParaRPr lang="en-US" sz="1500" dirty="0"/>
-          </a:p>
-        </p:txBody>
-      </p:sp>
-      <p:sp>
-        <p:nvSpPr>
-          <p:cNvPr id="8" name="Text 6"/>
-          <p:cNvSpPr/>
-          <p:nvPr/>
-        </p:nvSpPr>
-        <p:spPr>
-          <a:xfrm>
-            <a:off x="7439376" y="3127248"/>
-            <a:ext cx="3947648" cy="2377440"/>
-          </a:xfrm>
-          <a:prstGeom prst="rect">
-            <a:avLst/>
-          </a:prstGeom>
-          <a:noFill/>
-          <a:ln/>
-        </p:spPr>
-        <p:txBody>
-          <a:bodyPr wrap="square" lIns="0" tIns="0" rIns="0" bIns="0" rtlCol="0" anchor="t"/>
-          <a:lstStyle/>
-          <a:p>
-            <a:pPr algn="l" indent="0" marL="0">
-              <a:lnSpc>
-                <a:spcPct val="108000"/>
-              </a:lnSpc>
-              <a:buNone/>
-            </a:pPr>
-            <a:r>
-              <a:rPr lang="en-US" sz="1250" dirty="0">
-                <a:solidFill>
-                  <a:srgbClr val="33444F"/>
-                </a:solidFill>
-                <a:latin typeface="Calibri" pitchFamily="34" charset="0"/>
-                <a:ea typeface="Calibri" pitchFamily="34" charset="-122"/>
-                <a:cs typeface="Calibri" pitchFamily="34" charset="-120"/>
-              </a:rPr>
-              <a:t>Specific IgE shows sensitization; clinical allergy requires a corresponding reaction history.</a:t>
-            </a:r>
-            <a:endParaRPr lang="en-US" sz="1250" dirty="0"/>
           </a:p>
         </p:txBody>
       </p:sp>
@@ -7845,6 +7801,10 @@
             </a:outerShdw>
           </a:effectLst>
         </p:spPr>
+        <p:txBody>
+          <a:bodyPr/>
+          <a:p/>
+        </p:txBody>
       </p:sp>
       <p:sp>
         <p:nvSpPr>
@@ -7952,6 +7912,10 @@
             </a:outerShdw>
           </a:effectLst>
         </p:spPr>
+        <p:txBody>
+          <a:bodyPr/>
+          <a:p/>
+        </p:txBody>
       </p:sp>
       <p:sp>
         <p:nvSpPr>
@@ -8059,6 +8023,10 @@
             </a:outerShdw>
           </a:effectLst>
         </p:spPr>
+        <p:txBody>
+          <a:bodyPr/>
+          <a:p/>
+        </p:txBody>
       </p:sp>
       <p:sp>
         <p:nvSpPr>
@@ -8166,6 +8134,10 @@
             </a:outerShdw>
           </a:effectLst>
         </p:spPr>
+        <p:txBody>
+          <a:bodyPr/>
+          <a:p/>
+        </p:txBody>
       </p:sp>
       <p:sp>
         <p:nvSpPr>
@@ -8558,9 +8530,9 @@
               <a:buNone/>
             </a:pPr>
             <a:r>
-              <a:rPr lang="en-US" sz="1350" b="1" dirty="0">
-                <a:solidFill>
-                  <a:srgbClr val="4A1269"/>
+              <a:rPr lang="en-US" sz="1350" b="0" dirty="0">
+                <a:solidFill>
+                  <a:srgbClr val="33444F"/>
                 </a:solidFill>
                 <a:latin typeface="Calibri" pitchFamily="34" charset="0"/>
                 <a:ea typeface="Calibri" pitchFamily="34" charset="-122"/>
@@ -8629,130 +8601,6 @@
               <a:t>E. SPEP</a:t>
             </a:r>
             <a:endParaRPr lang="en-US" sz="1350" dirty="0"/>
-          </a:p>
-        </p:txBody>
-      </p:sp>
-      <p:sp>
-        <p:nvSpPr>
-          <p:cNvPr id="6" name="Shape 4"/>
-          <p:cNvSpPr/>
-          <p:nvPr/>
-        </p:nvSpPr>
-        <p:spPr>
-          <a:xfrm>
-            <a:off x="7201632" y="2395728"/>
-            <a:ext cx="4423136" cy="3246120"/>
-          </a:xfrm>
-          <a:prstGeom prst="roundRect">
-            <a:avLst>
-              <a:gd name="adj" fmla="val 2535"/>
-            </a:avLst>
-          </a:prstGeom>
-          <a:solidFill>
-            <a:srgbClr val="F1E8F7"/>
-          </a:solidFill>
-          <a:ln/>
-          <a:effectLst>
-            <a:outerShdw sx="100000" sy="100000" kx="0" ky="0" algn="bl" rotWithShape="0" blurRad="88900" dist="25400" dir="5400000">
-              <a:srgbClr val="22303C">
-                <a:alpha val="12000"/>
-              </a:srgbClr>
-            </a:outerShdw>
-          </a:effectLst>
-        </p:spPr>
-      </p:sp>
-      <p:sp>
-        <p:nvSpPr>
-          <p:cNvPr id="7" name="Text 5"/>
-          <p:cNvSpPr/>
-          <p:nvPr/>
-        </p:nvSpPr>
-        <p:spPr>
-          <a:xfrm>
-            <a:off x="7439376" y="2578608"/>
-            <a:ext cx="3965936" cy="457200"/>
-          </a:xfrm>
-          <a:prstGeom prst="rect">
-            <a:avLst/>
-          </a:prstGeom>
-          <a:noFill/>
-          <a:ln/>
-        </p:spPr>
-        <p:txBody>
-          <a:bodyPr wrap="square" lIns="0" tIns="0" rIns="0" bIns="0" rtlCol="0" anchor="ctr"/>
-          <a:lstStyle/>
-          <a:p>
-            <a:pPr indent="0" marL="0">
-              <a:buNone/>
-            </a:pPr>
-            <a:r>
-              <a:rPr lang="en-US" sz="1500" b="1" dirty="0">
-                <a:solidFill>
-                  <a:srgbClr val="6A1B9A"/>
-                </a:solidFill>
-                <a:latin typeface="Calibri" pitchFamily="34" charset="0"/>
-                <a:ea typeface="Calibri" pitchFamily="34" charset="-122"/>
-                <a:cs typeface="Calibri" pitchFamily="34" charset="-120"/>
-              </a:rPr>
-              <a:t>ANSWER  </a:t>
-            </a:r>
-            <a:pPr indent="0" marL="0">
-              <a:buNone/>
-            </a:pPr>
-            <a:r>
-              <a:rPr lang="en-US" sz="1500" b="1" dirty="0">
-                <a:solidFill>
-                  <a:srgbClr val="1B2A38"/>
-                </a:solidFill>
-                <a:latin typeface="Calibri" pitchFamily="34" charset="0"/>
-                <a:ea typeface="Calibri" pitchFamily="34" charset="-122"/>
-                <a:cs typeface="Calibri" pitchFamily="34" charset="-120"/>
-              </a:rPr>
-              <a:t>B — Vaccine response titers</a:t>
-            </a:r>
-            <a:endParaRPr lang="en-US" sz="1500" dirty="0"/>
-          </a:p>
-        </p:txBody>
-      </p:sp>
-      <p:sp>
-        <p:nvSpPr>
-          <p:cNvPr id="8" name="Text 6"/>
-          <p:cNvSpPr/>
-          <p:nvPr/>
-        </p:nvSpPr>
-        <p:spPr>
-          <a:xfrm>
-            <a:off x="7439376" y="3127248"/>
-            <a:ext cx="3947648" cy="2377440"/>
-          </a:xfrm>
-          <a:prstGeom prst="rect">
-            <a:avLst/>
-          </a:prstGeom>
-          <a:noFill/>
-          <a:ln/>
-        </p:spPr>
-        <p:txBody>
-          <a:bodyPr wrap="square" lIns="0" tIns="0" rIns="0" bIns="0" rtlCol="0" anchor="t"/>
-          <a:lstStyle/>
-          <a:p>
-            <a:pPr algn="l" indent="0" marL="0">
-              <a:lnSpc>
-                <a:spcPct val="108000"/>
-              </a:lnSpc>
-              <a:buNone/>
-            </a:pPr>
-            <a:r>
-              <a:rPr lang="en-US" sz="1250" dirty="0">
-                <a:solidFill>
-                  <a:srgbClr val="33444F"/>
-                </a:solidFill>
-                <a:latin typeface="Calibri" pitchFamily="34" charset="0"/>
-                <a:ea typeface="Calibri" pitchFamily="34" charset="-122"/>
-                <a:cs typeface="Calibri" pitchFamily="34" charset="-120"/>
-              </a:rPr>
-              <a:t>Pre/post-vaccine antibody titers assess the ability to mount a protective humoral response.</a:t>
-            </a:r>
-            <a:endParaRPr lang="en-US" sz="1250" dirty="0"/>
           </a:p>
         </p:txBody>
       </p:sp>
@@ -9062,9 +8910,9 @@
               <a:buNone/>
             </a:pPr>
             <a:r>
-              <a:rPr lang="en-US" sz="1350" b="1" dirty="0">
-                <a:solidFill>
-                  <a:srgbClr val="4A1269"/>
+              <a:rPr lang="en-US" sz="1350" b="0" dirty="0">
+                <a:solidFill>
+                  <a:srgbClr val="33444F"/>
                 </a:solidFill>
                 <a:latin typeface="Calibri" pitchFamily="34" charset="0"/>
                 <a:ea typeface="Calibri" pitchFamily="34" charset="-122"/>
@@ -9133,130 +8981,6 @@
               <a:t>E. Light-chain disease</a:t>
             </a:r>
             <a:endParaRPr lang="en-US" sz="1350" dirty="0"/>
-          </a:p>
-        </p:txBody>
-      </p:sp>
-      <p:sp>
-        <p:nvSpPr>
-          <p:cNvPr id="6" name="Shape 4"/>
-          <p:cNvSpPr/>
-          <p:nvPr/>
-        </p:nvSpPr>
-        <p:spPr>
-          <a:xfrm>
-            <a:off x="7201632" y="2395728"/>
-            <a:ext cx="4423136" cy="3246120"/>
-          </a:xfrm>
-          <a:prstGeom prst="roundRect">
-            <a:avLst>
-              <a:gd name="adj" fmla="val 2535"/>
-            </a:avLst>
-          </a:prstGeom>
-          <a:solidFill>
-            <a:srgbClr val="F1E8F7"/>
-          </a:solidFill>
-          <a:ln/>
-          <a:effectLst>
-            <a:outerShdw sx="100000" sy="100000" kx="0" ky="0" algn="bl" rotWithShape="0" blurRad="88900" dist="25400" dir="5400000">
-              <a:srgbClr val="22303C">
-                <a:alpha val="12000"/>
-              </a:srgbClr>
-            </a:outerShdw>
-          </a:effectLst>
-        </p:spPr>
-      </p:sp>
-      <p:sp>
-        <p:nvSpPr>
-          <p:cNvPr id="7" name="Text 5"/>
-          <p:cNvSpPr/>
-          <p:nvPr/>
-        </p:nvSpPr>
-        <p:spPr>
-          <a:xfrm>
-            <a:off x="7439376" y="2578608"/>
-            <a:ext cx="3965936" cy="457200"/>
-          </a:xfrm>
-          <a:prstGeom prst="rect">
-            <a:avLst/>
-          </a:prstGeom>
-          <a:noFill/>
-          <a:ln/>
-        </p:spPr>
-        <p:txBody>
-          <a:bodyPr wrap="square" lIns="0" tIns="0" rIns="0" bIns="0" rtlCol="0" anchor="ctr"/>
-          <a:lstStyle/>
-          <a:p>
-            <a:pPr indent="0" marL="0">
-              <a:buNone/>
-            </a:pPr>
-            <a:r>
-              <a:rPr lang="en-US" sz="1500" b="1" dirty="0">
-                <a:solidFill>
-                  <a:srgbClr val="6A1B9A"/>
-                </a:solidFill>
-                <a:latin typeface="Calibri" pitchFamily="34" charset="0"/>
-                <a:ea typeface="Calibri" pitchFamily="34" charset="-122"/>
-                <a:cs typeface="Calibri" pitchFamily="34" charset="-120"/>
-              </a:rPr>
-              <a:t>ANSWER  </a:t>
-            </a:r>
-            <a:pPr indent="0" marL="0">
-              <a:buNone/>
-            </a:pPr>
-            <a:r>
-              <a:rPr lang="en-US" sz="1500" b="1" dirty="0">
-                <a:solidFill>
-                  <a:srgbClr val="1B2A38"/>
-                </a:solidFill>
-                <a:latin typeface="Calibri" pitchFamily="34" charset="0"/>
-                <a:ea typeface="Calibri" pitchFamily="34" charset="-122"/>
-                <a:cs typeface="Calibri" pitchFamily="34" charset="-120"/>
-              </a:rPr>
-              <a:t>B — Polyclonal increase</a:t>
-            </a:r>
-            <a:endParaRPr lang="en-US" sz="1500" dirty="0"/>
-          </a:p>
-        </p:txBody>
-      </p:sp>
-      <p:sp>
-        <p:nvSpPr>
-          <p:cNvPr id="8" name="Text 6"/>
-          <p:cNvSpPr/>
-          <p:nvPr/>
-        </p:nvSpPr>
-        <p:spPr>
-          <a:xfrm>
-            <a:off x="7439376" y="3127248"/>
-            <a:ext cx="3947648" cy="2377440"/>
-          </a:xfrm>
-          <a:prstGeom prst="rect">
-            <a:avLst/>
-          </a:prstGeom>
-          <a:noFill/>
-          <a:ln/>
-        </p:spPr>
-        <p:txBody>
-          <a:bodyPr wrap="square" lIns="0" tIns="0" rIns="0" bIns="0" rtlCol="0" anchor="t"/>
-          <a:lstStyle/>
-          <a:p>
-            <a:pPr algn="l" indent="0" marL="0">
-              <a:lnSpc>
-                <a:spcPct val="108000"/>
-              </a:lnSpc>
-              <a:buNone/>
-            </a:pPr>
-            <a:r>
-              <a:rPr lang="en-US" sz="1250" dirty="0">
-                <a:solidFill>
-                  <a:srgbClr val="33444F"/>
-                </a:solidFill>
-                <a:latin typeface="Calibri" pitchFamily="34" charset="0"/>
-                <a:ea typeface="Calibri" pitchFamily="34" charset="-122"/>
-                <a:cs typeface="Calibri" pitchFamily="34" charset="-120"/>
-              </a:rPr>
-              <a:t>A broad gamma rise reflects polyclonal immunoglobulin from infection, inflammation, or liver disease; a discrete spike suggests monoclonality.</a:t>
-            </a:r>
-            <a:endParaRPr lang="en-US" sz="1250" dirty="0"/>
           </a:p>
         </p:txBody>
       </p:sp>
@@ -9586,9 +9310,9 @@
               <a:buNone/>
             </a:pPr>
             <a:r>
-              <a:rPr lang="en-US" sz="1350" b="1" dirty="0">
-                <a:solidFill>
-                  <a:srgbClr val="4A1269"/>
+              <a:rPr lang="en-US" sz="1350" b="0" dirty="0">
+                <a:solidFill>
+                  <a:srgbClr val="33444F"/>
                 </a:solidFill>
                 <a:latin typeface="Calibri" pitchFamily="34" charset="0"/>
                 <a:ea typeface="Calibri" pitchFamily="34" charset="-122"/>
@@ -9637,130 +9361,6 @@
               <a:t>E. Allergic conditions generally</a:t>
             </a:r>
             <a:endParaRPr lang="en-US" sz="1350" dirty="0"/>
-          </a:p>
-        </p:txBody>
-      </p:sp>
-      <p:sp>
-        <p:nvSpPr>
-          <p:cNvPr id="6" name="Shape 4"/>
-          <p:cNvSpPr/>
-          <p:nvPr/>
-        </p:nvSpPr>
-        <p:spPr>
-          <a:xfrm>
-            <a:off x="7201632" y="2395728"/>
-            <a:ext cx="4423136" cy="3246120"/>
-          </a:xfrm>
-          <a:prstGeom prst="roundRect">
-            <a:avLst>
-              <a:gd name="adj" fmla="val 2535"/>
-            </a:avLst>
-          </a:prstGeom>
-          <a:solidFill>
-            <a:srgbClr val="F1E8F7"/>
-          </a:solidFill>
-          <a:ln/>
-          <a:effectLst>
-            <a:outerShdw sx="100000" sy="100000" kx="0" ky="0" algn="bl" rotWithShape="0" blurRad="88900" dist="25400" dir="5400000">
-              <a:srgbClr val="22303C">
-                <a:alpha val="12000"/>
-              </a:srgbClr>
-            </a:outerShdw>
-          </a:effectLst>
-        </p:spPr>
-      </p:sp>
-      <p:sp>
-        <p:nvSpPr>
-          <p:cNvPr id="7" name="Text 5"/>
-          <p:cNvSpPr/>
-          <p:nvPr/>
-        </p:nvSpPr>
-        <p:spPr>
-          <a:xfrm>
-            <a:off x="7439376" y="2578608"/>
-            <a:ext cx="3965936" cy="457200"/>
-          </a:xfrm>
-          <a:prstGeom prst="rect">
-            <a:avLst/>
-          </a:prstGeom>
-          <a:noFill/>
-          <a:ln/>
-        </p:spPr>
-        <p:txBody>
-          <a:bodyPr wrap="square" lIns="0" tIns="0" rIns="0" bIns="0" rtlCol="0" anchor="ctr"/>
-          <a:lstStyle/>
-          <a:p>
-            <a:pPr indent="0" marL="0">
-              <a:buNone/>
-            </a:pPr>
-            <a:r>
-              <a:rPr lang="en-US" sz="1500" b="1" dirty="0">
-                <a:solidFill>
-                  <a:srgbClr val="6A1B9A"/>
-                </a:solidFill>
-                <a:latin typeface="Calibri" pitchFamily="34" charset="0"/>
-                <a:ea typeface="Calibri" pitchFamily="34" charset="-122"/>
-                <a:cs typeface="Calibri" pitchFamily="34" charset="-120"/>
-              </a:rPr>
-              <a:t>ANSWER  </a:t>
-            </a:r>
-            <a:pPr indent="0" marL="0">
-              <a:buNone/>
-            </a:pPr>
-            <a:r>
-              <a:rPr lang="en-US" sz="1500" b="1" dirty="0">
-                <a:solidFill>
-                  <a:srgbClr val="1B2A38"/>
-                </a:solidFill>
-                <a:latin typeface="Calibri" pitchFamily="34" charset="0"/>
-                <a:ea typeface="Calibri" pitchFamily="34" charset="-122"/>
-                <a:cs typeface="Calibri" pitchFamily="34" charset="-120"/>
-              </a:rPr>
-              <a:t>C — A single defined food allergy</a:t>
-            </a:r>
-            <a:endParaRPr lang="en-US" sz="1500" dirty="0"/>
-          </a:p>
-        </p:txBody>
-      </p:sp>
-      <p:sp>
-        <p:nvSpPr>
-          <p:cNvPr id="8" name="Text 6"/>
-          <p:cNvSpPr/>
-          <p:nvPr/>
-        </p:nvSpPr>
-        <p:spPr>
-          <a:xfrm>
-            <a:off x="7439376" y="3127248"/>
-            <a:ext cx="3947648" cy="2377440"/>
-          </a:xfrm>
-          <a:prstGeom prst="rect">
-            <a:avLst/>
-          </a:prstGeom>
-          <a:noFill/>
-          <a:ln/>
-        </p:spPr>
-        <p:txBody>
-          <a:bodyPr wrap="square" lIns="0" tIns="0" rIns="0" bIns="0" rtlCol="0" anchor="t"/>
-          <a:lstStyle/>
-          <a:p>
-            <a:pPr algn="l" indent="0" marL="0">
-              <a:lnSpc>
-                <a:spcPct val="108000"/>
-              </a:lnSpc>
-              <a:buNone/>
-            </a:pPr>
-            <a:r>
-              <a:rPr lang="en-US" sz="1250" dirty="0">
-                <a:solidFill>
-                  <a:srgbClr val="33444F"/>
-                </a:solidFill>
-                <a:latin typeface="Calibri" pitchFamily="34" charset="0"/>
-                <a:ea typeface="Calibri" pitchFamily="34" charset="-122"/>
-                <a:cs typeface="Calibri" pitchFamily="34" charset="-120"/>
-              </a:rPr>
-              <a:t>Total IgE is non-specific; identifying a specific allergy requires allergen-specific IgE and clinical correlation.</a:t>
-            </a:r>
-            <a:endParaRPr lang="en-US" sz="1250" dirty="0"/>
           </a:p>
         </p:txBody>
       </p:sp>
@@ -10001,6 +9601,10 @@
           </a:solidFill>
           <a:ln/>
         </p:spPr>
+        <p:txBody>
+          <a:bodyPr/>
+          <a:p/>
+        </p:txBody>
       </p:sp>
       <p:sp>
         <p:nvSpPr>
@@ -10028,6 +9632,10 @@
             </a:outerShdw>
           </a:effectLst>
         </p:spPr>
+        <p:txBody>
+          <a:bodyPr/>
+          <a:p/>
+        </p:txBody>
       </p:sp>
       <p:sp>
         <p:nvSpPr>
@@ -10128,6 +9736,10 @@
           </a:solidFill>
           <a:ln/>
         </p:spPr>
+        <p:txBody>
+          <a:bodyPr/>
+          <a:p/>
+        </p:txBody>
       </p:sp>
       <p:sp>
         <p:nvSpPr>
@@ -10155,6 +9767,10 @@
             </a:outerShdw>
           </a:effectLst>
         </p:spPr>
+        <p:txBody>
+          <a:bodyPr/>
+          <a:p/>
+        </p:txBody>
       </p:sp>
       <p:sp>
         <p:nvSpPr>
@@ -10255,6 +9871,10 @@
           </a:solidFill>
           <a:ln/>
         </p:spPr>
+        <p:txBody>
+          <a:bodyPr/>
+          <a:p/>
+        </p:txBody>
       </p:sp>
       <p:sp>
         <p:nvSpPr>
@@ -10282,6 +9902,10 @@
             </a:outerShdw>
           </a:effectLst>
         </p:spPr>
+        <p:txBody>
+          <a:bodyPr/>
+          <a:p/>
+        </p:txBody>
       </p:sp>
       <p:sp>
         <p:nvSpPr>
@@ -10382,6 +10006,10 @@
           </a:solidFill>
           <a:ln/>
         </p:spPr>
+        <p:txBody>
+          <a:bodyPr/>
+          <a:p/>
+        </p:txBody>
       </p:sp>
       <p:sp>
         <p:nvSpPr>
@@ -10409,6 +10037,10 @@
             </a:outerShdw>
           </a:effectLst>
         </p:spPr>
+        <p:txBody>
+          <a:bodyPr/>
+          <a:p/>
+        </p:txBody>
       </p:sp>
       <p:sp>
         <p:nvSpPr>
@@ -10509,6 +10141,10 @@
           </a:solidFill>
           <a:ln/>
         </p:spPr>
+        <p:txBody>
+          <a:bodyPr/>
+          <a:p/>
+        </p:txBody>
       </p:sp>
       <p:sp>
         <p:nvSpPr>
@@ -10536,6 +10172,10 @@
             </a:outerShdw>
           </a:effectLst>
         </p:spPr>
+        <p:txBody>
+          <a:bodyPr/>
+          <a:p/>
+        </p:txBody>
       </p:sp>
       <p:sp>
         <p:nvSpPr>
@@ -11019,6 +10659,1982 @@
 </p:sld>
 </file>
 
+<file path=ppt/slides/slide25.xml><?xml version="1.0" encoding="utf-8"?>
+<p:sld xmlns:a="http://schemas.openxmlformats.org/drawingml/2006/main" xmlns:p="http://schemas.openxmlformats.org/presentationml/2006/main" xmlns:r="http://schemas.openxmlformats.org/officeDocument/2006/relationships">
+  <p:cSld>
+    <p:spTree>
+      <p:nvGrpSpPr>
+        <p:cNvPr id="1" name=""/>
+        <p:cNvGrpSpPr/>
+        <p:nvPr/>
+      </p:nvGrpSpPr>
+      <p:grpSpPr/>
+      <p:sp>
+        <p:nvSpPr>
+          <p:cNvPr id="2" name="Text 0"/>
+          <p:cNvSpPr/>
+          <p:nvPr/>
+        </p:nvSpPr>
+        <p:spPr>
+          <a:xfrm>
+            <a:off x="566928" y="329184"/>
+            <a:ext cx="10515600" cy="310896"/>
+          </a:xfrm>
+          <a:prstGeom prst="rect">
+            <a:avLst/>
+          </a:prstGeom>
+          <a:noFill/>
+          <a:ln/>
+        </p:spPr>
+        <p:txBody>
+          <a:bodyPr wrap="square" lIns="0" tIns="0" rIns="0" bIns="0" rtlCol="0" anchor="ctr"/>
+          <a:lstStyle/>
+          <a:p>
+            <a:pPr algn="l" indent="0" marL="0">
+              <a:buNone/>
+            </a:pPr>
+            <a:r>
+              <a:rPr lang="en-US" sz="1100" b="1" spc="150" kern="0" dirty="0">
+                <a:solidFill>
+                  <a:srgbClr val="6A1B9A"/>
+                </a:solidFill>
+                <a:latin typeface="Calibri" pitchFamily="34" charset="0"/>
+                <a:ea typeface="Calibri" pitchFamily="34" charset="-122"/>
+                <a:cs typeface="Calibri" pitchFamily="34" charset="-120"/>
+              </a:rPr>
+              <a:t>IMMUNOLOGY &amp; SEROLOGY   ·   BOARD REVIEW  ·  Q4</a:t>
+            </a:r>
+            <a:endParaRPr lang="en-US" sz="1100" dirty="0"/>
+          </a:p>
+        </p:txBody>
+      </p:sp>
+      <p:sp>
+        <p:nvSpPr>
+          <p:cNvPr id="3" name="Text 1"/>
+          <p:cNvSpPr/>
+          <p:nvPr/>
+        </p:nvSpPr>
+        <p:spPr>
+          <a:xfrm>
+            <a:off x="566928" y="713232"/>
+            <a:ext cx="11064240" cy="749808"/>
+          </a:xfrm>
+          <a:prstGeom prst="rect">
+            <a:avLst/>
+          </a:prstGeom>
+          <a:noFill/>
+          <a:ln/>
+        </p:spPr>
+        <p:txBody>
+          <a:bodyPr wrap="square" lIns="0" tIns="0" rIns="0" bIns="0" rtlCol="0" anchor="ctr"/>
+          <a:lstStyle/>
+          <a:p>
+            <a:pPr algn="l" indent="0" marL="0">
+              <a:buNone/>
+            </a:pPr>
+            <a:r>
+              <a:rPr lang="en-US" sz="2600" b="1" dirty="0">
+                <a:solidFill>
+                  <a:srgbClr val="0E3A5F"/>
+                </a:solidFill>
+                <a:latin typeface="Calibri" pitchFamily="34" charset="0"/>
+                <a:ea typeface="Calibri" pitchFamily="34" charset="-122"/>
+                <a:cs typeface="Calibri" pitchFamily="34" charset="-120"/>
+              </a:rPr>
+              <a:t>Board-Style Review</a:t>
+            </a:r>
+            <a:endParaRPr lang="en-US" sz="2600" dirty="0"/>
+          </a:p>
+        </p:txBody>
+      </p:sp>
+      <p:sp>
+        <p:nvSpPr>
+          <p:cNvPr id="4" name="Text 2"/>
+          <p:cNvSpPr/>
+          <p:nvPr/>
+        </p:nvSpPr>
+        <p:spPr>
+          <a:xfrm>
+            <a:off x="566928" y="1417320"/>
+            <a:ext cx="11057839" cy="914400"/>
+          </a:xfrm>
+          <a:prstGeom prst="rect">
+            <a:avLst/>
+          </a:prstGeom>
+          <a:noFill/>
+          <a:ln/>
+        </p:spPr>
+        <p:txBody>
+          <a:bodyPr wrap="square" lIns="0" tIns="0" rIns="0" bIns="0" rtlCol="0" anchor="t"/>
+          <a:lstStyle/>
+          <a:p>
+            <a:pPr algn="l" indent="0" marL="0">
+              <a:lnSpc>
+                <a:spcPct val="105000"/>
+              </a:lnSpc>
+              <a:buNone/>
+            </a:pPr>
+            <a:r>
+              <a:rPr lang="en-US" sz="1450" b="1" dirty="0">
+                <a:solidFill>
+                  <a:srgbClr val="1B2A38"/>
+                </a:solidFill>
+                <a:latin typeface="Calibri" pitchFamily="34" charset="0"/>
+                <a:ea typeface="Calibri" pitchFamily="34" charset="-122"/>
+                <a:cs typeface="Calibri" pitchFamily="34" charset="-120"/>
+              </a:rPr>
+              <a:t>An elevated total IgE is LEAST specific for which of the following?</a:t>
+            </a:r>
+            <a:endParaRPr lang="en-US" sz="1450" dirty="0"/>
+          </a:p>
+        </p:txBody>
+      </p:sp>
+      <p:sp>
+        <p:nvSpPr>
+          <p:cNvPr id="5" name="Text 3"/>
+          <p:cNvSpPr/>
+          <p:nvPr/>
+        </p:nvSpPr>
+        <p:spPr>
+          <a:xfrm>
+            <a:off x="658368" y="2395728"/>
+            <a:ext cx="6192390" cy="3017520"/>
+          </a:xfrm>
+          <a:prstGeom prst="rect">
+            <a:avLst/>
+          </a:prstGeom>
+          <a:noFill/>
+          <a:ln/>
+        </p:spPr>
+        <p:txBody>
+          <a:bodyPr wrap="square" lIns="0" tIns="0" rIns="0" bIns="0" rtlCol="0" anchor="t"/>
+          <a:lstStyle/>
+          <a:p>
+            <a:pPr algn="l" indent="0" marL="0">
+              <a:spcAft>
+                <a:spcPts val="600"/>
+              </a:spcAft>
+              <a:buNone/>
+            </a:pPr>
+            <a:r>
+              <a:rPr lang="en-US" sz="1350" dirty="0">
+                <a:solidFill>
+                  <a:srgbClr val="33444F"/>
+                </a:solidFill>
+                <a:latin typeface="Calibri" pitchFamily="34" charset="0"/>
+                <a:ea typeface="Calibri" pitchFamily="34" charset="-122"/>
+                <a:cs typeface="Calibri" pitchFamily="34" charset="-120"/>
+              </a:rPr>
+              <a:t>A. Atopy</a:t>
+            </a:r>
+            <a:endParaRPr lang="en-US" sz="1350" dirty="0"/>
+          </a:p>
+          <a:p>
+            <a:pPr algn="l" indent="0" marL="0">
+              <a:spcAft>
+                <a:spcPts val="600"/>
+              </a:spcAft>
+              <a:buNone/>
+            </a:pPr>
+            <a:r>
+              <a:rPr lang="en-US" sz="1350" dirty="0">
+                <a:solidFill>
+                  <a:srgbClr val="33444F"/>
+                </a:solidFill>
+                <a:latin typeface="Calibri" pitchFamily="34" charset="0"/>
+                <a:ea typeface="Calibri" pitchFamily="34" charset="-122"/>
+                <a:cs typeface="Calibri" pitchFamily="34" charset="-120"/>
+              </a:rPr>
+              <a:t>B. Parasitic infection</a:t>
+            </a:r>
+            <a:endParaRPr lang="en-US" sz="1350" dirty="0"/>
+          </a:p>
+          <a:p>
+            <a:pPr algn="l" indent="0" marL="0">
+              <a:spcAft>
+                <a:spcPts val="600"/>
+              </a:spcAft>
+              <a:buNone/>
+            </a:pPr>
+            <a:r>
+              <a:rPr lang="en-US" sz="1350" b="1" dirty="0">
+                <a:solidFill>
+                  <a:srgbClr val="4A1269"/>
+                </a:solidFill>
+                <a:latin typeface="Calibri" pitchFamily="34" charset="0"/>
+                <a:ea typeface="Calibri" pitchFamily="34" charset="-122"/>
+                <a:cs typeface="Calibri" pitchFamily="34" charset="-120"/>
+              </a:rPr>
+              <a:t>C. A single defined food allergy</a:t>
+            </a:r>
+            <a:endParaRPr lang="en-US" sz="1350" dirty="0"/>
+          </a:p>
+          <a:p>
+            <a:pPr algn="l" indent="0" marL="0">
+              <a:spcAft>
+                <a:spcPts val="600"/>
+              </a:spcAft>
+              <a:buNone/>
+            </a:pPr>
+            <a:r>
+              <a:rPr lang="en-US" sz="1350" dirty="0">
+                <a:solidFill>
+                  <a:srgbClr val="33444F"/>
+                </a:solidFill>
+                <a:latin typeface="Calibri" pitchFamily="34" charset="0"/>
+                <a:ea typeface="Calibri" pitchFamily="34" charset="-122"/>
+                <a:cs typeface="Calibri" pitchFamily="34" charset="-120"/>
+              </a:rPr>
+              <a:t>D. Some immunodeficiencies (hyper-IgE)</a:t>
+            </a:r>
+            <a:endParaRPr lang="en-US" sz="1350" dirty="0"/>
+          </a:p>
+          <a:p>
+            <a:pPr algn="l" indent="0" marL="0">
+              <a:spcAft>
+                <a:spcPts val="600"/>
+              </a:spcAft>
+              <a:buNone/>
+            </a:pPr>
+            <a:r>
+              <a:rPr lang="en-US" sz="1350" dirty="0">
+                <a:solidFill>
+                  <a:srgbClr val="33444F"/>
+                </a:solidFill>
+                <a:latin typeface="Calibri" pitchFamily="34" charset="0"/>
+                <a:ea typeface="Calibri" pitchFamily="34" charset="-122"/>
+                <a:cs typeface="Calibri" pitchFamily="34" charset="-120"/>
+              </a:rPr>
+              <a:t>E. Allergic conditions generally</a:t>
+            </a:r>
+            <a:endParaRPr lang="en-US" sz="1350" dirty="0"/>
+          </a:p>
+        </p:txBody>
+      </p:sp>
+      <p:sp>
+        <p:nvSpPr>
+          <p:cNvPr id="6" name="Shape 4"/>
+          <p:cNvSpPr/>
+          <p:nvPr/>
+        </p:nvSpPr>
+        <p:spPr>
+          <a:xfrm>
+            <a:off x="7201632" y="2395728"/>
+            <a:ext cx="4423136" cy="3246120"/>
+          </a:xfrm>
+          <a:prstGeom prst="roundRect">
+            <a:avLst>
+              <a:gd name="adj" fmla="val 2535"/>
+            </a:avLst>
+          </a:prstGeom>
+          <a:solidFill>
+            <a:srgbClr val="F1E8F7"/>
+          </a:solidFill>
+          <a:ln/>
+          <a:effectLst>
+            <a:outerShdw sx="100000" sy="100000" kx="0" ky="0" algn="bl" rotWithShape="0" blurRad="88900" dist="25400" dir="5400000">
+              <a:srgbClr val="22303C">
+                <a:alpha val="12000"/>
+              </a:srgbClr>
+            </a:outerShdw>
+          </a:effectLst>
+        </p:spPr>
+        <p:txBody>
+          <a:bodyPr/>
+          <a:p/>
+        </p:txBody>
+      </p:sp>
+      <p:sp>
+        <p:nvSpPr>
+          <p:cNvPr id="7" name="Text 5"/>
+          <p:cNvSpPr/>
+          <p:nvPr/>
+        </p:nvSpPr>
+        <p:spPr>
+          <a:xfrm>
+            <a:off x="7439376" y="2578608"/>
+            <a:ext cx="3965936" cy="457200"/>
+          </a:xfrm>
+          <a:prstGeom prst="rect">
+            <a:avLst/>
+          </a:prstGeom>
+          <a:noFill/>
+          <a:ln/>
+        </p:spPr>
+        <p:txBody>
+          <a:bodyPr wrap="square" lIns="0" tIns="0" rIns="0" bIns="0" rtlCol="0" anchor="ctr"/>
+          <a:lstStyle/>
+          <a:p>
+            <a:pPr indent="0" marL="0">
+              <a:buNone/>
+            </a:pPr>
+            <a:r>
+              <a:rPr lang="en-US" sz="1500" b="1" dirty="0">
+                <a:solidFill>
+                  <a:srgbClr val="6A1B9A"/>
+                </a:solidFill>
+                <a:latin typeface="Calibri" pitchFamily="34" charset="0"/>
+                <a:ea typeface="Calibri" pitchFamily="34" charset="-122"/>
+                <a:cs typeface="Calibri" pitchFamily="34" charset="-120"/>
+              </a:rPr>
+              <a:t>ANSWER  </a:t>
+            </a:r>
+            <a:pPr indent="0" marL="0">
+              <a:buNone/>
+            </a:pPr>
+            <a:r>
+              <a:rPr lang="en-US" sz="1500" b="1" dirty="0">
+                <a:solidFill>
+                  <a:srgbClr val="1B2A38"/>
+                </a:solidFill>
+                <a:latin typeface="Calibri" pitchFamily="34" charset="0"/>
+                <a:ea typeface="Calibri" pitchFamily="34" charset="-122"/>
+                <a:cs typeface="Calibri" pitchFamily="34" charset="-120"/>
+              </a:rPr>
+              <a:t>C — A single defined food allergy</a:t>
+            </a:r>
+            <a:endParaRPr lang="en-US" sz="1500" dirty="0"/>
+          </a:p>
+        </p:txBody>
+      </p:sp>
+      <p:sp>
+        <p:nvSpPr>
+          <p:cNvPr id="8" name="Text 6"/>
+          <p:cNvSpPr/>
+          <p:nvPr/>
+        </p:nvSpPr>
+        <p:spPr>
+          <a:xfrm>
+            <a:off x="7439376" y="3127248"/>
+            <a:ext cx="3947648" cy="2377440"/>
+          </a:xfrm>
+          <a:prstGeom prst="rect">
+            <a:avLst/>
+          </a:prstGeom>
+          <a:noFill/>
+          <a:ln/>
+        </p:spPr>
+        <p:txBody>
+          <a:bodyPr wrap="square" lIns="0" tIns="0" rIns="0" bIns="0" rtlCol="0" anchor="t"/>
+          <a:lstStyle/>
+          <a:p>
+            <a:pPr algn="l" indent="0" marL="0">
+              <a:lnSpc>
+                <a:spcPct val="108000"/>
+              </a:lnSpc>
+              <a:buNone/>
+            </a:pPr>
+            <a:r>
+              <a:rPr lang="en-US" sz="1250" dirty="0">
+                <a:solidFill>
+                  <a:srgbClr val="33444F"/>
+                </a:solidFill>
+                <a:latin typeface="Calibri" pitchFamily="34" charset="0"/>
+                <a:ea typeface="Calibri" pitchFamily="34" charset="-122"/>
+                <a:cs typeface="Calibri" pitchFamily="34" charset="-120"/>
+              </a:rPr>
+              <a:t>Total IgE is non-specific; identifying a specific allergy requires allergen-specific IgE and clinical correlation.</a:t>
+            </a:r>
+            <a:endParaRPr lang="en-US" sz="1250" dirty="0"/>
+          </a:p>
+        </p:txBody>
+      </p:sp>
+      <p:sp>
+        <p:nvSpPr>
+          <p:cNvPr id="9" name="Text 7"/>
+          <p:cNvSpPr/>
+          <p:nvPr/>
+        </p:nvSpPr>
+        <p:spPr>
+          <a:xfrm>
+            <a:off x="566928" y="6473952"/>
+            <a:ext cx="7772400" cy="274320"/>
+          </a:xfrm>
+          <a:prstGeom prst="rect">
+            <a:avLst/>
+          </a:prstGeom>
+          <a:noFill/>
+          <a:ln/>
+        </p:spPr>
+        <p:txBody>
+          <a:bodyPr wrap="square" lIns="0" tIns="0" rIns="0" bIns="0" rtlCol="0" anchor="ctr"/>
+          <a:lstStyle/>
+          <a:p>
+            <a:pPr algn="l" indent="0" marL="0">
+              <a:buNone/>
+            </a:pPr>
+            <a:r>
+              <a:rPr lang="en-US" sz="850" dirty="0">
+                <a:solidFill>
+                  <a:srgbClr val="9AA8B4"/>
+                </a:solidFill>
+                <a:latin typeface="Calibri" pitchFamily="34" charset="0"/>
+                <a:ea typeface="Calibri" pitchFamily="34" charset="-122"/>
+                <a:cs typeface="Calibri" pitchFamily="34" charset="-120"/>
+              </a:rPr>
+              <a:t>Makassed General Hospital  ·  Department of Laboratory Medicine</a:t>
+            </a:r>
+            <a:endParaRPr lang="en-US" sz="850" dirty="0"/>
+          </a:p>
+        </p:txBody>
+      </p:sp>
+      <p:sp>
+        <p:nvSpPr>
+          <p:cNvPr id="10" name="Text 8"/>
+          <p:cNvSpPr/>
+          <p:nvPr/>
+        </p:nvSpPr>
+        <p:spPr>
+          <a:xfrm>
+            <a:off x="9814255" y="6473952"/>
+            <a:ext cx="1828800" cy="274320"/>
+          </a:xfrm>
+          <a:prstGeom prst="rect">
+            <a:avLst/>
+          </a:prstGeom>
+          <a:noFill/>
+          <a:ln/>
+        </p:spPr>
+        <p:txBody>
+          <a:bodyPr wrap="square" lIns="0" tIns="0" rIns="0" bIns="0" rtlCol="0" anchor="ctr"/>
+          <a:lstStyle/>
+          <a:p>
+            <a:pPr algn="r" indent="0" marL="0">
+              <a:buNone/>
+            </a:pPr>
+            <a:r>
+              <a:rPr lang="en-US" sz="850" dirty="0">
+                <a:solidFill>
+                  <a:srgbClr val="9AA8B4"/>
+                </a:solidFill>
+                <a:latin typeface="Calibri" pitchFamily="34" charset="0"/>
+                <a:ea typeface="Calibri" pitchFamily="34" charset="-122"/>
+                <a:cs typeface="Calibri" pitchFamily="34" charset="-120"/>
+              </a:rPr>
+              <a:t>CP Lecture Series</a:t>
+            </a:r>
+            <a:pPr algn="r" indent="0" marL="0">
+              <a:buNone/>
+            </a:pPr>
+            <a:r>
+              <a:rPr lang="en-US" sz="850" dirty="0">
+                <a:solidFill>
+                  <a:srgbClr val="DCE4EC"/>
+                </a:solidFill>
+                <a:latin typeface="Calibri" pitchFamily="34" charset="0"/>
+                <a:ea typeface="Calibri" pitchFamily="34" charset="-122"/>
+                <a:cs typeface="Calibri" pitchFamily="34" charset="-120"/>
+              </a:rPr>
+              <a:t>   ·   </a:t>
+            </a:r>
+            <a:pPr algn="r" indent="0" marL="0">
+              <a:buNone/>
+            </a:pPr>
+            <a:r>
+              <a:rPr lang="en-US" sz="850" b="1" dirty="0">
+                <a:solidFill>
+                  <a:srgbClr val="6A1B9A"/>
+                </a:solidFill>
+                <a:latin typeface="Calibri" pitchFamily="34" charset="0"/>
+                <a:ea typeface="Calibri" pitchFamily="34" charset="-122"/>
+                <a:cs typeface="Calibri" pitchFamily="34" charset="-120"/>
+              </a:rPr>
+              <a:t>19</a:t>
+            </a:r>
+            <a:endParaRPr lang="en-US" sz="850" dirty="0"/>
+          </a:p>
+        </p:txBody>
+      </p:sp>
+    </p:spTree>
+  </p:cSld>
+  <p:clrMapOvr>
+    <a:masterClrMapping/>
+  </p:clrMapOvr>
+</p:sld>
+</file>
+
+<file path=ppt/slides/slide26.xml><?xml version="1.0" encoding="utf-8"?>
+<p:sld xmlns:a="http://schemas.openxmlformats.org/drawingml/2006/main" xmlns:p="http://schemas.openxmlformats.org/presentationml/2006/main" xmlns:r="http://schemas.openxmlformats.org/officeDocument/2006/relationships">
+  <p:cSld>
+    <p:spTree>
+      <p:nvGrpSpPr>
+        <p:cNvPr id="1" name=""/>
+        <p:cNvGrpSpPr/>
+        <p:nvPr/>
+      </p:nvGrpSpPr>
+      <p:grpSpPr/>
+      <p:sp>
+        <p:nvSpPr>
+          <p:cNvPr id="2" name="Text 0"/>
+          <p:cNvSpPr/>
+          <p:nvPr/>
+        </p:nvSpPr>
+        <p:spPr>
+          <a:xfrm>
+            <a:off x="566928" y="329184"/>
+            <a:ext cx="10515600" cy="310896"/>
+          </a:xfrm>
+          <a:prstGeom prst="rect">
+            <a:avLst/>
+          </a:prstGeom>
+          <a:noFill/>
+          <a:ln/>
+        </p:spPr>
+        <p:txBody>
+          <a:bodyPr wrap="square" lIns="0" tIns="0" rIns="0" bIns="0" rtlCol="0" anchor="ctr"/>
+          <a:lstStyle/>
+          <a:p>
+            <a:pPr algn="l" indent="0" marL="0">
+              <a:buNone/>
+            </a:pPr>
+            <a:r>
+              <a:rPr lang="en-US" sz="1100" b="1" spc="150" kern="0" dirty="0">
+                <a:solidFill>
+                  <a:srgbClr val="6A1B9A"/>
+                </a:solidFill>
+                <a:latin typeface="Calibri" pitchFamily="34" charset="0"/>
+                <a:ea typeface="Calibri" pitchFamily="34" charset="-122"/>
+                <a:cs typeface="Calibri" pitchFamily="34" charset="-120"/>
+              </a:rPr>
+              <a:t>IMMUNOLOGY &amp; SEROLOGY   ·   BOARD REVIEW  ·  Q3</a:t>
+            </a:r>
+            <a:endParaRPr lang="en-US" sz="1100" dirty="0"/>
+          </a:p>
+        </p:txBody>
+      </p:sp>
+      <p:sp>
+        <p:nvSpPr>
+          <p:cNvPr id="3" name="Text 1"/>
+          <p:cNvSpPr/>
+          <p:nvPr/>
+        </p:nvSpPr>
+        <p:spPr>
+          <a:xfrm>
+            <a:off x="566928" y="713232"/>
+            <a:ext cx="11064240" cy="749808"/>
+          </a:xfrm>
+          <a:prstGeom prst="rect">
+            <a:avLst/>
+          </a:prstGeom>
+          <a:noFill/>
+          <a:ln/>
+        </p:spPr>
+        <p:txBody>
+          <a:bodyPr wrap="square" lIns="0" tIns="0" rIns="0" bIns="0" rtlCol="0" anchor="ctr"/>
+          <a:lstStyle/>
+          <a:p>
+            <a:pPr algn="l" indent="0" marL="0">
+              <a:buNone/>
+            </a:pPr>
+            <a:r>
+              <a:rPr lang="en-US" sz="2600" b="1" dirty="0">
+                <a:solidFill>
+                  <a:srgbClr val="0E3A5F"/>
+                </a:solidFill>
+                <a:latin typeface="Calibri" pitchFamily="34" charset="0"/>
+                <a:ea typeface="Calibri" pitchFamily="34" charset="-122"/>
+                <a:cs typeface="Calibri" pitchFamily="34" charset="-120"/>
+              </a:rPr>
+              <a:t>Board-Style Review</a:t>
+            </a:r>
+            <a:endParaRPr lang="en-US" sz="2600" dirty="0"/>
+          </a:p>
+        </p:txBody>
+      </p:sp>
+      <p:sp>
+        <p:nvSpPr>
+          <p:cNvPr id="4" name="Text 2"/>
+          <p:cNvSpPr/>
+          <p:nvPr/>
+        </p:nvSpPr>
+        <p:spPr>
+          <a:xfrm>
+            <a:off x="566928" y="1417320"/>
+            <a:ext cx="11057839" cy="914400"/>
+          </a:xfrm>
+          <a:prstGeom prst="rect">
+            <a:avLst/>
+          </a:prstGeom>
+          <a:noFill/>
+          <a:ln/>
+        </p:spPr>
+        <p:txBody>
+          <a:bodyPr wrap="square" lIns="0" tIns="0" rIns="0" bIns="0" rtlCol="0" anchor="t"/>
+          <a:lstStyle/>
+          <a:p>
+            <a:pPr algn="l" indent="0" marL="0">
+              <a:lnSpc>
+                <a:spcPct val="105000"/>
+              </a:lnSpc>
+              <a:buNone/>
+            </a:pPr>
+            <a:r>
+              <a:rPr lang="en-US" sz="1450" b="1" dirty="0">
+                <a:solidFill>
+                  <a:srgbClr val="1B2A38"/>
+                </a:solidFill>
+                <a:latin typeface="Calibri" pitchFamily="34" charset="0"/>
+                <a:ea typeface="Calibri" pitchFamily="34" charset="-122"/>
+                <a:cs typeface="Calibri" pitchFamily="34" charset="-120"/>
+              </a:rPr>
+              <a:t>On SPEP, a broad-based increase in the gamma region indicates:</a:t>
+            </a:r>
+            <a:endParaRPr lang="en-US" sz="1450" dirty="0"/>
+          </a:p>
+        </p:txBody>
+      </p:sp>
+      <p:sp>
+        <p:nvSpPr>
+          <p:cNvPr id="5" name="Text 3"/>
+          <p:cNvSpPr/>
+          <p:nvPr/>
+        </p:nvSpPr>
+        <p:spPr>
+          <a:xfrm>
+            <a:off x="658368" y="2395728"/>
+            <a:ext cx="6192390" cy="3017520"/>
+          </a:xfrm>
+          <a:prstGeom prst="rect">
+            <a:avLst/>
+          </a:prstGeom>
+          <a:noFill/>
+          <a:ln/>
+        </p:spPr>
+        <p:txBody>
+          <a:bodyPr wrap="square" lIns="0" tIns="0" rIns="0" bIns="0" rtlCol="0" anchor="t"/>
+          <a:lstStyle/>
+          <a:p>
+            <a:pPr algn="l" indent="0" marL="0">
+              <a:spcAft>
+                <a:spcPts val="600"/>
+              </a:spcAft>
+              <a:buNone/>
+            </a:pPr>
+            <a:r>
+              <a:rPr lang="en-US" sz="1350" dirty="0">
+                <a:solidFill>
+                  <a:srgbClr val="33444F"/>
+                </a:solidFill>
+                <a:latin typeface="Calibri" pitchFamily="34" charset="0"/>
+                <a:ea typeface="Calibri" pitchFamily="34" charset="-122"/>
+                <a:cs typeface="Calibri" pitchFamily="34" charset="-120"/>
+              </a:rPr>
+              <a:t>A. Monoclonal gammopathy</a:t>
+            </a:r>
+            <a:endParaRPr lang="en-US" sz="1350" dirty="0"/>
+          </a:p>
+          <a:p>
+            <a:pPr algn="l" indent="0" marL="0">
+              <a:spcAft>
+                <a:spcPts val="600"/>
+              </a:spcAft>
+              <a:buNone/>
+            </a:pPr>
+            <a:r>
+              <a:rPr lang="en-US" sz="1350" b="1" dirty="0">
+                <a:solidFill>
+                  <a:srgbClr val="4A1269"/>
+                </a:solidFill>
+                <a:latin typeface="Calibri" pitchFamily="34" charset="0"/>
+                <a:ea typeface="Calibri" pitchFamily="34" charset="-122"/>
+                <a:cs typeface="Calibri" pitchFamily="34" charset="-120"/>
+              </a:rPr>
+              <a:t>B. Polyclonal increase (infection/inflammation/liver disease)</a:t>
+            </a:r>
+            <a:endParaRPr lang="en-US" sz="1350" dirty="0"/>
+          </a:p>
+          <a:p>
+            <a:pPr algn="l" indent="0" marL="0">
+              <a:spcAft>
+                <a:spcPts val="600"/>
+              </a:spcAft>
+              <a:buNone/>
+            </a:pPr>
+            <a:r>
+              <a:rPr lang="en-US" sz="1350" dirty="0">
+                <a:solidFill>
+                  <a:srgbClr val="33444F"/>
+                </a:solidFill>
+                <a:latin typeface="Calibri" pitchFamily="34" charset="0"/>
+                <a:ea typeface="Calibri" pitchFamily="34" charset="-122"/>
+                <a:cs typeface="Calibri" pitchFamily="34" charset="-120"/>
+              </a:rPr>
+              <a:t>C. Hypogammaglobulinemia</a:t>
+            </a:r>
+            <a:endParaRPr lang="en-US" sz="1350" dirty="0"/>
+          </a:p>
+          <a:p>
+            <a:pPr algn="l" indent="0" marL="0">
+              <a:spcAft>
+                <a:spcPts val="600"/>
+              </a:spcAft>
+              <a:buNone/>
+            </a:pPr>
+            <a:r>
+              <a:rPr lang="en-US" sz="1350" dirty="0">
+                <a:solidFill>
+                  <a:srgbClr val="33444F"/>
+                </a:solidFill>
+                <a:latin typeface="Calibri" pitchFamily="34" charset="0"/>
+                <a:ea typeface="Calibri" pitchFamily="34" charset="-122"/>
+                <a:cs typeface="Calibri" pitchFamily="34" charset="-120"/>
+              </a:rPr>
+              <a:t>D. Nephrotic syndrome</a:t>
+            </a:r>
+            <a:endParaRPr lang="en-US" sz="1350" dirty="0"/>
+          </a:p>
+          <a:p>
+            <a:pPr algn="l" indent="0" marL="0">
+              <a:spcAft>
+                <a:spcPts val="600"/>
+              </a:spcAft>
+              <a:buNone/>
+            </a:pPr>
+            <a:r>
+              <a:rPr lang="en-US" sz="1350" dirty="0">
+                <a:solidFill>
+                  <a:srgbClr val="33444F"/>
+                </a:solidFill>
+                <a:latin typeface="Calibri" pitchFamily="34" charset="0"/>
+                <a:ea typeface="Calibri" pitchFamily="34" charset="-122"/>
+                <a:cs typeface="Calibri" pitchFamily="34" charset="-120"/>
+              </a:rPr>
+              <a:t>E. Light-chain disease</a:t>
+            </a:r>
+            <a:endParaRPr lang="en-US" sz="1350" dirty="0"/>
+          </a:p>
+        </p:txBody>
+      </p:sp>
+      <p:sp>
+        <p:nvSpPr>
+          <p:cNvPr id="6" name="Shape 4"/>
+          <p:cNvSpPr/>
+          <p:nvPr/>
+        </p:nvSpPr>
+        <p:spPr>
+          <a:xfrm>
+            <a:off x="7201632" y="2395728"/>
+            <a:ext cx="4423136" cy="3246120"/>
+          </a:xfrm>
+          <a:prstGeom prst="roundRect">
+            <a:avLst>
+              <a:gd name="adj" fmla="val 2535"/>
+            </a:avLst>
+          </a:prstGeom>
+          <a:solidFill>
+            <a:srgbClr val="F1E8F7"/>
+          </a:solidFill>
+          <a:ln/>
+          <a:effectLst>
+            <a:outerShdw sx="100000" sy="100000" kx="0" ky="0" algn="bl" rotWithShape="0" blurRad="88900" dist="25400" dir="5400000">
+              <a:srgbClr val="22303C">
+                <a:alpha val="12000"/>
+              </a:srgbClr>
+            </a:outerShdw>
+          </a:effectLst>
+        </p:spPr>
+        <p:txBody>
+          <a:bodyPr/>
+          <a:p/>
+        </p:txBody>
+      </p:sp>
+      <p:sp>
+        <p:nvSpPr>
+          <p:cNvPr id="7" name="Text 5"/>
+          <p:cNvSpPr/>
+          <p:nvPr/>
+        </p:nvSpPr>
+        <p:spPr>
+          <a:xfrm>
+            <a:off x="7439376" y="2578608"/>
+            <a:ext cx="3965936" cy="457200"/>
+          </a:xfrm>
+          <a:prstGeom prst="rect">
+            <a:avLst/>
+          </a:prstGeom>
+          <a:noFill/>
+          <a:ln/>
+        </p:spPr>
+        <p:txBody>
+          <a:bodyPr wrap="square" lIns="0" tIns="0" rIns="0" bIns="0" rtlCol="0" anchor="ctr"/>
+          <a:lstStyle/>
+          <a:p>
+            <a:pPr indent="0" marL="0">
+              <a:buNone/>
+            </a:pPr>
+            <a:r>
+              <a:rPr lang="en-US" sz="1500" b="1" dirty="0">
+                <a:solidFill>
+                  <a:srgbClr val="6A1B9A"/>
+                </a:solidFill>
+                <a:latin typeface="Calibri" pitchFamily="34" charset="0"/>
+                <a:ea typeface="Calibri" pitchFamily="34" charset="-122"/>
+                <a:cs typeface="Calibri" pitchFamily="34" charset="-120"/>
+              </a:rPr>
+              <a:t>ANSWER  </a:t>
+            </a:r>
+            <a:pPr indent="0" marL="0">
+              <a:buNone/>
+            </a:pPr>
+            <a:r>
+              <a:rPr lang="en-US" sz="1500" b="1" dirty="0">
+                <a:solidFill>
+                  <a:srgbClr val="1B2A38"/>
+                </a:solidFill>
+                <a:latin typeface="Calibri" pitchFamily="34" charset="0"/>
+                <a:ea typeface="Calibri" pitchFamily="34" charset="-122"/>
+                <a:cs typeface="Calibri" pitchFamily="34" charset="-120"/>
+              </a:rPr>
+              <a:t>B — Polyclonal increase</a:t>
+            </a:r>
+            <a:endParaRPr lang="en-US" sz="1500" dirty="0"/>
+          </a:p>
+        </p:txBody>
+      </p:sp>
+      <p:sp>
+        <p:nvSpPr>
+          <p:cNvPr id="8" name="Text 6"/>
+          <p:cNvSpPr/>
+          <p:nvPr/>
+        </p:nvSpPr>
+        <p:spPr>
+          <a:xfrm>
+            <a:off x="7439376" y="3127248"/>
+            <a:ext cx="3947648" cy="2377440"/>
+          </a:xfrm>
+          <a:prstGeom prst="rect">
+            <a:avLst/>
+          </a:prstGeom>
+          <a:noFill/>
+          <a:ln/>
+        </p:spPr>
+        <p:txBody>
+          <a:bodyPr wrap="square" lIns="0" tIns="0" rIns="0" bIns="0" rtlCol="0" anchor="t"/>
+          <a:lstStyle/>
+          <a:p>
+            <a:pPr algn="l" indent="0" marL="0">
+              <a:lnSpc>
+                <a:spcPct val="108000"/>
+              </a:lnSpc>
+              <a:buNone/>
+            </a:pPr>
+            <a:r>
+              <a:rPr lang="en-US" sz="1250" dirty="0">
+                <a:solidFill>
+                  <a:srgbClr val="33444F"/>
+                </a:solidFill>
+                <a:latin typeface="Calibri" pitchFamily="34" charset="0"/>
+                <a:ea typeface="Calibri" pitchFamily="34" charset="-122"/>
+                <a:cs typeface="Calibri" pitchFamily="34" charset="-120"/>
+              </a:rPr>
+              <a:t>A broad gamma rise reflects polyclonal immunoglobulin from infection, inflammation, or liver disease; a discrete spike suggests monoclonality.</a:t>
+            </a:r>
+            <a:endParaRPr lang="en-US" sz="1250" dirty="0"/>
+          </a:p>
+        </p:txBody>
+      </p:sp>
+      <p:sp>
+        <p:nvSpPr>
+          <p:cNvPr id="9" name="Text 7"/>
+          <p:cNvSpPr/>
+          <p:nvPr/>
+        </p:nvSpPr>
+        <p:spPr>
+          <a:xfrm>
+            <a:off x="566928" y="6473952"/>
+            <a:ext cx="7772400" cy="274320"/>
+          </a:xfrm>
+          <a:prstGeom prst="rect">
+            <a:avLst/>
+          </a:prstGeom>
+          <a:noFill/>
+          <a:ln/>
+        </p:spPr>
+        <p:txBody>
+          <a:bodyPr wrap="square" lIns="0" tIns="0" rIns="0" bIns="0" rtlCol="0" anchor="ctr"/>
+          <a:lstStyle/>
+          <a:p>
+            <a:pPr algn="l" indent="0" marL="0">
+              <a:buNone/>
+            </a:pPr>
+            <a:r>
+              <a:rPr lang="en-US" sz="850" dirty="0">
+                <a:solidFill>
+                  <a:srgbClr val="9AA8B4"/>
+                </a:solidFill>
+                <a:latin typeface="Calibri" pitchFamily="34" charset="0"/>
+                <a:ea typeface="Calibri" pitchFamily="34" charset="-122"/>
+                <a:cs typeface="Calibri" pitchFamily="34" charset="-120"/>
+              </a:rPr>
+              <a:t>Makassed General Hospital  ·  Department of Laboratory Medicine</a:t>
+            </a:r>
+            <a:endParaRPr lang="en-US" sz="850" dirty="0"/>
+          </a:p>
+        </p:txBody>
+      </p:sp>
+      <p:sp>
+        <p:nvSpPr>
+          <p:cNvPr id="10" name="Text 8"/>
+          <p:cNvSpPr/>
+          <p:nvPr/>
+        </p:nvSpPr>
+        <p:spPr>
+          <a:xfrm>
+            <a:off x="9814255" y="6473952"/>
+            <a:ext cx="1828800" cy="274320"/>
+          </a:xfrm>
+          <a:prstGeom prst="rect">
+            <a:avLst/>
+          </a:prstGeom>
+          <a:noFill/>
+          <a:ln/>
+        </p:spPr>
+        <p:txBody>
+          <a:bodyPr wrap="square" lIns="0" tIns="0" rIns="0" bIns="0" rtlCol="0" anchor="ctr"/>
+          <a:lstStyle/>
+          <a:p>
+            <a:pPr algn="r" indent="0" marL="0">
+              <a:buNone/>
+            </a:pPr>
+            <a:r>
+              <a:rPr lang="en-US" sz="850" dirty="0">
+                <a:solidFill>
+                  <a:srgbClr val="9AA8B4"/>
+                </a:solidFill>
+                <a:latin typeface="Calibri" pitchFamily="34" charset="0"/>
+                <a:ea typeface="Calibri" pitchFamily="34" charset="-122"/>
+                <a:cs typeface="Calibri" pitchFamily="34" charset="-120"/>
+              </a:rPr>
+              <a:t>CP Lecture Series</a:t>
+            </a:r>
+            <a:pPr algn="r" indent="0" marL="0">
+              <a:buNone/>
+            </a:pPr>
+            <a:r>
+              <a:rPr lang="en-US" sz="850" dirty="0">
+                <a:solidFill>
+                  <a:srgbClr val="DCE4EC"/>
+                </a:solidFill>
+                <a:latin typeface="Calibri" pitchFamily="34" charset="0"/>
+                <a:ea typeface="Calibri" pitchFamily="34" charset="-122"/>
+                <a:cs typeface="Calibri" pitchFamily="34" charset="-120"/>
+              </a:rPr>
+              <a:t>   ·   </a:t>
+            </a:r>
+            <a:pPr algn="r" indent="0" marL="0">
+              <a:buNone/>
+            </a:pPr>
+            <a:r>
+              <a:rPr lang="en-US" sz="850" b="1" dirty="0">
+                <a:solidFill>
+                  <a:srgbClr val="6A1B9A"/>
+                </a:solidFill>
+                <a:latin typeface="Calibri" pitchFamily="34" charset="0"/>
+                <a:ea typeface="Calibri" pitchFamily="34" charset="-122"/>
+                <a:cs typeface="Calibri" pitchFamily="34" charset="-120"/>
+              </a:rPr>
+              <a:t>18</a:t>
+            </a:r>
+            <a:endParaRPr lang="en-US" sz="850" dirty="0"/>
+          </a:p>
+        </p:txBody>
+      </p:sp>
+    </p:spTree>
+  </p:cSld>
+  <p:clrMapOvr>
+    <a:masterClrMapping/>
+  </p:clrMapOvr>
+</p:sld>
+</file>
+
+<file path=ppt/slides/slide27.xml><?xml version="1.0" encoding="utf-8"?>
+<p:sld xmlns:a="http://schemas.openxmlformats.org/drawingml/2006/main" xmlns:p="http://schemas.openxmlformats.org/presentationml/2006/main" xmlns:r="http://schemas.openxmlformats.org/officeDocument/2006/relationships">
+  <p:cSld>
+    <p:spTree>
+      <p:nvGrpSpPr>
+        <p:cNvPr id="1" name=""/>
+        <p:cNvGrpSpPr/>
+        <p:nvPr/>
+      </p:nvGrpSpPr>
+      <p:grpSpPr/>
+      <p:sp>
+        <p:nvSpPr>
+          <p:cNvPr id="2" name="Text 0"/>
+          <p:cNvSpPr/>
+          <p:nvPr/>
+        </p:nvSpPr>
+        <p:spPr>
+          <a:xfrm>
+            <a:off x="566928" y="329184"/>
+            <a:ext cx="10515600" cy="310896"/>
+          </a:xfrm>
+          <a:prstGeom prst="rect">
+            <a:avLst/>
+          </a:prstGeom>
+          <a:noFill/>
+          <a:ln/>
+        </p:spPr>
+        <p:txBody>
+          <a:bodyPr wrap="square" lIns="0" tIns="0" rIns="0" bIns="0" rtlCol="0" anchor="ctr"/>
+          <a:lstStyle/>
+          <a:p>
+            <a:pPr algn="l" indent="0" marL="0">
+              <a:buNone/>
+            </a:pPr>
+            <a:r>
+              <a:rPr lang="en-US" sz="1100" b="1" spc="150" kern="0" dirty="0">
+                <a:solidFill>
+                  <a:srgbClr val="6A1B9A"/>
+                </a:solidFill>
+                <a:latin typeface="Calibri" pitchFamily="34" charset="0"/>
+                <a:ea typeface="Calibri" pitchFamily="34" charset="-122"/>
+                <a:cs typeface="Calibri" pitchFamily="34" charset="-120"/>
+              </a:rPr>
+              <a:t>IMMUNOLOGY &amp; SEROLOGY   ·   BOARD REVIEW  ·  Q2</a:t>
+            </a:r>
+            <a:endParaRPr lang="en-US" sz="1100" dirty="0"/>
+          </a:p>
+        </p:txBody>
+      </p:sp>
+      <p:sp>
+        <p:nvSpPr>
+          <p:cNvPr id="3" name="Text 1"/>
+          <p:cNvSpPr/>
+          <p:nvPr/>
+        </p:nvSpPr>
+        <p:spPr>
+          <a:xfrm>
+            <a:off x="566928" y="713232"/>
+            <a:ext cx="11064240" cy="749808"/>
+          </a:xfrm>
+          <a:prstGeom prst="rect">
+            <a:avLst/>
+          </a:prstGeom>
+          <a:noFill/>
+          <a:ln/>
+        </p:spPr>
+        <p:txBody>
+          <a:bodyPr wrap="square" lIns="0" tIns="0" rIns="0" bIns="0" rtlCol="0" anchor="ctr"/>
+          <a:lstStyle/>
+          <a:p>
+            <a:pPr algn="l" indent="0" marL="0">
+              <a:buNone/>
+            </a:pPr>
+            <a:r>
+              <a:rPr lang="en-US" sz="2600" b="1" dirty="0">
+                <a:solidFill>
+                  <a:srgbClr val="0E3A5F"/>
+                </a:solidFill>
+                <a:latin typeface="Calibri" pitchFamily="34" charset="0"/>
+                <a:ea typeface="Calibri" pitchFamily="34" charset="-122"/>
+                <a:cs typeface="Calibri" pitchFamily="34" charset="-120"/>
+              </a:rPr>
+              <a:t>Board-Style Review</a:t>
+            </a:r>
+            <a:endParaRPr lang="en-US" sz="2600" dirty="0"/>
+          </a:p>
+        </p:txBody>
+      </p:sp>
+      <p:sp>
+        <p:nvSpPr>
+          <p:cNvPr id="4" name="Text 2"/>
+          <p:cNvSpPr/>
+          <p:nvPr/>
+        </p:nvSpPr>
+        <p:spPr>
+          <a:xfrm>
+            <a:off x="566928" y="1417320"/>
+            <a:ext cx="11057839" cy="914400"/>
+          </a:xfrm>
+          <a:prstGeom prst="rect">
+            <a:avLst/>
+          </a:prstGeom>
+          <a:noFill/>
+          <a:ln/>
+        </p:spPr>
+        <p:txBody>
+          <a:bodyPr wrap="square" lIns="0" tIns="0" rIns="0" bIns="0" rtlCol="0" anchor="t"/>
+          <a:lstStyle/>
+          <a:p>
+            <a:pPr algn="l" indent="0" marL="0">
+              <a:lnSpc>
+                <a:spcPct val="105000"/>
+              </a:lnSpc>
+              <a:buNone/>
+            </a:pPr>
+            <a:r>
+              <a:rPr lang="en-US" sz="1450" b="1" dirty="0">
+                <a:solidFill>
+                  <a:srgbClr val="1B2A38"/>
+                </a:solidFill>
+                <a:latin typeface="Calibri" pitchFamily="34" charset="0"/>
+                <a:ea typeface="Calibri" pitchFamily="34" charset="-122"/>
+                <a:cs typeface="Calibri" pitchFamily="34" charset="-120"/>
+              </a:rPr>
+              <a:t>The best initial functional test of humoral immunity is:</a:t>
+            </a:r>
+            <a:endParaRPr lang="en-US" sz="1450" dirty="0"/>
+          </a:p>
+        </p:txBody>
+      </p:sp>
+      <p:sp>
+        <p:nvSpPr>
+          <p:cNvPr id="5" name="Text 3"/>
+          <p:cNvSpPr/>
+          <p:nvPr/>
+        </p:nvSpPr>
+        <p:spPr>
+          <a:xfrm>
+            <a:off x="658368" y="2395728"/>
+            <a:ext cx="6192390" cy="3017520"/>
+          </a:xfrm>
+          <a:prstGeom prst="rect">
+            <a:avLst/>
+          </a:prstGeom>
+          <a:noFill/>
+          <a:ln/>
+        </p:spPr>
+        <p:txBody>
+          <a:bodyPr wrap="square" lIns="0" tIns="0" rIns="0" bIns="0" rtlCol="0" anchor="t"/>
+          <a:lstStyle/>
+          <a:p>
+            <a:pPr algn="l" indent="0" marL="0">
+              <a:spcAft>
+                <a:spcPts val="600"/>
+              </a:spcAft>
+              <a:buNone/>
+            </a:pPr>
+            <a:r>
+              <a:rPr lang="en-US" sz="1350" dirty="0">
+                <a:solidFill>
+                  <a:srgbClr val="33444F"/>
+                </a:solidFill>
+                <a:latin typeface="Calibri" pitchFamily="34" charset="0"/>
+                <a:ea typeface="Calibri" pitchFamily="34" charset="-122"/>
+                <a:cs typeface="Calibri" pitchFamily="34" charset="-120"/>
+              </a:rPr>
+              <a:t>A. Total IgE</a:t>
+            </a:r>
+            <a:endParaRPr lang="en-US" sz="1350" dirty="0"/>
+          </a:p>
+          <a:p>
+            <a:pPr algn="l" indent="0" marL="0">
+              <a:spcAft>
+                <a:spcPts val="600"/>
+              </a:spcAft>
+              <a:buNone/>
+            </a:pPr>
+            <a:r>
+              <a:rPr lang="en-US" sz="1350" b="1" dirty="0">
+                <a:solidFill>
+                  <a:srgbClr val="4A1269"/>
+                </a:solidFill>
+                <a:latin typeface="Calibri" pitchFamily="34" charset="0"/>
+                <a:ea typeface="Calibri" pitchFamily="34" charset="-122"/>
+                <a:cs typeface="Calibri" pitchFamily="34" charset="-120"/>
+              </a:rPr>
+              <a:t>B. Vaccine (antibody) response titers</a:t>
+            </a:r>
+            <a:endParaRPr lang="en-US" sz="1350" dirty="0"/>
+          </a:p>
+          <a:p>
+            <a:pPr algn="l" indent="0" marL="0">
+              <a:spcAft>
+                <a:spcPts val="600"/>
+              </a:spcAft>
+              <a:buNone/>
+            </a:pPr>
+            <a:r>
+              <a:rPr lang="en-US" sz="1350" dirty="0">
+                <a:solidFill>
+                  <a:srgbClr val="33444F"/>
+                </a:solidFill>
+                <a:latin typeface="Calibri" pitchFamily="34" charset="0"/>
+                <a:ea typeface="Calibri" pitchFamily="34" charset="-122"/>
+                <a:cs typeface="Calibri" pitchFamily="34" charset="-120"/>
+              </a:rPr>
+              <a:t>C. CH50</a:t>
+            </a:r>
+            <a:endParaRPr lang="en-US" sz="1350" dirty="0"/>
+          </a:p>
+          <a:p>
+            <a:pPr algn="l" indent="0" marL="0">
+              <a:spcAft>
+                <a:spcPts val="600"/>
+              </a:spcAft>
+              <a:buNone/>
+            </a:pPr>
+            <a:r>
+              <a:rPr lang="en-US" sz="1350" dirty="0">
+                <a:solidFill>
+                  <a:srgbClr val="33444F"/>
+                </a:solidFill>
+                <a:latin typeface="Calibri" pitchFamily="34" charset="0"/>
+                <a:ea typeface="Calibri" pitchFamily="34" charset="-122"/>
+                <a:cs typeface="Calibri" pitchFamily="34" charset="-120"/>
+              </a:rPr>
+              <a:t>D. Lymphocyte subsets</a:t>
+            </a:r>
+            <a:endParaRPr lang="en-US" sz="1350" dirty="0"/>
+          </a:p>
+          <a:p>
+            <a:pPr algn="l" indent="0" marL="0">
+              <a:spcAft>
+                <a:spcPts val="600"/>
+              </a:spcAft>
+              <a:buNone/>
+            </a:pPr>
+            <a:r>
+              <a:rPr lang="en-US" sz="1350" dirty="0">
+                <a:solidFill>
+                  <a:srgbClr val="33444F"/>
+                </a:solidFill>
+                <a:latin typeface="Calibri" pitchFamily="34" charset="0"/>
+                <a:ea typeface="Calibri" pitchFamily="34" charset="-122"/>
+                <a:cs typeface="Calibri" pitchFamily="34" charset="-120"/>
+              </a:rPr>
+              <a:t>E. SPEP</a:t>
+            </a:r>
+            <a:endParaRPr lang="en-US" sz="1350" dirty="0"/>
+          </a:p>
+        </p:txBody>
+      </p:sp>
+      <p:sp>
+        <p:nvSpPr>
+          <p:cNvPr id="6" name="Shape 4"/>
+          <p:cNvSpPr/>
+          <p:nvPr/>
+        </p:nvSpPr>
+        <p:spPr>
+          <a:xfrm>
+            <a:off x="7201632" y="2395728"/>
+            <a:ext cx="4423136" cy="3246120"/>
+          </a:xfrm>
+          <a:prstGeom prst="roundRect">
+            <a:avLst>
+              <a:gd name="adj" fmla="val 2535"/>
+            </a:avLst>
+          </a:prstGeom>
+          <a:solidFill>
+            <a:srgbClr val="F1E8F7"/>
+          </a:solidFill>
+          <a:ln/>
+          <a:effectLst>
+            <a:outerShdw sx="100000" sy="100000" kx="0" ky="0" algn="bl" rotWithShape="0" blurRad="88900" dist="25400" dir="5400000">
+              <a:srgbClr val="22303C">
+                <a:alpha val="12000"/>
+              </a:srgbClr>
+            </a:outerShdw>
+          </a:effectLst>
+        </p:spPr>
+        <p:txBody>
+          <a:bodyPr/>
+          <a:p/>
+        </p:txBody>
+      </p:sp>
+      <p:sp>
+        <p:nvSpPr>
+          <p:cNvPr id="7" name="Text 5"/>
+          <p:cNvSpPr/>
+          <p:nvPr/>
+        </p:nvSpPr>
+        <p:spPr>
+          <a:xfrm>
+            <a:off x="7439376" y="2578608"/>
+            <a:ext cx="3965936" cy="457200"/>
+          </a:xfrm>
+          <a:prstGeom prst="rect">
+            <a:avLst/>
+          </a:prstGeom>
+          <a:noFill/>
+          <a:ln/>
+        </p:spPr>
+        <p:txBody>
+          <a:bodyPr wrap="square" lIns="0" tIns="0" rIns="0" bIns="0" rtlCol="0" anchor="ctr"/>
+          <a:lstStyle/>
+          <a:p>
+            <a:pPr indent="0" marL="0">
+              <a:buNone/>
+            </a:pPr>
+            <a:r>
+              <a:rPr lang="en-US" sz="1500" b="1" dirty="0">
+                <a:solidFill>
+                  <a:srgbClr val="6A1B9A"/>
+                </a:solidFill>
+                <a:latin typeface="Calibri" pitchFamily="34" charset="0"/>
+                <a:ea typeface="Calibri" pitchFamily="34" charset="-122"/>
+                <a:cs typeface="Calibri" pitchFamily="34" charset="-120"/>
+              </a:rPr>
+              <a:t>ANSWER  </a:t>
+            </a:r>
+            <a:pPr indent="0" marL="0">
+              <a:buNone/>
+            </a:pPr>
+            <a:r>
+              <a:rPr lang="en-US" sz="1500" b="1" dirty="0">
+                <a:solidFill>
+                  <a:srgbClr val="1B2A38"/>
+                </a:solidFill>
+                <a:latin typeface="Calibri" pitchFamily="34" charset="0"/>
+                <a:ea typeface="Calibri" pitchFamily="34" charset="-122"/>
+                <a:cs typeface="Calibri" pitchFamily="34" charset="-120"/>
+              </a:rPr>
+              <a:t>B — Vaccine response titers</a:t>
+            </a:r>
+            <a:endParaRPr lang="en-US" sz="1500" dirty="0"/>
+          </a:p>
+        </p:txBody>
+      </p:sp>
+      <p:sp>
+        <p:nvSpPr>
+          <p:cNvPr id="8" name="Text 6"/>
+          <p:cNvSpPr/>
+          <p:nvPr/>
+        </p:nvSpPr>
+        <p:spPr>
+          <a:xfrm>
+            <a:off x="7439376" y="3127248"/>
+            <a:ext cx="3947648" cy="2377440"/>
+          </a:xfrm>
+          <a:prstGeom prst="rect">
+            <a:avLst/>
+          </a:prstGeom>
+          <a:noFill/>
+          <a:ln/>
+        </p:spPr>
+        <p:txBody>
+          <a:bodyPr wrap="square" lIns="0" tIns="0" rIns="0" bIns="0" rtlCol="0" anchor="t"/>
+          <a:lstStyle/>
+          <a:p>
+            <a:pPr algn="l" indent="0" marL="0">
+              <a:lnSpc>
+                <a:spcPct val="108000"/>
+              </a:lnSpc>
+              <a:buNone/>
+            </a:pPr>
+            <a:r>
+              <a:rPr lang="en-US" sz="1250" dirty="0">
+                <a:solidFill>
+                  <a:srgbClr val="33444F"/>
+                </a:solidFill>
+                <a:latin typeface="Calibri" pitchFamily="34" charset="0"/>
+                <a:ea typeface="Calibri" pitchFamily="34" charset="-122"/>
+                <a:cs typeface="Calibri" pitchFamily="34" charset="-120"/>
+              </a:rPr>
+              <a:t>Pre/post-vaccine antibody titers assess the ability to mount a protective humoral response.</a:t>
+            </a:r>
+            <a:endParaRPr lang="en-US" sz="1250" dirty="0"/>
+          </a:p>
+        </p:txBody>
+      </p:sp>
+      <p:sp>
+        <p:nvSpPr>
+          <p:cNvPr id="9" name="Text 7"/>
+          <p:cNvSpPr/>
+          <p:nvPr/>
+        </p:nvSpPr>
+        <p:spPr>
+          <a:xfrm>
+            <a:off x="566928" y="6473952"/>
+            <a:ext cx="7772400" cy="274320"/>
+          </a:xfrm>
+          <a:prstGeom prst="rect">
+            <a:avLst/>
+          </a:prstGeom>
+          <a:noFill/>
+          <a:ln/>
+        </p:spPr>
+        <p:txBody>
+          <a:bodyPr wrap="square" lIns="0" tIns="0" rIns="0" bIns="0" rtlCol="0" anchor="ctr"/>
+          <a:lstStyle/>
+          <a:p>
+            <a:pPr algn="l" indent="0" marL="0">
+              <a:buNone/>
+            </a:pPr>
+            <a:r>
+              <a:rPr lang="en-US" sz="850" dirty="0">
+                <a:solidFill>
+                  <a:srgbClr val="9AA8B4"/>
+                </a:solidFill>
+                <a:latin typeface="Calibri" pitchFamily="34" charset="0"/>
+                <a:ea typeface="Calibri" pitchFamily="34" charset="-122"/>
+                <a:cs typeface="Calibri" pitchFamily="34" charset="-120"/>
+              </a:rPr>
+              <a:t>Makassed General Hospital  ·  Department of Laboratory Medicine</a:t>
+            </a:r>
+            <a:endParaRPr lang="en-US" sz="850" dirty="0"/>
+          </a:p>
+        </p:txBody>
+      </p:sp>
+      <p:sp>
+        <p:nvSpPr>
+          <p:cNvPr id="10" name="Text 8"/>
+          <p:cNvSpPr/>
+          <p:nvPr/>
+        </p:nvSpPr>
+        <p:spPr>
+          <a:xfrm>
+            <a:off x="9814255" y="6473952"/>
+            <a:ext cx="1828800" cy="274320"/>
+          </a:xfrm>
+          <a:prstGeom prst="rect">
+            <a:avLst/>
+          </a:prstGeom>
+          <a:noFill/>
+          <a:ln/>
+        </p:spPr>
+        <p:txBody>
+          <a:bodyPr wrap="square" lIns="0" tIns="0" rIns="0" bIns="0" rtlCol="0" anchor="ctr"/>
+          <a:lstStyle/>
+          <a:p>
+            <a:pPr algn="r" indent="0" marL="0">
+              <a:buNone/>
+            </a:pPr>
+            <a:r>
+              <a:rPr lang="en-US" sz="850" dirty="0">
+                <a:solidFill>
+                  <a:srgbClr val="9AA8B4"/>
+                </a:solidFill>
+                <a:latin typeface="Calibri" pitchFamily="34" charset="0"/>
+                <a:ea typeface="Calibri" pitchFamily="34" charset="-122"/>
+                <a:cs typeface="Calibri" pitchFamily="34" charset="-120"/>
+              </a:rPr>
+              <a:t>CP Lecture Series</a:t>
+            </a:r>
+            <a:pPr algn="r" indent="0" marL="0">
+              <a:buNone/>
+            </a:pPr>
+            <a:r>
+              <a:rPr lang="en-US" sz="850" dirty="0">
+                <a:solidFill>
+                  <a:srgbClr val="DCE4EC"/>
+                </a:solidFill>
+                <a:latin typeface="Calibri" pitchFamily="34" charset="0"/>
+                <a:ea typeface="Calibri" pitchFamily="34" charset="-122"/>
+                <a:cs typeface="Calibri" pitchFamily="34" charset="-120"/>
+              </a:rPr>
+              <a:t>   ·   </a:t>
+            </a:r>
+            <a:pPr algn="r" indent="0" marL="0">
+              <a:buNone/>
+            </a:pPr>
+            <a:r>
+              <a:rPr lang="en-US" sz="850" b="1" dirty="0">
+                <a:solidFill>
+                  <a:srgbClr val="6A1B9A"/>
+                </a:solidFill>
+                <a:latin typeface="Calibri" pitchFamily="34" charset="0"/>
+                <a:ea typeface="Calibri" pitchFamily="34" charset="-122"/>
+                <a:cs typeface="Calibri" pitchFamily="34" charset="-120"/>
+              </a:rPr>
+              <a:t>17</a:t>
+            </a:r>
+            <a:endParaRPr lang="en-US" sz="850" dirty="0"/>
+          </a:p>
+        </p:txBody>
+      </p:sp>
+    </p:spTree>
+  </p:cSld>
+  <p:clrMapOvr>
+    <a:masterClrMapping/>
+  </p:clrMapOvr>
+</p:sld>
+</file>
+
+<file path=ppt/slides/slide28.xml><?xml version="1.0" encoding="utf-8"?>
+<p:sld xmlns:a="http://schemas.openxmlformats.org/drawingml/2006/main" xmlns:p="http://schemas.openxmlformats.org/presentationml/2006/main" xmlns:r="http://schemas.openxmlformats.org/officeDocument/2006/relationships">
+  <p:cSld>
+    <p:spTree>
+      <p:nvGrpSpPr>
+        <p:cNvPr id="1" name=""/>
+        <p:cNvGrpSpPr/>
+        <p:nvPr/>
+      </p:nvGrpSpPr>
+      <p:grpSpPr/>
+      <p:sp>
+        <p:nvSpPr>
+          <p:cNvPr id="2" name="Text 0"/>
+          <p:cNvSpPr/>
+          <p:nvPr/>
+        </p:nvSpPr>
+        <p:spPr>
+          <a:xfrm>
+            <a:off x="566928" y="329184"/>
+            <a:ext cx="10515600" cy="310896"/>
+          </a:xfrm>
+          <a:prstGeom prst="rect">
+            <a:avLst/>
+          </a:prstGeom>
+          <a:noFill/>
+          <a:ln/>
+        </p:spPr>
+        <p:txBody>
+          <a:bodyPr wrap="square" lIns="0" tIns="0" rIns="0" bIns="0" rtlCol="0" anchor="ctr"/>
+          <a:lstStyle/>
+          <a:p>
+            <a:pPr algn="l" indent="0" marL="0">
+              <a:buNone/>
+            </a:pPr>
+            <a:r>
+              <a:rPr lang="en-US" sz="1100" b="1" spc="150" kern="0" dirty="0">
+                <a:solidFill>
+                  <a:srgbClr val="6A1B9A"/>
+                </a:solidFill>
+                <a:latin typeface="Calibri" pitchFamily="34" charset="0"/>
+                <a:ea typeface="Calibri" pitchFamily="34" charset="-122"/>
+                <a:cs typeface="Calibri" pitchFamily="34" charset="-120"/>
+              </a:rPr>
+              <a:t>IMMUNOLOGY &amp; SEROLOGY   ·   BOARD REVIEW  ·  Q1</a:t>
+            </a:r>
+            <a:endParaRPr lang="en-US" sz="1100" dirty="0"/>
+          </a:p>
+        </p:txBody>
+      </p:sp>
+      <p:sp>
+        <p:nvSpPr>
+          <p:cNvPr id="3" name="Text 1"/>
+          <p:cNvSpPr/>
+          <p:nvPr/>
+        </p:nvSpPr>
+        <p:spPr>
+          <a:xfrm>
+            <a:off x="566928" y="713232"/>
+            <a:ext cx="11064240" cy="749808"/>
+          </a:xfrm>
+          <a:prstGeom prst="rect">
+            <a:avLst/>
+          </a:prstGeom>
+          <a:noFill/>
+          <a:ln/>
+        </p:spPr>
+        <p:txBody>
+          <a:bodyPr wrap="square" lIns="0" tIns="0" rIns="0" bIns="0" rtlCol="0" anchor="ctr"/>
+          <a:lstStyle/>
+          <a:p>
+            <a:pPr algn="l" indent="0" marL="0">
+              <a:buNone/>
+            </a:pPr>
+            <a:r>
+              <a:rPr lang="en-US" sz="2600" b="1" dirty="0">
+                <a:solidFill>
+                  <a:srgbClr val="0E3A5F"/>
+                </a:solidFill>
+                <a:latin typeface="Calibri" pitchFamily="34" charset="0"/>
+                <a:ea typeface="Calibri" pitchFamily="34" charset="-122"/>
+                <a:cs typeface="Calibri" pitchFamily="34" charset="-120"/>
+              </a:rPr>
+              <a:t>Board-Style Review</a:t>
+            </a:r>
+            <a:endParaRPr lang="en-US" sz="2600" dirty="0"/>
+          </a:p>
+        </p:txBody>
+      </p:sp>
+      <p:sp>
+        <p:nvSpPr>
+          <p:cNvPr id="4" name="Text 2"/>
+          <p:cNvSpPr/>
+          <p:nvPr/>
+        </p:nvSpPr>
+        <p:spPr>
+          <a:xfrm>
+            <a:off x="566928" y="1417320"/>
+            <a:ext cx="11057839" cy="914400"/>
+          </a:xfrm>
+          <a:prstGeom prst="rect">
+            <a:avLst/>
+          </a:prstGeom>
+          <a:noFill/>
+          <a:ln/>
+        </p:spPr>
+        <p:txBody>
+          <a:bodyPr wrap="square" lIns="0" tIns="0" rIns="0" bIns="0" rtlCol="0" anchor="t"/>
+          <a:lstStyle/>
+          <a:p>
+            <a:pPr algn="l" indent="0" marL="0">
+              <a:lnSpc>
+                <a:spcPct val="105000"/>
+              </a:lnSpc>
+              <a:buNone/>
+            </a:pPr>
+            <a:r>
+              <a:rPr lang="en-US" sz="1450" b="1" dirty="0">
+                <a:solidFill>
+                  <a:srgbClr val="1B2A38"/>
+                </a:solidFill>
+                <a:latin typeface="Calibri" pitchFamily="34" charset="0"/>
+                <a:ea typeface="Calibri" pitchFamily="34" charset="-122"/>
+                <a:cs typeface="Calibri" pitchFamily="34" charset="-120"/>
+              </a:rPr>
+              <a:t>A positive allergen-specific IgE indicates:</a:t>
+            </a:r>
+            <a:endParaRPr lang="en-US" sz="1450" dirty="0"/>
+          </a:p>
+        </p:txBody>
+      </p:sp>
+      <p:sp>
+        <p:nvSpPr>
+          <p:cNvPr id="5" name="Text 3"/>
+          <p:cNvSpPr/>
+          <p:nvPr/>
+        </p:nvSpPr>
+        <p:spPr>
+          <a:xfrm>
+            <a:off x="658368" y="2395728"/>
+            <a:ext cx="6192390" cy="3017520"/>
+          </a:xfrm>
+          <a:prstGeom prst="rect">
+            <a:avLst/>
+          </a:prstGeom>
+          <a:noFill/>
+          <a:ln/>
+        </p:spPr>
+        <p:txBody>
+          <a:bodyPr wrap="square" lIns="0" tIns="0" rIns="0" bIns="0" rtlCol="0" anchor="t"/>
+          <a:lstStyle/>
+          <a:p>
+            <a:pPr algn="l" indent="0" marL="0">
+              <a:spcAft>
+                <a:spcPts val="600"/>
+              </a:spcAft>
+              <a:buNone/>
+            </a:pPr>
+            <a:r>
+              <a:rPr lang="en-US" sz="1350" dirty="0">
+                <a:solidFill>
+                  <a:srgbClr val="33444F"/>
+                </a:solidFill>
+                <a:latin typeface="Calibri" pitchFamily="34" charset="0"/>
+                <a:ea typeface="Calibri" pitchFamily="34" charset="-122"/>
+                <a:cs typeface="Calibri" pitchFamily="34" charset="-120"/>
+              </a:rPr>
+              <a:t>A. Definite clinical allergy</a:t>
+            </a:r>
+            <a:endParaRPr lang="en-US" sz="1350" dirty="0"/>
+          </a:p>
+          <a:p>
+            <a:pPr algn="l" indent="0" marL="0">
+              <a:spcAft>
+                <a:spcPts val="600"/>
+              </a:spcAft>
+              <a:buNone/>
+            </a:pPr>
+            <a:r>
+              <a:rPr lang="en-US" sz="1350" b="1" dirty="0">
+                <a:solidFill>
+                  <a:srgbClr val="4A1269"/>
+                </a:solidFill>
+                <a:latin typeface="Calibri" pitchFamily="34" charset="0"/>
+                <a:ea typeface="Calibri" pitchFamily="34" charset="-122"/>
+                <a:cs typeface="Calibri" pitchFamily="34" charset="-120"/>
+              </a:rPr>
+              <a:t>B. Sensitization, meaningful only with a matching history</a:t>
+            </a:r>
+            <a:endParaRPr lang="en-US" sz="1350" dirty="0"/>
+          </a:p>
+          <a:p>
+            <a:pPr algn="l" indent="0" marL="0">
+              <a:spcAft>
+                <a:spcPts val="600"/>
+              </a:spcAft>
+              <a:buNone/>
+            </a:pPr>
+            <a:r>
+              <a:rPr lang="en-US" sz="1350" dirty="0">
+                <a:solidFill>
+                  <a:srgbClr val="33444F"/>
+                </a:solidFill>
+                <a:latin typeface="Calibri" pitchFamily="34" charset="0"/>
+                <a:ea typeface="Calibri" pitchFamily="34" charset="-122"/>
+                <a:cs typeface="Calibri" pitchFamily="34" charset="-120"/>
+              </a:rPr>
+              <a:t>C. Immunodeficiency</a:t>
+            </a:r>
+            <a:endParaRPr lang="en-US" sz="1350" dirty="0"/>
+          </a:p>
+          <a:p>
+            <a:pPr algn="l" indent="0" marL="0">
+              <a:spcAft>
+                <a:spcPts val="600"/>
+              </a:spcAft>
+              <a:buNone/>
+            </a:pPr>
+            <a:r>
+              <a:rPr lang="en-US" sz="1350" dirty="0">
+                <a:solidFill>
+                  <a:srgbClr val="33444F"/>
+                </a:solidFill>
+                <a:latin typeface="Calibri" pitchFamily="34" charset="0"/>
+                <a:ea typeface="Calibri" pitchFamily="34" charset="-122"/>
+                <a:cs typeface="Calibri" pitchFamily="34" charset="-120"/>
+              </a:rPr>
+              <a:t>D. Active infection</a:t>
+            </a:r>
+            <a:endParaRPr lang="en-US" sz="1350" dirty="0"/>
+          </a:p>
+          <a:p>
+            <a:pPr algn="l" indent="0" marL="0">
+              <a:spcAft>
+                <a:spcPts val="600"/>
+              </a:spcAft>
+              <a:buNone/>
+            </a:pPr>
+            <a:r>
+              <a:rPr lang="en-US" sz="1350" dirty="0">
+                <a:solidFill>
+                  <a:srgbClr val="33444F"/>
+                </a:solidFill>
+                <a:latin typeface="Calibri" pitchFamily="34" charset="0"/>
+                <a:ea typeface="Calibri" pitchFamily="34" charset="-122"/>
+                <a:cs typeface="Calibri" pitchFamily="34" charset="-120"/>
+              </a:rPr>
+              <a:t>E. Past infection</a:t>
+            </a:r>
+            <a:endParaRPr lang="en-US" sz="1350" dirty="0"/>
+          </a:p>
+        </p:txBody>
+      </p:sp>
+      <p:sp>
+        <p:nvSpPr>
+          <p:cNvPr id="6" name="Shape 4"/>
+          <p:cNvSpPr/>
+          <p:nvPr/>
+        </p:nvSpPr>
+        <p:spPr>
+          <a:xfrm>
+            <a:off x="7201632" y="2395728"/>
+            <a:ext cx="4423136" cy="3246120"/>
+          </a:xfrm>
+          <a:prstGeom prst="roundRect">
+            <a:avLst>
+              <a:gd name="adj" fmla="val 2535"/>
+            </a:avLst>
+          </a:prstGeom>
+          <a:solidFill>
+            <a:srgbClr val="F1E8F7"/>
+          </a:solidFill>
+          <a:ln/>
+          <a:effectLst>
+            <a:outerShdw sx="100000" sy="100000" kx="0" ky="0" algn="bl" rotWithShape="0" blurRad="88900" dist="25400" dir="5400000">
+              <a:srgbClr val="22303C">
+                <a:alpha val="12000"/>
+              </a:srgbClr>
+            </a:outerShdw>
+          </a:effectLst>
+        </p:spPr>
+        <p:txBody>
+          <a:bodyPr/>
+          <a:p/>
+        </p:txBody>
+      </p:sp>
+      <p:sp>
+        <p:nvSpPr>
+          <p:cNvPr id="7" name="Text 5"/>
+          <p:cNvSpPr/>
+          <p:nvPr/>
+        </p:nvSpPr>
+        <p:spPr>
+          <a:xfrm>
+            <a:off x="7439376" y="2578608"/>
+            <a:ext cx="3965936" cy="457200"/>
+          </a:xfrm>
+          <a:prstGeom prst="rect">
+            <a:avLst/>
+          </a:prstGeom>
+          <a:noFill/>
+          <a:ln/>
+        </p:spPr>
+        <p:txBody>
+          <a:bodyPr wrap="square" lIns="0" tIns="0" rIns="0" bIns="0" rtlCol="0" anchor="ctr"/>
+          <a:lstStyle/>
+          <a:p>
+            <a:pPr indent="0" marL="0">
+              <a:buNone/>
+            </a:pPr>
+            <a:r>
+              <a:rPr lang="en-US" sz="1500" b="1" dirty="0">
+                <a:solidFill>
+                  <a:srgbClr val="6A1B9A"/>
+                </a:solidFill>
+                <a:latin typeface="Calibri" pitchFamily="34" charset="0"/>
+                <a:ea typeface="Calibri" pitchFamily="34" charset="-122"/>
+                <a:cs typeface="Calibri" pitchFamily="34" charset="-120"/>
+              </a:rPr>
+              <a:t>ANSWER  </a:t>
+            </a:r>
+            <a:pPr indent="0" marL="0">
+              <a:buNone/>
+            </a:pPr>
+            <a:r>
+              <a:rPr lang="en-US" sz="1500" b="1" dirty="0">
+                <a:solidFill>
+                  <a:srgbClr val="1B2A38"/>
+                </a:solidFill>
+                <a:latin typeface="Calibri" pitchFamily="34" charset="0"/>
+                <a:ea typeface="Calibri" pitchFamily="34" charset="-122"/>
+                <a:cs typeface="Calibri" pitchFamily="34" charset="-120"/>
+              </a:rPr>
+              <a:t>B — Sensitization, needs history</a:t>
+            </a:r>
+            <a:endParaRPr lang="en-US" sz="1500" dirty="0"/>
+          </a:p>
+        </p:txBody>
+      </p:sp>
+      <p:sp>
+        <p:nvSpPr>
+          <p:cNvPr id="8" name="Text 6"/>
+          <p:cNvSpPr/>
+          <p:nvPr/>
+        </p:nvSpPr>
+        <p:spPr>
+          <a:xfrm>
+            <a:off x="7439376" y="3127248"/>
+            <a:ext cx="3947648" cy="2377440"/>
+          </a:xfrm>
+          <a:prstGeom prst="rect">
+            <a:avLst/>
+          </a:prstGeom>
+          <a:noFill/>
+          <a:ln/>
+        </p:spPr>
+        <p:txBody>
+          <a:bodyPr wrap="square" lIns="0" tIns="0" rIns="0" bIns="0" rtlCol="0" anchor="t"/>
+          <a:lstStyle/>
+          <a:p>
+            <a:pPr algn="l" indent="0" marL="0">
+              <a:lnSpc>
+                <a:spcPct val="108000"/>
+              </a:lnSpc>
+              <a:buNone/>
+            </a:pPr>
+            <a:r>
+              <a:rPr lang="en-US" sz="1250" dirty="0">
+                <a:solidFill>
+                  <a:srgbClr val="33444F"/>
+                </a:solidFill>
+                <a:latin typeface="Calibri" pitchFamily="34" charset="0"/>
+                <a:ea typeface="Calibri" pitchFamily="34" charset="-122"/>
+                <a:cs typeface="Calibri" pitchFamily="34" charset="-120"/>
+              </a:rPr>
+              <a:t>Specific IgE shows sensitization; clinical allergy requires a corresponding reaction history.</a:t>
+            </a:r>
+            <a:endParaRPr lang="en-US" sz="1250" dirty="0"/>
+          </a:p>
+        </p:txBody>
+      </p:sp>
+      <p:sp>
+        <p:nvSpPr>
+          <p:cNvPr id="9" name="Text 7"/>
+          <p:cNvSpPr/>
+          <p:nvPr/>
+        </p:nvSpPr>
+        <p:spPr>
+          <a:xfrm>
+            <a:off x="566928" y="6473952"/>
+            <a:ext cx="7772400" cy="274320"/>
+          </a:xfrm>
+          <a:prstGeom prst="rect">
+            <a:avLst/>
+          </a:prstGeom>
+          <a:noFill/>
+          <a:ln/>
+        </p:spPr>
+        <p:txBody>
+          <a:bodyPr wrap="square" lIns="0" tIns="0" rIns="0" bIns="0" rtlCol="0" anchor="ctr"/>
+          <a:lstStyle/>
+          <a:p>
+            <a:pPr algn="l" indent="0" marL="0">
+              <a:buNone/>
+            </a:pPr>
+            <a:r>
+              <a:rPr lang="en-US" sz="850" dirty="0">
+                <a:solidFill>
+                  <a:srgbClr val="9AA8B4"/>
+                </a:solidFill>
+                <a:latin typeface="Calibri" pitchFamily="34" charset="0"/>
+                <a:ea typeface="Calibri" pitchFamily="34" charset="-122"/>
+                <a:cs typeface="Calibri" pitchFamily="34" charset="-120"/>
+              </a:rPr>
+              <a:t>Makassed General Hospital  ·  Department of Laboratory Medicine</a:t>
+            </a:r>
+            <a:endParaRPr lang="en-US" sz="850" dirty="0"/>
+          </a:p>
+        </p:txBody>
+      </p:sp>
+      <p:sp>
+        <p:nvSpPr>
+          <p:cNvPr id="10" name="Text 8"/>
+          <p:cNvSpPr/>
+          <p:nvPr/>
+        </p:nvSpPr>
+        <p:spPr>
+          <a:xfrm>
+            <a:off x="9814255" y="6473952"/>
+            <a:ext cx="1828800" cy="274320"/>
+          </a:xfrm>
+          <a:prstGeom prst="rect">
+            <a:avLst/>
+          </a:prstGeom>
+          <a:noFill/>
+          <a:ln/>
+        </p:spPr>
+        <p:txBody>
+          <a:bodyPr wrap="square" lIns="0" tIns="0" rIns="0" bIns="0" rtlCol="0" anchor="ctr"/>
+          <a:lstStyle/>
+          <a:p>
+            <a:pPr algn="r" indent="0" marL="0">
+              <a:buNone/>
+            </a:pPr>
+            <a:r>
+              <a:rPr lang="en-US" sz="850" dirty="0">
+                <a:solidFill>
+                  <a:srgbClr val="9AA8B4"/>
+                </a:solidFill>
+                <a:latin typeface="Calibri" pitchFamily="34" charset="0"/>
+                <a:ea typeface="Calibri" pitchFamily="34" charset="-122"/>
+                <a:cs typeface="Calibri" pitchFamily="34" charset="-120"/>
+              </a:rPr>
+              <a:t>CP Lecture Series</a:t>
+            </a:r>
+            <a:pPr algn="r" indent="0" marL="0">
+              <a:buNone/>
+            </a:pPr>
+            <a:r>
+              <a:rPr lang="en-US" sz="850" dirty="0">
+                <a:solidFill>
+                  <a:srgbClr val="DCE4EC"/>
+                </a:solidFill>
+                <a:latin typeface="Calibri" pitchFamily="34" charset="0"/>
+                <a:ea typeface="Calibri" pitchFamily="34" charset="-122"/>
+                <a:cs typeface="Calibri" pitchFamily="34" charset="-120"/>
+              </a:rPr>
+              <a:t>   ·   </a:t>
+            </a:r>
+            <a:pPr algn="r" indent="0" marL="0">
+              <a:buNone/>
+            </a:pPr>
+            <a:r>
+              <a:rPr lang="en-US" sz="850" b="1" dirty="0">
+                <a:solidFill>
+                  <a:srgbClr val="6A1B9A"/>
+                </a:solidFill>
+                <a:latin typeface="Calibri" pitchFamily="34" charset="0"/>
+                <a:ea typeface="Calibri" pitchFamily="34" charset="-122"/>
+                <a:cs typeface="Calibri" pitchFamily="34" charset="-120"/>
+              </a:rPr>
+              <a:t>16</a:t>
+            </a:r>
+            <a:endParaRPr lang="en-US" sz="850" dirty="0"/>
+          </a:p>
+        </p:txBody>
+      </p:sp>
+    </p:spTree>
+  </p:cSld>
+  <p:clrMapOvr>
+    <a:masterClrMapping/>
+  </p:clrMapOvr>
+</p:sld>
+</file>
+
 <file path=ppt/slides/slide3.xml><?xml version="1.0" encoding="utf-8"?>
 <p:sld xmlns:a="http://schemas.openxmlformats.org/drawingml/2006/main" xmlns:r="http://schemas.openxmlformats.org/officeDocument/2006/relationships" xmlns:p="http://schemas.openxmlformats.org/presentationml/2006/main">
   <p:cSld name="Slide 3">
@@ -11149,6 +12765,10 @@
             </a:outerShdw>
           </a:effectLst>
         </p:spPr>
+        <p:txBody>
+          <a:bodyPr/>
+          <a:p/>
+        </p:txBody>
       </p:sp>
       <p:sp>
         <p:nvSpPr>
@@ -11176,6 +12796,10 @@
             </a:outerShdw>
           </a:effectLst>
         </p:spPr>
+        <p:txBody>
+          <a:bodyPr/>
+          <a:p/>
+        </p:txBody>
       </p:sp>
       <p:sp>
         <p:nvSpPr>
@@ -11283,6 +12907,10 @@
             </a:outerShdw>
           </a:effectLst>
         </p:spPr>
+        <p:txBody>
+          <a:bodyPr/>
+          <a:p/>
+        </p:txBody>
       </p:sp>
       <p:sp>
         <p:nvSpPr>
@@ -11310,6 +12938,10 @@
             </a:outerShdw>
           </a:effectLst>
         </p:spPr>
+        <p:txBody>
+          <a:bodyPr/>
+          <a:p/>
+        </p:txBody>
       </p:sp>
       <p:sp>
         <p:nvSpPr>
@@ -11417,6 +13049,10 @@
             </a:outerShdw>
           </a:effectLst>
         </p:spPr>
+        <p:txBody>
+          <a:bodyPr/>
+          <a:p/>
+        </p:txBody>
       </p:sp>
       <p:sp>
         <p:nvSpPr>
@@ -11444,6 +13080,10 @@
             </a:outerShdw>
           </a:effectLst>
         </p:spPr>
+        <p:txBody>
+          <a:bodyPr/>
+          <a:p/>
+        </p:txBody>
       </p:sp>
       <p:sp>
         <p:nvSpPr>
@@ -11551,6 +13191,10 @@
             </a:outerShdw>
           </a:effectLst>
         </p:spPr>
+        <p:txBody>
+          <a:bodyPr/>
+          <a:p/>
+        </p:txBody>
       </p:sp>
       <p:sp>
         <p:nvSpPr>
@@ -11578,6 +13222,10 @@
             </a:outerShdw>
           </a:effectLst>
         </p:spPr>
+        <p:txBody>
+          <a:bodyPr/>
+          <a:p/>
+        </p:txBody>
       </p:sp>
       <p:sp>
         <p:nvSpPr>
@@ -11685,6 +13333,10 @@
             </a:outerShdw>
           </a:effectLst>
         </p:spPr>
+        <p:txBody>
+          <a:bodyPr/>
+          <a:p/>
+        </p:txBody>
       </p:sp>
       <p:sp>
         <p:nvSpPr>
@@ -11712,6 +13364,10 @@
             </a:outerShdw>
           </a:effectLst>
         </p:spPr>
+        <p:txBody>
+          <a:bodyPr/>
+          <a:p/>
+        </p:txBody>
       </p:sp>
       <p:sp>
         <p:nvSpPr>
@@ -11819,6 +13475,10 @@
             </a:outerShdw>
           </a:effectLst>
         </p:spPr>
+        <p:txBody>
+          <a:bodyPr/>
+          <a:p/>
+        </p:txBody>
       </p:sp>
       <p:sp>
         <p:nvSpPr>
@@ -11846,6 +13506,10 @@
             </a:outerShdw>
           </a:effectLst>
         </p:spPr>
+        <p:txBody>
+          <a:bodyPr/>
+          <a:p/>
+        </p:txBody>
       </p:sp>
       <p:sp>
         <p:nvSpPr>
@@ -12169,6 +13833,10 @@
             </a:outerShdw>
           </a:effectLst>
         </p:spPr>
+        <p:txBody>
+          <a:bodyPr/>
+          <a:p/>
+        </p:txBody>
       </p:sp>
       <p:sp>
         <p:nvSpPr>
@@ -12196,6 +13864,10 @@
             </a:outerShdw>
           </a:effectLst>
         </p:spPr>
+        <p:txBody>
+          <a:bodyPr/>
+          <a:p/>
+        </p:txBody>
       </p:sp>
       <p:sp>
         <p:nvSpPr>
@@ -12310,6 +13982,10 @@
           </a:solidFill>
           <a:ln/>
         </p:spPr>
+        <p:txBody>
+          <a:bodyPr/>
+          <a:p/>
+        </p:txBody>
       </p:sp>
       <p:sp>
         <p:nvSpPr>
@@ -12337,6 +14013,10 @@
             </a:outerShdw>
           </a:effectLst>
         </p:spPr>
+        <p:txBody>
+          <a:bodyPr/>
+          <a:p/>
+        </p:txBody>
       </p:sp>
       <p:sp>
         <p:nvSpPr>
@@ -12458,6 +14138,10 @@
             </a:outerShdw>
           </a:effectLst>
         </p:spPr>
+        <p:txBody>
+          <a:bodyPr/>
+          <a:p/>
+        </p:txBody>
       </p:sp>
       <p:sp>
         <p:nvSpPr>
@@ -12485,6 +14169,10 @@
             </a:outerShdw>
           </a:effectLst>
         </p:spPr>
+        <p:txBody>
+          <a:bodyPr/>
+          <a:p/>
+        </p:txBody>
       </p:sp>
       <p:sp>
         <p:nvSpPr>
@@ -12599,6 +14287,10 @@
           </a:solidFill>
           <a:ln/>
         </p:spPr>
+        <p:txBody>
+          <a:bodyPr/>
+          <a:p/>
+        </p:txBody>
       </p:sp>
       <p:sp>
         <p:nvSpPr>
@@ -12626,6 +14318,10 @@
             </a:outerShdw>
           </a:effectLst>
         </p:spPr>
+        <p:txBody>
+          <a:bodyPr/>
+          <a:p/>
+        </p:txBody>
       </p:sp>
       <p:sp>
         <p:nvSpPr>
@@ -12747,6 +14443,10 @@
             </a:outerShdw>
           </a:effectLst>
         </p:spPr>
+        <p:txBody>
+          <a:bodyPr/>
+          <a:p/>
+        </p:txBody>
       </p:sp>
       <p:sp>
         <p:nvSpPr>
@@ -12774,6 +14474,10 @@
             </a:outerShdw>
           </a:effectLst>
         </p:spPr>
+        <p:txBody>
+          <a:bodyPr/>
+          <a:p/>
+        </p:txBody>
       </p:sp>
       <p:sp>
         <p:nvSpPr>
@@ -13012,6 +14716,10 @@
           </a:solidFill>
           <a:ln/>
         </p:spPr>
+        <p:txBody>
+          <a:bodyPr/>
+          <a:p/>
+        </p:txBody>
       </p:sp>
       <p:sp>
         <p:nvSpPr>
@@ -13034,6 +14742,10 @@
           </a:solidFill>
           <a:ln/>
         </p:spPr>
+        <p:txBody>
+          <a:bodyPr/>
+          <a:p/>
+        </p:txBody>
       </p:sp>
       <p:sp>
         <p:nvSpPr>
@@ -13295,6 +15007,10 @@
             </a:outerShdw>
           </a:effectLst>
         </p:spPr>
+        <p:txBody>
+          <a:bodyPr/>
+          <a:p/>
+        </p:txBody>
       </p:sp>
       <p:pic>
         <p:nvPicPr>
@@ -13603,6 +15319,10 @@
             </a:outerShdw>
           </a:effectLst>
         </p:spPr>
+        <p:txBody>
+          <a:bodyPr/>
+          <a:p/>
+        </p:txBody>
       </p:sp>
       <p:sp>
         <p:nvSpPr>
@@ -13777,6 +15497,10 @@
             </a:outerShdw>
           </a:effectLst>
         </p:spPr>
+        <p:txBody>
+          <a:bodyPr/>
+          <a:p/>
+        </p:txBody>
       </p:sp>
       <p:sp>
         <p:nvSpPr>
@@ -14082,6 +15806,10 @@
           </a:solidFill>
           <a:ln/>
         </p:spPr>
+        <p:txBody>
+          <a:bodyPr/>
+          <a:p/>
+        </p:txBody>
       </p:sp>
       <p:sp>
         <p:nvSpPr>
@@ -14104,6 +15832,10 @@
           </a:solidFill>
           <a:ln/>
         </p:spPr>
+        <p:txBody>
+          <a:bodyPr/>
+          <a:p/>
+        </p:txBody>
       </p:sp>
       <p:sp>
         <p:nvSpPr>
@@ -14365,6 +16097,10 @@
             </a:outerShdw>
           </a:effectLst>
         </p:spPr>
+        <p:txBody>
+          <a:bodyPr/>
+          <a:p/>
+        </p:txBody>
       </p:sp>
       <p:pic>
         <p:nvPicPr>
